--- a/_docs/2nd semester/week-4/Famigo_pitch_deck.pptx
+++ b/_docs/2nd semester/week-4/Famigo_pitch_deck.pptx
@@ -117,6 +117,500 @@
 </file>
 
 <file path=ppt/charts/chart1.xml><?xml version="1.0" encoding="utf-8"?>
+<c:chartSpace xmlns:c="http://schemas.openxmlformats.org/drawingml/2006/chart" xmlns:a="http://schemas.openxmlformats.org/drawingml/2006/main" xmlns:r="http://schemas.openxmlformats.org/officeDocument/2006/relationships">
+  <c:date1904 val="0"/>
+  <c:roundedCorners val="1"/>
+  <c:chart>
+    <c:autoTitleDeleted val="1"/>
+    <c:plotArea>
+      <c:layout/>
+      <c:barChart>
+        <c:barDir val="bar"/>
+        <c:grouping val="clustered"/>
+        <c:varyColors val="0"/>
+        <c:ser>
+          <c:idx val="0"/>
+          <c:order val="0"/>
+          <c:tx>
+            <c:strRef>
+              <c:f>Sheet1!$B$1</c:f>
+              <c:strCache>
+                <c:ptCount val="1"/>
+                <c:pt idx="0">
+                  <c:v>Посетители</c:v>
+                </c:pt>
+              </c:strCache>
+            </c:strRef>
+          </c:tx>
+          <c:spPr>
+            <a:solidFill>
+              <a:srgbClr val="667A55"/>
+            </a:solidFill>
+            <a:effectLst/>
+          </c:spPr>
+          <c:invertIfNegative val="0"/>
+          <c:dLbls>
+            <c:numFmt formatCode="#,##0" sourceLinked="0"/>
+            <c:txPr>
+              <a:bodyPr/>
+              <a:lstStyle/>
+              <a:p>
+                <a:pPr>
+                  <a:defRPr b="0" i="0" strike="noStrike" sz="1000" u="none">
+                    <a:solidFill>
+                      <a:srgbClr val="20221F"/>
+                    </a:solidFill>
+                    <a:latin typeface="Arial"/>
+                  </a:defRPr>
+                </a:pPr>
+              </a:p>
+            </c:txPr>
+            <c:showLegendKey val="0"/>
+            <c:showVal val="1"/>
+            <c:showCatName val="0"/>
+            <c:showSerName val="0"/>
+            <c:showPercent val="0"/>
+            <c:showBubbleSize val="0"/>
+            <c:showLeaderLines val="0"/>
+          </c:dLbls>
+          <c:cat>
+            <c:multiLvlStrRef>
+              <c:f>Sheet1!$A$2:$A$5</c:f>
+              <c:multiLvlStrCache>
+                <c:ptCount val="4"/>
+                <c:lvl>
+                  <c:pt idx="0">
+                    <c:v>Прямые заходы</c:v>
+                  </c:pt>
+                  <c:pt idx="1">
+                    <c:v>Сохран. страницы</c:v>
+                  </c:pt>
+                  <c:pt idx="2">
+                    <c:v>Ссылки на сайтах</c:v>
+                  </c:pt>
+                  <c:pt idx="3">
+                    <c:v>Поиск. системы</c:v>
+                  </c:pt>
+                </c:lvl>
+              </c:multiLvlStrCache>
+            </c:multiLvlStrRef>
+          </c:cat>
+          <c:val>
+            <c:numRef>
+              <c:f>Sheet1!$B$2:$B$5</c:f>
+              <c:numCache>
+                <c:formatCode>General</c:formatCode>
+                <c:ptCount val="4"/>
+                <c:pt idx="0">
+                  <c:v>9</c:v>
+                </c:pt>
+                <c:pt idx="1">
+                  <c:v>5</c:v>
+                </c:pt>
+                <c:pt idx="2">
+                  <c:v>4</c:v>
+                </c:pt>
+                <c:pt idx="3">
+                  <c:v>2</c:v>
+                </c:pt>
+              </c:numCache>
+            </c:numRef>
+          </c:val>
+        </c:ser>
+        <c:dLbls>
+          <c:numFmt formatCode="#,##0" sourceLinked="0"/>
+          <c:txPr>
+            <a:bodyPr/>
+            <a:lstStyle/>
+            <a:p>
+              <a:pPr>
+                <a:defRPr b="0" i="0" strike="noStrike" sz="1000" u="none">
+                  <a:solidFill>
+                    <a:srgbClr val="20221F"/>
+                  </a:solidFill>
+                  <a:latin typeface="Arial"/>
+                </a:defRPr>
+              </a:pPr>
+            </a:p>
+          </c:txPr>
+          <c:showLegendKey val="0"/>
+          <c:showVal val="1"/>
+          <c:showCatName val="0"/>
+          <c:showSerName val="0"/>
+          <c:showPercent val="0"/>
+          <c:showBubbleSize val="0"/>
+          <c:showLeaderLines val="0"/>
+        </c:dLbls>
+        <c:gapWidth val="35"/>
+        <c:overlap val="0"/>
+        <c:axId val="2094734554"/>
+        <c:axId val="2094734552"/>
+        <c:axId val="2094734556"/>
+      </c:barChart>
+      <c:catAx>
+        <c:axId val="2094734554"/>
+        <c:scaling>
+          <c:orientation val="minMax"/>
+        </c:scaling>
+        <c:delete val="0"/>
+        <c:axPos val="l"/>
+        <c:numFmt formatCode="General" sourceLinked="1"/>
+        <c:majorTickMark val="out"/>
+        <c:minorTickMark val="none"/>
+        <c:tickLblPos val="nextTo"/>
+        <c:spPr>
+          <a:ln w="12700" cap="flat">
+            <a:noFill/>
+            <a:prstDash val="solid"/>
+            <a:round/>
+          </a:ln>
+        </c:spPr>
+        <c:txPr>
+          <a:bodyPr/>
+          <a:lstStyle/>
+          <a:p>
+            <a:pPr>
+              <a:defRPr sz="950" b="0" i="0" u="none" strike="noStrike">
+                <a:solidFill>
+                  <a:srgbClr val="20221F"/>
+                </a:solidFill>
+                <a:latin typeface="Arial"/>
+              </a:defRPr>
+            </a:pPr>
+            <a:endParaRPr lang="en-US"/>
+          </a:p>
+        </c:txPr>
+        <c:crossAx val="2094734552"/>
+        <c:crosses val="autoZero"/>
+        <c:auto val="1"/>
+        <c:lblAlgn val="ctr"/>
+        <c:noMultiLvlLbl val="1"/>
+      </c:catAx>
+      <c:valAx>
+        <c:axId val="2094734552"/>
+        <c:scaling>
+          <c:orientation val="minMax"/>
+        </c:scaling>
+        <c:delete val="1"/>
+        <c:axPos val="b"/>
+        <c:numFmt formatCode="General" sourceLinked="0"/>
+        <c:majorTickMark val="out"/>
+        <c:minorTickMark val="none"/>
+        <c:tickLblPos val="low"/>
+        <c:spPr>
+          <a:ln w="12700" cap="flat">
+            <a:solidFill>
+              <a:srgbClr val="888888"/>
+            </a:solidFill>
+            <a:prstDash val="solid"/>
+            <a:round/>
+          </a:ln>
+        </c:spPr>
+        <c:txPr>
+          <a:bodyPr/>
+          <a:lstStyle/>
+          <a:p>
+            <a:pPr>
+              <a:defRPr sz="1200" b="0" i="0" u="none" strike="noStrike">
+                <a:solidFill>
+                  <a:srgbClr val="000000"/>
+                </a:solidFill>
+                <a:latin typeface="Arial"/>
+              </a:defRPr>
+            </a:pPr>
+            <a:endParaRPr lang="en-US"/>
+          </a:p>
+        </c:txPr>
+        <c:crossAx val="2094734554"/>
+        <c:crosses val="autoZero"/>
+        <c:crossBetween val="between"/>
+      </c:valAx>
+      <c:spPr>
+        <a:noFill/>
+        <a:ln>
+          <a:noFill/>
+        </a:ln>
+        <a:effectLst/>
+      </c:spPr>
+    </c:plotArea>
+    <c:plotVisOnly val="1"/>
+    <c:dispBlanksAs val="span"/>
+  </c:chart>
+  <c:spPr>
+    <a:solidFill>
+      <a:srgbClr val="FFFFFF"/>
+    </a:solidFill>
+    <a:ln>
+      <a:noFill/>
+    </a:ln>
+    <a:effectLst/>
+  </c:spPr>
+  <c:externalData r:id="rId1">
+    <c:autoUpdate val="0"/>
+  </c:externalData>
+</c:chartSpace>
+</file>
+
+<file path=ppt/charts/chart2.xml><?xml version="1.0" encoding="utf-8"?>
+<c:chartSpace xmlns:c="http://schemas.openxmlformats.org/drawingml/2006/chart" xmlns:a="http://schemas.openxmlformats.org/drawingml/2006/main" xmlns:r="http://schemas.openxmlformats.org/officeDocument/2006/relationships">
+  <c:date1904 val="0"/>
+  <c:roundedCorners val="1"/>
+  <c:chart>
+    <c:autoTitleDeleted val="1"/>
+    <c:plotArea>
+      <c:layout/>
+      <c:lineChart>
+        <c:varyColors val="0"/>
+        <c:ser>
+          <c:idx val="0"/>
+          <c:order val="0"/>
+          <c:tx>
+            <c:strRef>
+              <c:f>Sheet1!$B$1</c:f>
+              <c:strCache>
+                <c:ptCount val="1"/>
+                <c:pt idx="0">
+                  <c:v>Посетители</c:v>
+                </c:pt>
+              </c:strCache>
+            </c:strRef>
+          </c:tx>
+          <c:spPr>
+            <a:solidFill>
+              <a:srgbClr val="D38A62"/>
+            </a:solidFill>
+            <a:ln w="31750" cap="flat">
+              <a:solidFill>
+                <a:srgbClr val="D38A62"/>
+              </a:solidFill>
+              <a:prstDash val="solid"/>
+              <a:round/>
+            </a:ln>
+            <a:effectLst/>
+          </c:spPr>
+          <c:invertIfNegative val="0"/>
+          <c:dLbls>
+            <c:numFmt formatCode="#,##0" sourceLinked="0"/>
+            <c:txPr>
+              <a:bodyPr/>
+              <a:lstStyle/>
+              <a:p>
+                <a:pPr>
+                  <a:defRPr b="0" i="0" strike="noStrike" sz="1000" u="none">
+                    <a:solidFill>
+                      <a:srgbClr val="20221F"/>
+                    </a:solidFill>
+                    <a:latin typeface="Arial"/>
+                  </a:defRPr>
+                </a:pPr>
+              </a:p>
+            </c:txPr>
+            <c:dLblPos val="t"/>
+            <c:showLegendKey val="0"/>
+            <c:showVal val="1"/>
+            <c:showCatName val="0"/>
+            <c:showSerName val="0"/>
+            <c:showPercent val="0"/>
+            <c:showBubbleSize val="0"/>
+            <c:showLeaderLines val="0"/>
+          </c:dLbls>
+          <c:marker>
+            <c:symbol val="circle"/>
+            <c:size val="7"/>
+            <c:spPr>
+              <a:solidFill>
+                <a:srgbClr val="D38A62"/>
+              </a:solidFill>
+              <a:ln w="9525" cap="flat">
+                <a:solidFill>
+                  <a:srgbClr val="D38A62"/>
+                </a:solidFill>
+                <a:prstDash val="solid"/>
+                <a:round/>
+              </a:ln>
+              <a:effectLst/>
+            </c:spPr>
+          </c:marker>
+          <c:cat>
+            <c:multiLvlStrRef>
+              <c:f>Sheet1!$A$2:$A$5</c:f>
+              <c:multiLvlStrCache>
+                <c:ptCount val="4"/>
+                <c:lvl>
+                  <c:pt idx="0">
+                    <c:v>22.09</c:v>
+                  </c:pt>
+                  <c:pt idx="1">
+                    <c:v>23.09</c:v>
+                  </c:pt>
+                  <c:pt idx="2">
+                    <c:v>26.09</c:v>
+                  </c:pt>
+                  <c:pt idx="3">
+                    <c:v>28.09</c:v>
+                  </c:pt>
+                </c:lvl>
+              </c:multiLvlStrCache>
+            </c:multiLvlStrRef>
+          </c:cat>
+          <c:val>
+            <c:numRef>
+              <c:f>Sheet1!$B$2:$B$5</c:f>
+              <c:numCache>
+                <c:formatCode>General</c:formatCode>
+                <c:ptCount val="4"/>
+                <c:pt idx="0">
+                  <c:v>9</c:v>
+                </c:pt>
+                <c:pt idx="1">
+                  <c:v>1</c:v>
+                </c:pt>
+                <c:pt idx="2">
+                  <c:v>3</c:v>
+                </c:pt>
+                <c:pt idx="3">
+                  <c:v>8</c:v>
+                </c:pt>
+              </c:numCache>
+            </c:numRef>
+          </c:val>
+          <c:smooth val="0"/>
+        </c:ser>
+        <c:dLbls>
+          <c:numFmt formatCode="#,##0" sourceLinked="0"/>
+          <c:txPr>
+            <a:bodyPr/>
+            <a:lstStyle/>
+            <a:p>
+              <a:pPr>
+                <a:defRPr b="0" i="0" strike="noStrike" sz="1000" u="none">
+                  <a:solidFill>
+                    <a:srgbClr val="20221F"/>
+                  </a:solidFill>
+                  <a:latin typeface="Arial"/>
+                </a:defRPr>
+              </a:pPr>
+            </a:p>
+          </c:txPr>
+          <c:dLblPos val="t"/>
+          <c:showLegendKey val="0"/>
+          <c:showVal val="1"/>
+          <c:showCatName val="0"/>
+          <c:showSerName val="0"/>
+          <c:showPercent val="0"/>
+          <c:showBubbleSize val="0"/>
+          <c:showLeaderLines val="0"/>
+        </c:dLbls>
+        <c:marker val="1"/>
+        <c:axId val="2094734554"/>
+        <c:axId val="2094734552"/>
+        <c:axId val="2094734556"/>
+      </c:lineChart>
+      <c:catAx>
+        <c:axId val="2094734554"/>
+        <c:scaling>
+          <c:orientation val="minMax"/>
+        </c:scaling>
+        <c:delete val="0"/>
+        <c:axPos val="b"/>
+        <c:numFmt formatCode="General" sourceLinked="1"/>
+        <c:majorTickMark val="out"/>
+        <c:minorTickMark val="none"/>
+        <c:tickLblPos val="low"/>
+        <c:spPr>
+          <a:ln w="12700" cap="flat">
+            <a:noFill/>
+            <a:prstDash val="solid"/>
+            <a:round/>
+          </a:ln>
+        </c:spPr>
+        <c:txPr>
+          <a:bodyPr/>
+          <a:lstStyle/>
+          <a:p>
+            <a:pPr>
+              <a:defRPr sz="950" b="0" i="0" u="none" strike="noStrike">
+                <a:solidFill>
+                  <a:srgbClr val="20221F"/>
+                </a:solidFill>
+                <a:latin typeface="Arial"/>
+              </a:defRPr>
+            </a:pPr>
+            <a:endParaRPr lang="en-US"/>
+          </a:p>
+        </c:txPr>
+        <c:crossAx val="2094734552"/>
+        <c:crosses val="autoZero"/>
+        <c:auto val="1"/>
+        <c:lblAlgn val="ctr"/>
+        <c:noMultiLvlLbl val="1"/>
+      </c:catAx>
+      <c:valAx>
+        <c:axId val="2094734552"/>
+        <c:scaling>
+          <c:orientation val="minMax"/>
+        </c:scaling>
+        <c:delete val="1"/>
+        <c:axPos val="l"/>
+        <c:numFmt formatCode="General" sourceLinked="0"/>
+        <c:majorTickMark val="out"/>
+        <c:minorTickMark val="none"/>
+        <c:tickLblPos val="nextTo"/>
+        <c:spPr>
+          <a:ln w="12700" cap="flat">
+            <a:solidFill>
+              <a:srgbClr val="888888"/>
+            </a:solidFill>
+            <a:prstDash val="solid"/>
+            <a:round/>
+          </a:ln>
+        </c:spPr>
+        <c:txPr>
+          <a:bodyPr/>
+          <a:lstStyle/>
+          <a:p>
+            <a:pPr>
+              <a:defRPr sz="1200" b="0" i="0" u="none" strike="noStrike">
+                <a:solidFill>
+                  <a:srgbClr val="000000"/>
+                </a:solidFill>
+                <a:latin typeface="Arial"/>
+              </a:defRPr>
+            </a:pPr>
+            <a:endParaRPr lang="en-US"/>
+          </a:p>
+        </c:txPr>
+        <c:crossAx val="2094734554"/>
+        <c:crosses val="autoZero"/>
+        <c:crossBetween val="between"/>
+      </c:valAx>
+      <c:spPr>
+        <a:noFill/>
+        <a:ln>
+          <a:noFill/>
+        </a:ln>
+        <a:effectLst/>
+      </c:spPr>
+    </c:plotArea>
+    <c:plotVisOnly val="1"/>
+    <c:dispBlanksAs val="span"/>
+  </c:chart>
+  <c:spPr>
+    <a:solidFill>
+      <a:srgbClr val="FFFFFF"/>
+    </a:solidFill>
+    <a:ln>
+      <a:noFill/>
+    </a:ln>
+    <a:effectLst/>
+  </c:spPr>
+  <c:externalData r:id="rId1">
+    <c:autoUpdate val="0"/>
+  </c:externalData>
+</c:chartSpace>
+</file>
+
+<file path=ppt/charts/chart3.xml><?xml version="1.0" encoding="utf-8"?>
 <c:chartSpace xmlns:c="http://schemas.openxmlformats.org/drawingml/2006/chart" xmlns:a="http://schemas.openxmlformats.org/drawingml/2006/main" xmlns:r="http://schemas.openxmlformats.org/officeDocument/2006/relationships">
   <c:date1904 val="0"/>
   <c:roundedCorners val="1"/>
@@ -9058,7 +9552,7 @@
                 <a:ea typeface="Cambria" pitchFamily="34" charset="-122"/>
                 <a:cs typeface="Cambria" pitchFamily="34" charset="-120"/>
               </a:rPr>
-              <a:t>MVP в разработке, дальнейший путь определён</a:t>
+              <a:t>Лендинг запущен — есть первые посетители</a:t>
             </a:r>
             <a:endParaRPr lang="en-US" sz="3400" dirty="0"/>
           </a:p>
@@ -9073,7 +9567,7 @@
         <p:spPr>
           <a:xfrm>
             <a:off x="548640" y="1691640"/>
-            <a:ext cx="3246120" cy="365760"/>
+            <a:ext cx="3749040" cy="365760"/>
           </a:xfrm>
           <a:prstGeom prst="roundRect">
             <a:avLst>
@@ -9095,7 +9589,7 @@
         <p:spPr>
           <a:xfrm>
             <a:off x="548640" y="1691640"/>
-            <a:ext cx="3246120" cy="365760"/>
+            <a:ext cx="3749040" cy="365760"/>
           </a:xfrm>
           <a:prstGeom prst="rect">
             <a:avLst/>
@@ -9119,7 +9613,7 @@
                 <a:ea typeface="Calibri" pitchFamily="34" charset="-122"/>
                 <a:cs typeface="Calibri" pitchFamily="34" charset="-120"/>
               </a:rPr>
-              <a:t>Этап: Pre-seed · MVP</a:t>
+              <a:t>Этап: Pre-seed · Лендинг live</a:t>
             </a:r>
             <a:endParaRPr lang="en-US" sz="1150" dirty="0"/>
           </a:p>
@@ -9134,6 +9628,87 @@
         <p:spPr>
           <a:xfrm>
             <a:off x="548640" y="2212848"/>
+            <a:ext cx="5349240" cy="274320"/>
+          </a:xfrm>
+          <a:prstGeom prst="rect">
+            <a:avLst/>
+          </a:prstGeom>
+          <a:noFill/>
+          <a:ln/>
+        </p:spPr>
+        <p:txBody>
+          <a:bodyPr wrap="square" lIns="0" tIns="0" rIns="0" bIns="0" rtlCol="0" anchor="ctr"/>
+          <a:lstStyle/>
+          <a:p>
+            <a:pPr indent="0" marL="0">
+              <a:buNone/>
+            </a:pPr>
+            <a:r>
+              <a:rPr lang="en-US" sz="1200" b="1" dirty="0">
+                <a:solidFill>
+                  <a:srgbClr val="667A55"/>
+                </a:solidFill>
+                <a:latin typeface="Calibri" pitchFamily="34" charset="0"/>
+                <a:ea typeface="Calibri" pitchFamily="34" charset="-122"/>
+                <a:cs typeface="Calibri" pitchFamily="34" charset="-120"/>
+              </a:rPr>
+              <a:t>Готово к MVP</a:t>
+            </a:r>
+            <a:endParaRPr lang="en-US" sz="1200" dirty="0"/>
+          </a:p>
+        </p:txBody>
+      </p:sp>
+      <p:sp>
+        <p:nvSpPr>
+          <p:cNvPr id="7" name="Text 5"/>
+          <p:cNvSpPr txBox="1"/>
+          <p:nvPr/>
+        </p:nvSpPr>
+        <p:spPr>
+          <a:xfrm>
+            <a:off x="548640" y="2505456"/>
+            <a:ext cx="5349240" cy="502920"/>
+          </a:xfrm>
+          <a:prstGeom prst="rect">
+            <a:avLst/>
+          </a:prstGeom>
+          <a:noFill/>
+          <a:ln/>
+        </p:spPr>
+        <p:txBody>
+          <a:bodyPr wrap="square" lIns="0" tIns="0" rIns="0" bIns="0" rtlCol="0" anchor="ctr"/>
+          <a:lstStyle/>
+          <a:p>
+            <a:pPr indent="0" marL="0">
+              <a:lnSpc>
+                <a:spcPct val="125000"/>
+              </a:lnSpc>
+              <a:buNone/>
+            </a:pPr>
+            <a:r>
+              <a:rPr lang="en-US" sz="1250" dirty="0">
+                <a:solidFill>
+                  <a:srgbClr val="20221F"/>
+                </a:solidFill>
+                <a:latin typeface="Calibri" pitchFamily="34" charset="0"/>
+                <a:ea typeface="Calibri" pitchFamily="34" charset="-122"/>
+                <a:cs typeface="Calibri" pitchFamily="34" charset="-120"/>
+              </a:rPr>
+              <a:t>Регистрация и авторизация, семья и приглашения, бюджет, календарь, холодильник, семейный чат.</a:t>
+            </a:r>
+            <a:endParaRPr lang="en-US" sz="1250" dirty="0"/>
+          </a:p>
+        </p:txBody>
+      </p:sp>
+      <p:sp>
+        <p:nvSpPr>
+          <p:cNvPr id="8" name="Text 6"/>
+          <p:cNvSpPr txBox="1"/>
+          <p:nvPr/>
+        </p:nvSpPr>
+        <p:spPr>
+          <a:xfrm>
+            <a:off x="548640" y="3200400"/>
             <a:ext cx="4572000" cy="274320"/>
           </a:xfrm>
           <a:prstGeom prst="rect">
@@ -9158,66 +9733,7 @@
                 <a:ea typeface="Calibri" pitchFamily="34" charset="-122"/>
                 <a:cs typeface="Calibri" pitchFamily="34" charset="-120"/>
               </a:rPr>
-              <a:t>Готовность MVP</a:t>
-            </a:r>
-            <a:endParaRPr lang="en-US" sz="1200" dirty="0"/>
-          </a:p>
-        </p:txBody>
-      </p:sp>
-      <p:sp>
-        <p:nvSpPr>
-          <p:cNvPr id="7" name="Shape 5"/>
-          <p:cNvSpPr/>
-          <p:nvPr/>
-        </p:nvSpPr>
-        <p:spPr>
-          <a:xfrm>
-            <a:off x="548640" y="2606040"/>
-            <a:ext cx="146304" cy="146304"/>
-          </a:xfrm>
-          <a:prstGeom prst="ellipse">
-            <a:avLst/>
-          </a:prstGeom>
-          <a:solidFill>
-            <a:srgbClr val="667A55"/>
-          </a:solidFill>
-          <a:ln/>
-        </p:spPr>
-      </p:sp>
-      <p:sp>
-        <p:nvSpPr>
-          <p:cNvPr id="8" name="Text 6"/>
-          <p:cNvSpPr txBox="1"/>
-          <p:nvPr/>
-        </p:nvSpPr>
-        <p:spPr>
-          <a:xfrm>
-            <a:off x="804672" y="2560320"/>
-            <a:ext cx="2377440" cy="329184"/>
-          </a:xfrm>
-          <a:prstGeom prst="rect">
-            <a:avLst/>
-          </a:prstGeom>
-          <a:noFill/>
-          <a:ln/>
-        </p:spPr>
-        <p:txBody>
-          <a:bodyPr wrap="square" lIns="0" tIns="0" rIns="0" bIns="0" rtlCol="0" anchor="ctr"/>
-          <a:lstStyle/>
-          <a:p>
-            <a:pPr indent="0" marL="0">
-              <a:buNone/>
-            </a:pPr>
-            <a:r>
-              <a:rPr lang="en-US" sz="1200" dirty="0">
-                <a:solidFill>
-                  <a:srgbClr val="20221F"/>
-                </a:solidFill>
-                <a:latin typeface="Calibri" pitchFamily="34" charset="0"/>
-                <a:ea typeface="Calibri" pitchFamily="34" charset="-122"/>
-                <a:cs typeface="Calibri" pitchFamily="34" charset="-120"/>
-              </a:rPr>
-              <a:t>Регистрация и авторизация</a:t>
+              <a:t>Дорожная карта</a:t>
             </a:r>
             <a:endParaRPr lang="en-US" sz="1200" dirty="0"/>
           </a:p>
@@ -9231,342 +9747,8 @@
         </p:nvSpPr>
         <p:spPr>
           <a:xfrm>
-            <a:off x="3246120" y="2606040"/>
-            <a:ext cx="146304" cy="146304"/>
-          </a:xfrm>
-          <a:prstGeom prst="ellipse">
-            <a:avLst/>
-          </a:prstGeom>
-          <a:solidFill>
-            <a:srgbClr val="667A55"/>
-          </a:solidFill>
-          <a:ln/>
-        </p:spPr>
-      </p:sp>
-      <p:sp>
-        <p:nvSpPr>
-          <p:cNvPr id="10" name="Text 8"/>
-          <p:cNvSpPr txBox="1"/>
-          <p:nvPr/>
-        </p:nvSpPr>
-        <p:spPr>
-          <a:xfrm>
-            <a:off x="3502152" y="2560320"/>
-            <a:ext cx="2377440" cy="329184"/>
-          </a:xfrm>
-          <a:prstGeom prst="rect">
-            <a:avLst/>
-          </a:prstGeom>
-          <a:noFill/>
-          <a:ln/>
-        </p:spPr>
-        <p:txBody>
-          <a:bodyPr wrap="square" lIns="0" tIns="0" rIns="0" bIns="0" rtlCol="0" anchor="ctr"/>
-          <a:lstStyle/>
-          <a:p>
-            <a:pPr indent="0" marL="0">
-              <a:buNone/>
-            </a:pPr>
-            <a:r>
-              <a:rPr lang="en-US" sz="1200" dirty="0">
-                <a:solidFill>
-                  <a:srgbClr val="20221F"/>
-                </a:solidFill>
-                <a:latin typeface="Calibri" pitchFamily="34" charset="0"/>
-                <a:ea typeface="Calibri" pitchFamily="34" charset="-122"/>
-                <a:cs typeface="Calibri" pitchFamily="34" charset="-120"/>
-              </a:rPr>
-              <a:t>Семья и приглашения</a:t>
-            </a:r>
-            <a:endParaRPr lang="en-US" sz="1200" dirty="0"/>
-          </a:p>
-        </p:txBody>
-      </p:sp>
-      <p:sp>
-        <p:nvSpPr>
-          <p:cNvPr id="11" name="Shape 9"/>
-          <p:cNvSpPr/>
-          <p:nvPr/>
-        </p:nvSpPr>
-        <p:spPr>
-          <a:xfrm>
-            <a:off x="548640" y="2990088"/>
-            <a:ext cx="146304" cy="146304"/>
-          </a:xfrm>
-          <a:prstGeom prst="ellipse">
-            <a:avLst/>
-          </a:prstGeom>
-          <a:solidFill>
-            <a:srgbClr val="667A55"/>
-          </a:solidFill>
-          <a:ln/>
-        </p:spPr>
-      </p:sp>
-      <p:sp>
-        <p:nvSpPr>
-          <p:cNvPr id="12" name="Text 10"/>
-          <p:cNvSpPr txBox="1"/>
-          <p:nvPr/>
-        </p:nvSpPr>
-        <p:spPr>
-          <a:xfrm>
-            <a:off x="804672" y="2944368"/>
-            <a:ext cx="2377440" cy="329184"/>
-          </a:xfrm>
-          <a:prstGeom prst="rect">
-            <a:avLst/>
-          </a:prstGeom>
-          <a:noFill/>
-          <a:ln/>
-        </p:spPr>
-        <p:txBody>
-          <a:bodyPr wrap="square" lIns="0" tIns="0" rIns="0" bIns="0" rtlCol="0" anchor="ctr"/>
-          <a:lstStyle/>
-          <a:p>
-            <a:pPr indent="0" marL="0">
-              <a:buNone/>
-            </a:pPr>
-            <a:r>
-              <a:rPr lang="en-US" sz="1200" dirty="0">
-                <a:solidFill>
-                  <a:srgbClr val="20221F"/>
-                </a:solidFill>
-                <a:latin typeface="Calibri" pitchFamily="34" charset="0"/>
-                <a:ea typeface="Calibri" pitchFamily="34" charset="-122"/>
-                <a:cs typeface="Calibri" pitchFamily="34" charset="-120"/>
-              </a:rPr>
-              <a:t>Бюджет: доходы / расходы</a:t>
-            </a:r>
-            <a:endParaRPr lang="en-US" sz="1200" dirty="0"/>
-          </a:p>
-        </p:txBody>
-      </p:sp>
-      <p:sp>
-        <p:nvSpPr>
-          <p:cNvPr id="13" name="Shape 11"/>
-          <p:cNvSpPr/>
-          <p:nvPr/>
-        </p:nvSpPr>
-        <p:spPr>
-          <a:xfrm>
-            <a:off x="3246120" y="2990088"/>
-            <a:ext cx="146304" cy="146304"/>
-          </a:xfrm>
-          <a:prstGeom prst="ellipse">
-            <a:avLst/>
-          </a:prstGeom>
-          <a:solidFill>
-            <a:srgbClr val="667A55"/>
-          </a:solidFill>
-          <a:ln/>
-        </p:spPr>
-      </p:sp>
-      <p:sp>
-        <p:nvSpPr>
-          <p:cNvPr id="14" name="Text 12"/>
-          <p:cNvSpPr txBox="1"/>
-          <p:nvPr/>
-        </p:nvSpPr>
-        <p:spPr>
-          <a:xfrm>
-            <a:off x="3502152" y="2944368"/>
-            <a:ext cx="2377440" cy="329184"/>
-          </a:xfrm>
-          <a:prstGeom prst="rect">
-            <a:avLst/>
-          </a:prstGeom>
-          <a:noFill/>
-          <a:ln/>
-        </p:spPr>
-        <p:txBody>
-          <a:bodyPr wrap="square" lIns="0" tIns="0" rIns="0" bIns="0" rtlCol="0" anchor="ctr"/>
-          <a:lstStyle/>
-          <a:p>
-            <a:pPr indent="0" marL="0">
-              <a:buNone/>
-            </a:pPr>
-            <a:r>
-              <a:rPr lang="en-US" sz="1200" dirty="0">
-                <a:solidFill>
-                  <a:srgbClr val="20221F"/>
-                </a:solidFill>
-                <a:latin typeface="Calibri" pitchFamily="34" charset="0"/>
-                <a:ea typeface="Calibri" pitchFamily="34" charset="-122"/>
-                <a:cs typeface="Calibri" pitchFamily="34" charset="-120"/>
-              </a:rPr>
-              <a:t>Календарь событий</a:t>
-            </a:r>
-            <a:endParaRPr lang="en-US" sz="1200" dirty="0"/>
-          </a:p>
-        </p:txBody>
-      </p:sp>
-      <p:sp>
-        <p:nvSpPr>
-          <p:cNvPr id="15" name="Shape 13"/>
-          <p:cNvSpPr/>
-          <p:nvPr/>
-        </p:nvSpPr>
-        <p:spPr>
-          <a:xfrm>
-            <a:off x="548640" y="3374136"/>
-            <a:ext cx="146304" cy="146304"/>
-          </a:xfrm>
-          <a:prstGeom prst="ellipse">
-            <a:avLst/>
-          </a:prstGeom>
-          <a:solidFill>
-            <a:srgbClr val="667A55"/>
-          </a:solidFill>
-          <a:ln/>
-        </p:spPr>
-      </p:sp>
-      <p:sp>
-        <p:nvSpPr>
-          <p:cNvPr id="16" name="Text 14"/>
-          <p:cNvSpPr txBox="1"/>
-          <p:nvPr/>
-        </p:nvSpPr>
-        <p:spPr>
-          <a:xfrm>
-            <a:off x="804672" y="3328416"/>
-            <a:ext cx="2377440" cy="329184"/>
-          </a:xfrm>
-          <a:prstGeom prst="rect">
-            <a:avLst/>
-          </a:prstGeom>
-          <a:noFill/>
-          <a:ln/>
-        </p:spPr>
-        <p:txBody>
-          <a:bodyPr wrap="square" lIns="0" tIns="0" rIns="0" bIns="0" rtlCol="0" anchor="ctr"/>
-          <a:lstStyle/>
-          <a:p>
-            <a:pPr indent="0" marL="0">
-              <a:buNone/>
-            </a:pPr>
-            <a:r>
-              <a:rPr lang="en-US" sz="1200" dirty="0">
-                <a:solidFill>
-                  <a:srgbClr val="20221F"/>
-                </a:solidFill>
-                <a:latin typeface="Calibri" pitchFamily="34" charset="0"/>
-                <a:ea typeface="Calibri" pitchFamily="34" charset="-122"/>
-                <a:cs typeface="Calibri" pitchFamily="34" charset="-120"/>
-              </a:rPr>
-              <a:t>Холодильник и продукты</a:t>
-            </a:r>
-            <a:endParaRPr lang="en-US" sz="1200" dirty="0"/>
-          </a:p>
-        </p:txBody>
-      </p:sp>
-      <p:sp>
-        <p:nvSpPr>
-          <p:cNvPr id="17" name="Shape 15"/>
-          <p:cNvSpPr/>
-          <p:nvPr/>
-        </p:nvSpPr>
-        <p:spPr>
-          <a:xfrm>
-            <a:off x="3246120" y="3374136"/>
-            <a:ext cx="146304" cy="146304"/>
-          </a:xfrm>
-          <a:prstGeom prst="ellipse">
-            <a:avLst/>
-          </a:prstGeom>
-          <a:solidFill>
-            <a:srgbClr val="667A55"/>
-          </a:solidFill>
-          <a:ln/>
-        </p:spPr>
-      </p:sp>
-      <p:sp>
-        <p:nvSpPr>
-          <p:cNvPr id="18" name="Text 16"/>
-          <p:cNvSpPr txBox="1"/>
-          <p:nvPr/>
-        </p:nvSpPr>
-        <p:spPr>
-          <a:xfrm>
-            <a:off x="3502152" y="3328416"/>
-            <a:ext cx="2377440" cy="329184"/>
-          </a:xfrm>
-          <a:prstGeom prst="rect">
-            <a:avLst/>
-          </a:prstGeom>
-          <a:noFill/>
-          <a:ln/>
-        </p:spPr>
-        <p:txBody>
-          <a:bodyPr wrap="square" lIns="0" tIns="0" rIns="0" bIns="0" rtlCol="0" anchor="ctr"/>
-          <a:lstStyle/>
-          <a:p>
-            <a:pPr indent="0" marL="0">
-              <a:buNone/>
-            </a:pPr>
-            <a:r>
-              <a:rPr lang="en-US" sz="1200" dirty="0">
-                <a:solidFill>
-                  <a:srgbClr val="20221F"/>
-                </a:solidFill>
-                <a:latin typeface="Calibri" pitchFamily="34" charset="0"/>
-                <a:ea typeface="Calibri" pitchFamily="34" charset="-122"/>
-                <a:cs typeface="Calibri" pitchFamily="34" charset="-120"/>
-              </a:rPr>
-              <a:t>Семейный чат</a:t>
-            </a:r>
-            <a:endParaRPr lang="en-US" sz="1200" dirty="0"/>
-          </a:p>
-        </p:txBody>
-      </p:sp>
-      <p:sp>
-        <p:nvSpPr>
-          <p:cNvPr id="19" name="Text 17"/>
-          <p:cNvSpPr txBox="1"/>
-          <p:nvPr/>
-        </p:nvSpPr>
-        <p:spPr>
-          <a:xfrm>
-            <a:off x="548640" y="3950208"/>
-            <a:ext cx="4572000" cy="274320"/>
-          </a:xfrm>
-          <a:prstGeom prst="rect">
-            <a:avLst/>
-          </a:prstGeom>
-          <a:noFill/>
-          <a:ln/>
-        </p:spPr>
-        <p:txBody>
-          <a:bodyPr wrap="square" lIns="0" tIns="0" rIns="0" bIns="0" rtlCol="0" anchor="ctr"/>
-          <a:lstStyle/>
-          <a:p>
-            <a:pPr indent="0" marL="0">
-              <a:buNone/>
-            </a:pPr>
-            <a:r>
-              <a:rPr lang="en-US" sz="1200" b="1" dirty="0">
-                <a:solidFill>
-                  <a:srgbClr val="667A55"/>
-                </a:solidFill>
-                <a:latin typeface="Calibri" pitchFamily="34" charset="0"/>
-                <a:ea typeface="Calibri" pitchFamily="34" charset="-122"/>
-                <a:cs typeface="Calibri" pitchFamily="34" charset="-120"/>
-              </a:rPr>
-              <a:t>Дорожная карта</a:t>
-            </a:r>
-            <a:endParaRPr lang="en-US" sz="1200" dirty="0"/>
-          </a:p>
-        </p:txBody>
-      </p:sp>
-      <p:sp>
-        <p:nvSpPr>
-          <p:cNvPr id="20" name="Shape 18"/>
-          <p:cNvSpPr/>
-          <p:nvPr/>
-        </p:nvSpPr>
-        <p:spPr>
-          <a:xfrm>
-            <a:off x="548640" y="4297680"/>
-            <a:ext cx="1508760" cy="420624"/>
+            <a:off x="548640" y="3529584"/>
+            <a:ext cx="1508760" cy="402336"/>
           </a:xfrm>
           <a:prstGeom prst="roundRect">
             <a:avLst>
@@ -9581,14 +9763,14 @@
       </p:sp>
       <p:sp>
         <p:nvSpPr>
-          <p:cNvPr id="21" name="Text 19"/>
-          <p:cNvSpPr txBox="1"/>
-          <p:nvPr/>
-        </p:nvSpPr>
-        <p:spPr>
-          <a:xfrm>
-            <a:off x="548640" y="4297680"/>
-            <a:ext cx="1508760" cy="420624"/>
+          <p:cNvPr id="10" name="Text 8"/>
+          <p:cNvSpPr txBox="1"/>
+          <p:nvPr/>
+        </p:nvSpPr>
+        <p:spPr>
+          <a:xfrm>
+            <a:off x="548640" y="3529584"/>
+            <a:ext cx="1508760" cy="402336"/>
           </a:xfrm>
           <a:prstGeom prst="rect">
             <a:avLst/>
@@ -9620,14 +9802,14 @@
       </p:sp>
       <p:sp>
         <p:nvSpPr>
-          <p:cNvPr id="22" name="Text 20"/>
-          <p:cNvSpPr txBox="1"/>
-          <p:nvPr/>
-        </p:nvSpPr>
-        <p:spPr>
-          <a:xfrm>
-            <a:off x="2057400" y="4297680"/>
-            <a:ext cx="274320" cy="420624"/>
+          <p:cNvPr id="11" name="Text 9"/>
+          <p:cNvSpPr txBox="1"/>
+          <p:nvPr/>
+        </p:nvSpPr>
+        <p:spPr>
+          <a:xfrm>
+            <a:off x="2057400" y="3529584"/>
+            <a:ext cx="274320" cy="402336"/>
           </a:xfrm>
           <a:prstGeom prst="rect">
             <a:avLst/>
@@ -9659,14 +9841,14 @@
       </p:sp>
       <p:sp>
         <p:nvSpPr>
-          <p:cNvPr id="23" name="Shape 21"/>
+          <p:cNvPr id="12" name="Shape 10"/>
           <p:cNvSpPr/>
           <p:nvPr/>
         </p:nvSpPr>
         <p:spPr>
           <a:xfrm>
-            <a:off x="2331720" y="4297680"/>
-            <a:ext cx="1508760" cy="420624"/>
+            <a:off x="2331720" y="3529584"/>
+            <a:ext cx="1508760" cy="402336"/>
           </a:xfrm>
           <a:prstGeom prst="roundRect">
             <a:avLst>
@@ -9681,14 +9863,14 @@
       </p:sp>
       <p:sp>
         <p:nvSpPr>
-          <p:cNvPr id="24" name="Text 22"/>
-          <p:cNvSpPr txBox="1"/>
-          <p:nvPr/>
-        </p:nvSpPr>
-        <p:spPr>
-          <a:xfrm>
-            <a:off x="2331720" y="4297680"/>
-            <a:ext cx="1508760" cy="420624"/>
+          <p:cNvPr id="13" name="Text 11"/>
+          <p:cNvSpPr txBox="1"/>
+          <p:nvPr/>
+        </p:nvSpPr>
+        <p:spPr>
+          <a:xfrm>
+            <a:off x="2331720" y="3529584"/>
+            <a:ext cx="1508760" cy="402336"/>
           </a:xfrm>
           <a:prstGeom prst="rect">
             <a:avLst/>
@@ -9720,14 +9902,14 @@
       </p:sp>
       <p:sp>
         <p:nvSpPr>
-          <p:cNvPr id="25" name="Text 23"/>
-          <p:cNvSpPr txBox="1"/>
-          <p:nvPr/>
-        </p:nvSpPr>
-        <p:spPr>
-          <a:xfrm>
-            <a:off x="3840480" y="4297680"/>
-            <a:ext cx="274320" cy="420624"/>
+          <p:cNvPr id="14" name="Text 12"/>
+          <p:cNvSpPr txBox="1"/>
+          <p:nvPr/>
+        </p:nvSpPr>
+        <p:spPr>
+          <a:xfrm>
+            <a:off x="3840480" y="3529584"/>
+            <a:ext cx="274320" cy="402336"/>
           </a:xfrm>
           <a:prstGeom prst="rect">
             <a:avLst/>
@@ -9759,14 +9941,14 @@
       </p:sp>
       <p:sp>
         <p:nvSpPr>
-          <p:cNvPr id="26" name="Shape 24"/>
+          <p:cNvPr id="15" name="Shape 13"/>
           <p:cNvSpPr/>
           <p:nvPr/>
         </p:nvSpPr>
         <p:spPr>
           <a:xfrm>
-            <a:off x="4114800" y="4297680"/>
-            <a:ext cx="1508760" cy="420624"/>
+            <a:off x="4114800" y="3529584"/>
+            <a:ext cx="1508760" cy="402336"/>
           </a:xfrm>
           <a:prstGeom prst="roundRect">
             <a:avLst>
@@ -9781,14 +9963,14 @@
       </p:sp>
       <p:sp>
         <p:nvSpPr>
-          <p:cNvPr id="27" name="Text 25"/>
-          <p:cNvSpPr txBox="1"/>
-          <p:nvPr/>
-        </p:nvSpPr>
-        <p:spPr>
-          <a:xfrm>
-            <a:off x="4114800" y="4297680"/>
-            <a:ext cx="1508760" cy="420624"/>
+          <p:cNvPr id="16" name="Text 14"/>
+          <p:cNvSpPr txBox="1"/>
+          <p:nvPr/>
+        </p:nvSpPr>
+        <p:spPr>
+          <a:xfrm>
+            <a:off x="4114800" y="3529584"/>
+            <a:ext cx="1508760" cy="402336"/>
           </a:xfrm>
           <a:prstGeom prst="rect">
             <a:avLst/>
@@ -9820,14 +10002,14 @@
       </p:sp>
       <p:sp>
         <p:nvSpPr>
-          <p:cNvPr id="28" name="Text 26"/>
-          <p:cNvSpPr txBox="1"/>
-          <p:nvPr/>
-        </p:nvSpPr>
-        <p:spPr>
-          <a:xfrm>
-            <a:off x="548640" y="4864608"/>
-            <a:ext cx="5349240" cy="914400"/>
+          <p:cNvPr id="17" name="Text 15"/>
+          <p:cNvSpPr txBox="1"/>
+          <p:nvPr/>
+        </p:nvSpPr>
+        <p:spPr>
+          <a:xfrm>
+            <a:off x="548640" y="4059936"/>
+            <a:ext cx="5349240" cy="868680"/>
           </a:xfrm>
           <a:prstGeom prst="rect">
             <a:avLst/>
@@ -9862,13 +10044,13 @@
       </p:sp>
       <p:sp>
         <p:nvSpPr>
-          <p:cNvPr id="29" name="Text 27"/>
-          <p:cNvSpPr txBox="1"/>
-          <p:nvPr/>
-        </p:nvSpPr>
-        <p:spPr>
-          <a:xfrm>
-            <a:off x="548640" y="5925312"/>
+          <p:cNvPr id="18" name="Text 16"/>
+          <p:cNvSpPr txBox="1"/>
+          <p:nvPr/>
+        </p:nvSpPr>
+        <p:spPr>
+          <a:xfrm>
+            <a:off x="548640" y="5010912"/>
             <a:ext cx="5349240" cy="365760"/>
           </a:xfrm>
           <a:prstGeom prst="rect">
@@ -9904,18 +10086,57 @@
       </p:sp>
       <p:sp>
         <p:nvSpPr>
-          <p:cNvPr id="30" name="Shape 28"/>
+          <p:cNvPr id="19" name="Text 17"/>
+          <p:cNvSpPr txBox="1"/>
+          <p:nvPr/>
+        </p:nvSpPr>
+        <p:spPr>
+          <a:xfrm>
+            <a:off x="548640" y="5532120"/>
+            <a:ext cx="5349240" cy="274320"/>
+          </a:xfrm>
+          <a:prstGeom prst="rect">
+            <a:avLst/>
+          </a:prstGeom>
+          <a:noFill/>
+          <a:ln/>
+        </p:spPr>
+        <p:txBody>
+          <a:bodyPr wrap="square" lIns="0" tIns="0" rIns="0" bIns="0" rtlCol="0" anchor="ctr"/>
+          <a:lstStyle/>
+          <a:p>
+            <a:pPr indent="0" marL="0">
+              <a:buNone/>
+            </a:pPr>
+            <a:r>
+              <a:rPr lang="en-US" sz="1050" i="1" dirty="0">
+                <a:solidFill>
+                  <a:srgbClr val="73766F"/>
+                </a:solidFill>
+                <a:latin typeface="Calibri" pitchFamily="34" charset="0"/>
+                <a:ea typeface="Calibri" pitchFamily="34" charset="-122"/>
+                <a:cs typeface="Calibri" pitchFamily="34" charset="-120"/>
+              </a:rPr>
+              <a:t>Стек: React · TypeScript · Node.js · PostgreSQL · WebSocket · Docker</a:t>
+            </a:r>
+            <a:endParaRPr lang="en-US" sz="1050" dirty="0"/>
+          </a:p>
+        </p:txBody>
+      </p:sp>
+      <p:sp>
+        <p:nvSpPr>
+          <p:cNvPr id="20" name="Shape 18"/>
           <p:cNvSpPr/>
           <p:nvPr/>
         </p:nvSpPr>
         <p:spPr>
           <a:xfrm>
             <a:off x="6263640" y="1691640"/>
-            <a:ext cx="5074920" cy="4343400"/>
+            <a:ext cx="5074920" cy="4434840"/>
           </a:xfrm>
           <a:prstGeom prst="roundRect">
             <a:avLst>
-              <a:gd name="adj" fmla="val 2105"/>
+              <a:gd name="adj" fmla="val 2062"/>
             </a:avLst>
           </a:prstGeom>
           <a:solidFill>
@@ -9931,13 +10152,13 @@
       </p:sp>
       <p:sp>
         <p:nvSpPr>
-          <p:cNvPr id="31" name="Text 29"/>
-          <p:cNvSpPr txBox="1"/>
-          <p:nvPr/>
-        </p:nvSpPr>
-        <p:spPr>
-          <a:xfrm>
-            <a:off x="6583680" y="1947672"/>
+          <p:cNvPr id="21" name="Text 19"/>
+          <p:cNvSpPr txBox="1"/>
+          <p:nvPr/>
+        </p:nvSpPr>
+        <p:spPr>
+          <a:xfrm>
+            <a:off x="6583680" y="1929384"/>
             <a:ext cx="4434840" cy="320040"/>
           </a:xfrm>
           <a:prstGeom prst="rect">
@@ -9962,7 +10183,7 @@
                 <a:ea typeface="Calibri" pitchFamily="34" charset="-122"/>
                 <a:cs typeface="Calibri" pitchFamily="34" charset="-120"/>
               </a:rPr>
-              <a:t>Технологический стек</a:t>
+              <a:t>Лендинг Famigo: первые данные</a:t>
             </a:r>
             <a:endParaRPr lang="en-US" sz="1500" dirty="0"/>
           </a:p>
@@ -9970,13 +10191,13 @@
       </p:sp>
       <p:sp>
         <p:nvSpPr>
-          <p:cNvPr id="32" name="Text 30"/>
-          <p:cNvSpPr txBox="1"/>
-          <p:nvPr/>
-        </p:nvSpPr>
-        <p:spPr>
-          <a:xfrm>
-            <a:off x="6583680" y="2468880"/>
+          <p:cNvPr id="22" name="Text 20"/>
+          <p:cNvSpPr txBox="1"/>
+          <p:nvPr/>
+        </p:nvSpPr>
+        <p:spPr>
+          <a:xfrm>
+            <a:off x="6583680" y="2221992"/>
             <a:ext cx="4434840" cy="274320"/>
           </a:xfrm>
           <a:prstGeom prst="rect">
@@ -9993,46 +10214,49 @@
               <a:buNone/>
             </a:pPr>
             <a:r>
-              <a:rPr lang="en-US" sz="1250" b="1" dirty="0">
-                <a:solidFill>
-                  <a:srgbClr val="667A55"/>
-                </a:solidFill>
-                <a:latin typeface="Calibri" pitchFamily="34" charset="0"/>
-                <a:ea typeface="Calibri" pitchFamily="34" charset="-122"/>
-                <a:cs typeface="Calibri" pitchFamily="34" charset="-120"/>
-              </a:rPr>
-              <a:t>Frontend</a:t>
-            </a:r>
-            <a:endParaRPr lang="en-US" sz="1250" dirty="0"/>
-          </a:p>
-        </p:txBody>
-      </p:sp>
-      <p:sp>
-        <p:nvSpPr>
-          <p:cNvPr id="33" name="Text 31"/>
-          <p:cNvSpPr txBox="1"/>
-          <p:nvPr/>
-        </p:nvSpPr>
-        <p:spPr>
-          <a:xfrm>
-            <a:off x="6583680" y="2761488"/>
-            <a:ext cx="4434840" cy="457200"/>
-          </a:xfrm>
-          <a:prstGeom prst="rect">
-            <a:avLst/>
-          </a:prstGeom>
-          <a:noFill/>
-          <a:ln/>
-        </p:spPr>
-        <p:txBody>
-          <a:bodyPr wrap="square" lIns="0" tIns="0" rIns="0" bIns="0" rtlCol="0" anchor="ctr"/>
-          <a:lstStyle/>
-          <a:p>
-            <a:pPr indent="0" marL="0">
-              <a:buNone/>
-            </a:pPr>
-            <a:r>
-              <a:rPr lang="en-US" sz="1250" dirty="0">
+              <a:rPr lang="en-US" sz="1050" dirty="0">
+                <a:solidFill>
+                  <a:srgbClr val="73766F"/>
+                </a:solidFill>
+                <a:latin typeface="Calibri" pitchFamily="34" charset="0"/>
+                <a:ea typeface="Calibri" pitchFamily="34" charset="-122"/>
+                <a:cs typeface="Calibri" pitchFamily="34" charset="-120"/>
+              </a:rPr>
+              <a:t>Яндекс.Метрика · сентябрь 2026</a:t>
+            </a:r>
+            <a:endParaRPr lang="en-US" sz="1050" dirty="0"/>
+          </a:p>
+        </p:txBody>
+      </p:sp>
+      <p:sp>
+        <p:nvSpPr>
+          <p:cNvPr id="23" name="Text 21"/>
+          <p:cNvSpPr txBox="1"/>
+          <p:nvPr/>
+        </p:nvSpPr>
+        <p:spPr>
+          <a:xfrm>
+            <a:off x="6583680" y="2514600"/>
+            <a:ext cx="4434840" cy="365760"/>
+          </a:xfrm>
+          <a:prstGeom prst="rect">
+            <a:avLst/>
+          </a:prstGeom>
+          <a:noFill/>
+          <a:ln/>
+        </p:spPr>
+        <p:txBody>
+          <a:bodyPr wrap="square" lIns="0" tIns="0" rIns="0" bIns="0" rtlCol="0" anchor="ctr"/>
+          <a:lstStyle/>
+          <a:p>
+            <a:pPr indent="0" marL="0">
+              <a:lnSpc>
+                <a:spcPct val="120000"/>
+              </a:lnSpc>
+              <a:buNone/>
+            </a:pPr>
+            <a:r>
+              <a:rPr lang="en-US" sz="1100" b="1" dirty="0">
                 <a:solidFill>
                   <a:srgbClr val="20221F"/>
                 </a:solidFill>
@@ -10040,21 +10264,21 @@
                 <a:ea typeface="Calibri" pitchFamily="34" charset="-122"/>
                 <a:cs typeface="Calibri" pitchFamily="34" charset="-120"/>
               </a:rPr>
-              <a:t>React, TypeScript, React Router</a:t>
-            </a:r>
-            <a:endParaRPr lang="en-US" sz="1250" dirty="0"/>
-          </a:p>
-        </p:txBody>
-      </p:sp>
-      <p:sp>
-        <p:nvSpPr>
-          <p:cNvPr id="34" name="Shape 32"/>
+              <a:t>20 посетителей · 21 визит · 49 просмотров · 2,33 стр/визит · 4 м 4 с на сайте · 38,1 % отказов</a:t>
+            </a:r>
+            <a:endParaRPr lang="en-US" sz="1100" dirty="0"/>
+          </a:p>
+        </p:txBody>
+      </p:sp>
+      <p:sp>
+        <p:nvSpPr>
+          <p:cNvPr id="24" name="Shape 22"/>
           <p:cNvSpPr/>
           <p:nvPr/>
         </p:nvSpPr>
         <p:spPr>
           <a:xfrm>
-            <a:off x="6583680" y="3218688"/>
+            <a:off x="6583680" y="2916936"/>
             <a:ext cx="4434840" cy="0"/>
           </a:xfrm>
           <a:prstGeom prst="line">
@@ -10071,30 +10295,30 @@
       </p:sp>
       <p:sp>
         <p:nvSpPr>
-          <p:cNvPr id="35" name="Text 33"/>
-          <p:cNvSpPr txBox="1"/>
-          <p:nvPr/>
-        </p:nvSpPr>
-        <p:spPr>
-          <a:xfrm>
-            <a:off x="6583680" y="3310128"/>
-            <a:ext cx="4434840" cy="274320"/>
-          </a:xfrm>
-          <a:prstGeom prst="rect">
-            <a:avLst/>
-          </a:prstGeom>
-          <a:noFill/>
-          <a:ln/>
-        </p:spPr>
-        <p:txBody>
-          <a:bodyPr wrap="square" lIns="0" tIns="0" rIns="0" bIns="0" rtlCol="0" anchor="ctr"/>
-          <a:lstStyle/>
-          <a:p>
-            <a:pPr indent="0" marL="0">
-              <a:buNone/>
-            </a:pPr>
-            <a:r>
-              <a:rPr lang="en-US" sz="1250" b="1" dirty="0">
+          <p:cNvPr id="25" name="Text 23"/>
+          <p:cNvSpPr txBox="1"/>
+          <p:nvPr/>
+        </p:nvSpPr>
+        <p:spPr>
+          <a:xfrm>
+            <a:off x="6583680" y="3008376"/>
+            <a:ext cx="4434840" cy="219456"/>
+          </a:xfrm>
+          <a:prstGeom prst="rect">
+            <a:avLst/>
+          </a:prstGeom>
+          <a:noFill/>
+          <a:ln/>
+        </p:spPr>
+        <p:txBody>
+          <a:bodyPr wrap="square" lIns="0" tIns="0" rIns="0" bIns="0" rtlCol="0" anchor="ctr"/>
+          <a:lstStyle/>
+          <a:p>
+            <a:pPr indent="0" marL="0">
+              <a:buNone/>
+            </a:pPr>
+            <a:r>
+              <a:rPr lang="en-US" sz="1100" b="1" dirty="0">
                 <a:solidFill>
                   <a:srgbClr val="667A55"/>
                 </a:solidFill>
@@ -10102,100 +10326,54 @@
                 <a:ea typeface="Calibri" pitchFamily="34" charset="-122"/>
                 <a:cs typeface="Calibri" pitchFamily="34" charset="-120"/>
               </a:rPr>
-              <a:t>Backend</a:t>
-            </a:r>
-            <a:endParaRPr lang="en-US" sz="1250" dirty="0"/>
-          </a:p>
-        </p:txBody>
-      </p:sp>
-      <p:sp>
-        <p:nvSpPr>
-          <p:cNvPr id="36" name="Text 34"/>
-          <p:cNvSpPr txBox="1"/>
-          <p:nvPr/>
-        </p:nvSpPr>
-        <p:spPr>
-          <a:xfrm>
-            <a:off x="6583680" y="3602736"/>
-            <a:ext cx="4434840" cy="457200"/>
-          </a:xfrm>
-          <a:prstGeom prst="rect">
-            <a:avLst/>
-          </a:prstGeom>
-          <a:noFill/>
-          <a:ln/>
-        </p:spPr>
-        <p:txBody>
-          <a:bodyPr wrap="square" lIns="0" tIns="0" rIns="0" bIns="0" rtlCol="0" anchor="ctr"/>
-          <a:lstStyle/>
-          <a:p>
-            <a:pPr indent="0" marL="0">
-              <a:buNone/>
-            </a:pPr>
-            <a:r>
-              <a:rPr lang="en-US" sz="1250" dirty="0">
-                <a:solidFill>
-                  <a:srgbClr val="20221F"/>
-                </a:solidFill>
-                <a:latin typeface="Calibri" pitchFamily="34" charset="0"/>
-                <a:ea typeface="Calibri" pitchFamily="34" charset="-122"/>
-                <a:cs typeface="Calibri" pitchFamily="34" charset="-120"/>
-              </a:rPr>
-              <a:t>Node.js, NestJS / Express, REST, WebSocket, JWT</a:t>
-            </a:r>
-            <a:endParaRPr lang="en-US" sz="1250" dirty="0"/>
-          </a:p>
-        </p:txBody>
-      </p:sp>
-      <p:sp>
-        <p:nvSpPr>
-          <p:cNvPr id="37" name="Shape 35"/>
-          <p:cNvSpPr/>
-          <p:nvPr/>
-        </p:nvSpPr>
-        <p:spPr>
-          <a:xfrm>
-            <a:off x="6583680" y="4059936"/>
-            <a:ext cx="4434840" cy="0"/>
-          </a:xfrm>
-          <a:prstGeom prst="line">
-            <a:avLst/>
-          </a:prstGeom>
-          <a:noFill/>
-          <a:ln w="9525">
-            <a:solidFill>
-              <a:srgbClr val="E4E4DE"/>
-            </a:solidFill>
-            <a:prstDash val="solid"/>
-          </a:ln>
-        </p:spPr>
-      </p:sp>
-      <p:sp>
-        <p:nvSpPr>
-          <p:cNvPr id="38" name="Text 36"/>
-          <p:cNvSpPr txBox="1"/>
-          <p:nvPr/>
-        </p:nvSpPr>
-        <p:spPr>
-          <a:xfrm>
-            <a:off x="6583680" y="4151376"/>
-            <a:ext cx="4434840" cy="274320"/>
-          </a:xfrm>
-          <a:prstGeom prst="rect">
-            <a:avLst/>
-          </a:prstGeom>
-          <a:noFill/>
-          <a:ln/>
-        </p:spPr>
-        <p:txBody>
-          <a:bodyPr wrap="square" lIns="0" tIns="0" rIns="0" bIns="0" rtlCol="0" anchor="ctr"/>
-          <a:lstStyle/>
-          <a:p>
-            <a:pPr indent="0" marL="0">
-              <a:buNone/>
-            </a:pPr>
-            <a:r>
-              <a:rPr lang="en-US" sz="1250" b="1" dirty="0">
+              <a:t>Источники трафика (посетители)</a:t>
+            </a:r>
+            <a:endParaRPr lang="en-US" sz="1100" dirty="0"/>
+          </a:p>
+        </p:txBody>
+      </p:sp>
+      <p:graphicFrame>
+        <p:nvGraphicFramePr>
+          <p:cNvPr id="26" name="Chart 0" descr=""/>
+          <p:cNvGraphicFramePr/>
+          <p:nvPr/>
+        </p:nvGraphicFramePr>
+        <p:xfrm>
+          <a:off x="6446520" y="3227832"/>
+          <a:ext cx="4709160" cy="1298448"/>
+        </p:xfrm>
+        <a:graphic xmlns:a="http://schemas.openxmlformats.org/drawingml/2006/main">
+          <a:graphicData uri="http://schemas.openxmlformats.org/drawingml/2006/chart">
+            <c:chart xmlns:c="http://schemas.openxmlformats.org/drawingml/2006/chart" r:id="rId1"/>
+          </a:graphicData>
+        </a:graphic>
+      </p:graphicFrame>
+      <p:sp>
+        <p:nvSpPr>
+          <p:cNvPr id="27" name="Text 24"/>
+          <p:cNvSpPr txBox="1"/>
+          <p:nvPr/>
+        </p:nvSpPr>
+        <p:spPr>
+          <a:xfrm>
+            <a:off x="6583680" y="4617720"/>
+            <a:ext cx="4434840" cy="219456"/>
+          </a:xfrm>
+          <a:prstGeom prst="rect">
+            <a:avLst/>
+          </a:prstGeom>
+          <a:noFill/>
+          <a:ln/>
+        </p:spPr>
+        <p:txBody>
+          <a:bodyPr wrap="square" lIns="0" tIns="0" rIns="0" bIns="0" rtlCol="0" anchor="ctr"/>
+          <a:lstStyle/>
+          <a:p>
+            <a:pPr indent="0" marL="0">
+              <a:buNone/>
+            </a:pPr>
+            <a:r>
+              <a:rPr lang="en-US" sz="1100" b="1" dirty="0">
                 <a:solidFill>
                   <a:srgbClr val="667A55"/>
                 </a:solidFill>
@@ -10203,155 +10381,31 @@
                 <a:ea typeface="Calibri" pitchFamily="34" charset="-122"/>
                 <a:cs typeface="Calibri" pitchFamily="34" charset="-120"/>
               </a:rPr>
-              <a:t>База данных</a:t>
-            </a:r>
-            <a:endParaRPr lang="en-US" sz="1250" dirty="0"/>
-          </a:p>
-        </p:txBody>
-      </p:sp>
-      <p:sp>
-        <p:nvSpPr>
-          <p:cNvPr id="39" name="Text 37"/>
-          <p:cNvSpPr txBox="1"/>
-          <p:nvPr/>
-        </p:nvSpPr>
-        <p:spPr>
-          <a:xfrm>
-            <a:off x="6583680" y="4443984"/>
-            <a:ext cx="4434840" cy="457200"/>
-          </a:xfrm>
-          <a:prstGeom prst="rect">
-            <a:avLst/>
-          </a:prstGeom>
-          <a:noFill/>
-          <a:ln/>
-        </p:spPr>
-        <p:txBody>
-          <a:bodyPr wrap="square" lIns="0" tIns="0" rIns="0" bIns="0" rtlCol="0" anchor="ctr"/>
-          <a:lstStyle/>
-          <a:p>
-            <a:pPr indent="0" marL="0">
-              <a:buNone/>
-            </a:pPr>
-            <a:r>
-              <a:rPr lang="en-US" sz="1250" dirty="0">
-                <a:solidFill>
-                  <a:srgbClr val="20221F"/>
-                </a:solidFill>
-                <a:latin typeface="Calibri" pitchFamily="34" charset="0"/>
-                <a:ea typeface="Calibri" pitchFamily="34" charset="-122"/>
-                <a:cs typeface="Calibri" pitchFamily="34" charset="-120"/>
-              </a:rPr>
-              <a:t>PostgreSQL</a:t>
-            </a:r>
-            <a:endParaRPr lang="en-US" sz="1250" dirty="0"/>
-          </a:p>
-        </p:txBody>
-      </p:sp>
-      <p:sp>
-        <p:nvSpPr>
-          <p:cNvPr id="40" name="Shape 38"/>
-          <p:cNvSpPr/>
-          <p:nvPr/>
-        </p:nvSpPr>
-        <p:spPr>
-          <a:xfrm>
-            <a:off x="6583680" y="4901184"/>
-            <a:ext cx="4434840" cy="0"/>
-          </a:xfrm>
-          <a:prstGeom prst="line">
-            <a:avLst/>
-          </a:prstGeom>
-          <a:noFill/>
-          <a:ln w="9525">
-            <a:solidFill>
-              <a:srgbClr val="E4E4DE"/>
-            </a:solidFill>
-            <a:prstDash val="solid"/>
-          </a:ln>
-        </p:spPr>
-      </p:sp>
-      <p:sp>
-        <p:nvSpPr>
-          <p:cNvPr id="41" name="Text 39"/>
-          <p:cNvSpPr txBox="1"/>
-          <p:nvPr/>
-        </p:nvSpPr>
-        <p:spPr>
-          <a:xfrm>
-            <a:off x="6583680" y="4992624"/>
-            <a:ext cx="4434840" cy="274320"/>
-          </a:xfrm>
-          <a:prstGeom prst="rect">
-            <a:avLst/>
-          </a:prstGeom>
-          <a:noFill/>
-          <a:ln/>
-        </p:spPr>
-        <p:txBody>
-          <a:bodyPr wrap="square" lIns="0" tIns="0" rIns="0" bIns="0" rtlCol="0" anchor="ctr"/>
-          <a:lstStyle/>
-          <a:p>
-            <a:pPr indent="0" marL="0">
-              <a:buNone/>
-            </a:pPr>
-            <a:r>
-              <a:rPr lang="en-US" sz="1250" b="1" dirty="0">
-                <a:solidFill>
-                  <a:srgbClr val="667A55"/>
-                </a:solidFill>
-                <a:latin typeface="Calibri" pitchFamily="34" charset="0"/>
-                <a:ea typeface="Calibri" pitchFamily="34" charset="-122"/>
-                <a:cs typeface="Calibri" pitchFamily="34" charset="-120"/>
-              </a:rPr>
-              <a:t>Инфраструктура</a:t>
-            </a:r>
-            <a:endParaRPr lang="en-US" sz="1250" dirty="0"/>
-          </a:p>
-        </p:txBody>
-      </p:sp>
-      <p:sp>
-        <p:nvSpPr>
-          <p:cNvPr id="42" name="Text 40"/>
-          <p:cNvSpPr txBox="1"/>
-          <p:nvPr/>
-        </p:nvSpPr>
-        <p:spPr>
-          <a:xfrm>
-            <a:off x="6583680" y="5285232"/>
-            <a:ext cx="4434840" cy="457200"/>
-          </a:xfrm>
-          <a:prstGeom prst="rect">
-            <a:avLst/>
-          </a:prstGeom>
-          <a:noFill/>
-          <a:ln/>
-        </p:spPr>
-        <p:txBody>
-          <a:bodyPr wrap="square" lIns="0" tIns="0" rIns="0" bIns="0" rtlCol="0" anchor="ctr"/>
-          <a:lstStyle/>
-          <a:p>
-            <a:pPr indent="0" marL="0">
-              <a:buNone/>
-            </a:pPr>
-            <a:r>
-              <a:rPr lang="en-US" sz="1250" dirty="0">
-                <a:solidFill>
-                  <a:srgbClr val="20221F"/>
-                </a:solidFill>
-                <a:latin typeface="Calibri" pitchFamily="34" charset="0"/>
-                <a:ea typeface="Calibri" pitchFamily="34" charset="-122"/>
-                <a:cs typeface="Calibri" pitchFamily="34" charset="-120"/>
-              </a:rPr>
-              <a:t>Docker, Git, CI/CD, Swagger/OpenAPI</a:t>
-            </a:r>
-            <a:endParaRPr lang="en-US" sz="1250" dirty="0"/>
-          </a:p>
-        </p:txBody>
-      </p:sp>
-      <p:sp>
-        <p:nvSpPr>
-          <p:cNvPr id="43" name="Text 41"/>
+              <a:t>Динамика посещений по дням</a:t>
+            </a:r>
+            <a:endParaRPr lang="en-US" sz="1100" dirty="0"/>
+          </a:p>
+        </p:txBody>
+      </p:sp>
+      <p:graphicFrame>
+        <p:nvGraphicFramePr>
+          <p:cNvPr id="28" name="Chart 1" descr=""/>
+          <p:cNvGraphicFramePr/>
+          <p:nvPr/>
+        </p:nvGraphicFramePr>
+        <p:xfrm>
+          <a:off x="6446520" y="4837176"/>
+          <a:ext cx="4709160" cy="1170432"/>
+        </p:xfrm>
+        <a:graphic xmlns:a="http://schemas.openxmlformats.org/drawingml/2006/main">
+          <a:graphicData uri="http://schemas.openxmlformats.org/drawingml/2006/chart">
+            <c:chart xmlns:c="http://schemas.openxmlformats.org/drawingml/2006/chart" r:id="rId2"/>
+          </a:graphicData>
+        </a:graphic>
+      </p:graphicFrame>
+      <p:sp>
+        <p:nvSpPr>
+          <p:cNvPr id="29" name="Text 25"/>
           <p:cNvSpPr txBox="1"/>
           <p:nvPr/>
         </p:nvSpPr>
@@ -10390,7 +10444,7 @@
       </p:sp>
       <p:sp>
         <p:nvSpPr>
-          <p:cNvPr id="44" name="Text 42"/>
+          <p:cNvPr id="30" name="Text 26"/>
           <p:cNvSpPr txBox="1"/>
           <p:nvPr/>
         </p:nvSpPr>

--- a/_docs/2nd semester/week-4/Famigo_pitch_deck.pptx
+++ b/_docs/2nd semester/week-4/Famigo_pitch_deck.pptx
@@ -4,6 +4,9 @@
   <p:sldMasterIdLst>
     <p:sldMasterId id="2147483648" r:id="rId1"/>
   </p:sldMasterIdLst>
+  <p:notesMasterIdLst>
+    <p:notesMasterId r:id="rId12"/>
+  </p:notesMasterIdLst>
   <p:sldIdLst>
     <p:sldId id="256" r:id="rId2"/>
     <p:sldId id="257" r:id="rId3"/>
@@ -11,14 +14,11 @@
     <p:sldId id="259" r:id="rId5"/>
     <p:sldId id="260" r:id="rId6"/>
     <p:sldId id="261" r:id="rId7"/>
-    <p:sldId id="262" r:id="rId8"/>
-    <p:sldId id="263" r:id="rId9"/>
+    <p:sldId id="263" r:id="rId8"/>
+    <p:sldId id="262" r:id="rId9"/>
     <p:sldId id="264" r:id="rId10"/>
     <p:sldId id="265" r:id="rId11"/>
   </p:sldIdLst>
-  <p:notesMasterIdLst>
-    <p:notesMasterId r:id="rId12"/>
-  </p:notesMasterIdLst>
   <p:sldSz cx="12192000" cy="6858000"/>
   <p:notesSz cx="6858000" cy="12192000"/>
   <p:defaultTextStyle>
@@ -113,13 +113,20 @@
       </a:defRPr>
     </a:lvl9pPr>
   </p:defaultTextStyle>
+  <p:extLst>
+    <p:ext uri="{EFAFB233-063F-42B5-8137-9DF3F51BA10A}">
+      <p15:sldGuideLst xmlns:p15="http://schemas.microsoft.com/office/powerpoint/2012/main"/>
+    </p:ext>
+  </p:extLst>
 </p:presentation>
 </file>
 
 <file path=ppt/charts/chart1.xml><?xml version="1.0" encoding="utf-8"?>
-<c:chartSpace xmlns:c="http://schemas.openxmlformats.org/drawingml/2006/chart" xmlns:a="http://schemas.openxmlformats.org/drawingml/2006/main" xmlns:r="http://schemas.openxmlformats.org/officeDocument/2006/relationships">
+<c:chartSpace xmlns:c="http://schemas.openxmlformats.org/drawingml/2006/chart" xmlns:a="http://schemas.openxmlformats.org/drawingml/2006/main" xmlns:r="http://schemas.openxmlformats.org/officeDocument/2006/relationships" xmlns:c16r2="http://schemas.microsoft.com/office/drawing/2015/06/chart">
   <c:date1904 val="0"/>
+  <c:lang val="ru-RU"/>
   <c:roundedCorners val="1"/>
+  <c:style val="2"/>
   <c:chart>
     <c:autoTitleDeleted val="1"/>
     <c:plotArea>
@@ -151,18 +158,26 @@
           <c:invertIfNegative val="0"/>
           <c:dLbls>
             <c:numFmt formatCode="#,##0" sourceLinked="0"/>
+            <c:spPr>
+              <a:noFill/>
+              <a:ln>
+                <a:noFill/>
+              </a:ln>
+              <a:effectLst/>
+            </c:spPr>
             <c:txPr>
               <a:bodyPr/>
               <a:lstStyle/>
               <a:p>
                 <a:pPr>
-                  <a:defRPr b="0" i="0" strike="noStrike" sz="1000" u="none">
+                  <a:defRPr sz="1000" b="0" i="0" u="none" strike="noStrike">
                     <a:solidFill>
                       <a:srgbClr val="20221F"/>
                     </a:solidFill>
                     <a:latin typeface="Arial"/>
                   </a:defRPr>
                 </a:pPr>
+                <a:endParaRPr lang="ru-RU"/>
               </a:p>
             </c:txPr>
             <c:showLegendKey val="0"/>
@@ -172,28 +187,31 @@
             <c:showPercent val="0"/>
             <c:showBubbleSize val="0"/>
             <c:showLeaderLines val="0"/>
+            <c:extLst>
+              <c:ext xmlns:c15="http://schemas.microsoft.com/office/drawing/2012/chart" uri="{CE6537A1-D6FC-4f65-9D91-7224C49458BB}">
+                <c15:showLeaderLines val="0"/>
+              </c:ext>
+            </c:extLst>
           </c:dLbls>
           <c:cat>
-            <c:multiLvlStrRef>
+            <c:strRef>
               <c:f>Sheet1!$A$2:$A$5</c:f>
-              <c:multiLvlStrCache>
+              <c:strCache>
                 <c:ptCount val="4"/>
-                <c:lvl>
-                  <c:pt idx="0">
-                    <c:v>Прямые заходы</c:v>
-                  </c:pt>
-                  <c:pt idx="1">
-                    <c:v>Сохран. страницы</c:v>
-                  </c:pt>
-                  <c:pt idx="2">
-                    <c:v>Ссылки на сайтах</c:v>
-                  </c:pt>
-                  <c:pt idx="3">
-                    <c:v>Поиск. системы</c:v>
-                  </c:pt>
-                </c:lvl>
-              </c:multiLvlStrCache>
-            </c:multiLvlStrRef>
+                <c:pt idx="0">
+                  <c:v>Прямые заходы</c:v>
+                </c:pt>
+                <c:pt idx="1">
+                  <c:v>Сохран. страницы</c:v>
+                </c:pt>
+                <c:pt idx="2">
+                  <c:v>Ссылки на сайтах</c:v>
+                </c:pt>
+                <c:pt idx="3">
+                  <c:v>Поиск. системы</c:v>
+                </c:pt>
+              </c:strCache>
+            </c:strRef>
           </c:cat>
           <c:val>
             <c:numRef>
@@ -216,36 +234,23 @@
               </c:numCache>
             </c:numRef>
           </c:val>
+          <c:extLst>
+            <c:ext xmlns:c16="http://schemas.microsoft.com/office/drawing/2014/chart" uri="{C3380CC4-5D6E-409C-BE32-E72D297353CC}">
+              <c16:uniqueId val="{00000000-8405-4417-98DC-C7102130942B}"/>
+            </c:ext>
+          </c:extLst>
         </c:ser>
         <c:dLbls>
-          <c:numFmt formatCode="#,##0" sourceLinked="0"/>
-          <c:txPr>
-            <a:bodyPr/>
-            <a:lstStyle/>
-            <a:p>
-              <a:pPr>
-                <a:defRPr b="0" i="0" strike="noStrike" sz="1000" u="none">
-                  <a:solidFill>
-                    <a:srgbClr val="20221F"/>
-                  </a:solidFill>
-                  <a:latin typeface="Arial"/>
-                </a:defRPr>
-              </a:pPr>
-            </a:p>
-          </c:txPr>
           <c:showLegendKey val="0"/>
           <c:showVal val="1"/>
           <c:showCatName val="0"/>
           <c:showSerName val="0"/>
           <c:showPercent val="0"/>
           <c:showBubbleSize val="0"/>
-          <c:showLeaderLines val="0"/>
         </c:dLbls>
         <c:gapWidth val="35"/>
-        <c:overlap val="0"/>
         <c:axId val="2094734554"/>
         <c:axId val="2094734552"/>
-        <c:axId val="2094734556"/>
       </c:barChart>
       <c:catAx>
         <c:axId val="2094734554"/>
@@ -284,6 +289,7 @@
         <c:crosses val="autoZero"/>
         <c:auto val="1"/>
         <c:lblAlgn val="ctr"/>
+        <c:lblOffset val="100"/>
         <c:noMultiLvlLbl val="1"/>
       </c:catAx>
       <c:valAx>
@@ -297,30 +303,6 @@
         <c:majorTickMark val="out"/>
         <c:minorTickMark val="none"/>
         <c:tickLblPos val="low"/>
-        <c:spPr>
-          <a:ln w="12700" cap="flat">
-            <a:solidFill>
-              <a:srgbClr val="888888"/>
-            </a:solidFill>
-            <a:prstDash val="solid"/>
-            <a:round/>
-          </a:ln>
-        </c:spPr>
-        <c:txPr>
-          <a:bodyPr/>
-          <a:lstStyle/>
-          <a:p>
-            <a:pPr>
-              <a:defRPr sz="1200" b="0" i="0" u="none" strike="noStrike">
-                <a:solidFill>
-                  <a:srgbClr val="000000"/>
-                </a:solidFill>
-                <a:latin typeface="Arial"/>
-              </a:defRPr>
-            </a:pPr>
-            <a:endParaRPr lang="en-US"/>
-          </a:p>
-        </c:txPr>
         <c:crossAx val="2094734554"/>
         <c:crosses val="autoZero"/>
         <c:crossBetween val="between"/>
@@ -335,6 +317,7 @@
     </c:plotArea>
     <c:plotVisOnly val="1"/>
     <c:dispBlanksAs val="span"/>
+    <c:showDLblsOverMax val="1"/>
   </c:chart>
   <c:spPr>
     <a:solidFill>
@@ -352,268 +335,11 @@
 </file>
 
 <file path=ppt/charts/chart2.xml><?xml version="1.0" encoding="utf-8"?>
-<c:chartSpace xmlns:c="http://schemas.openxmlformats.org/drawingml/2006/chart" xmlns:a="http://schemas.openxmlformats.org/drawingml/2006/main" xmlns:r="http://schemas.openxmlformats.org/officeDocument/2006/relationships">
+<c:chartSpace xmlns:c="http://schemas.openxmlformats.org/drawingml/2006/chart" xmlns:a="http://schemas.openxmlformats.org/drawingml/2006/main" xmlns:r="http://schemas.openxmlformats.org/officeDocument/2006/relationships" xmlns:c16r2="http://schemas.microsoft.com/office/drawing/2015/06/chart">
   <c:date1904 val="0"/>
+  <c:lang val="ru-RU"/>
   <c:roundedCorners val="1"/>
-  <c:chart>
-    <c:autoTitleDeleted val="1"/>
-    <c:plotArea>
-      <c:layout/>
-      <c:lineChart>
-        <c:varyColors val="0"/>
-        <c:ser>
-          <c:idx val="0"/>
-          <c:order val="0"/>
-          <c:tx>
-            <c:strRef>
-              <c:f>Sheet1!$B$1</c:f>
-              <c:strCache>
-                <c:ptCount val="1"/>
-                <c:pt idx="0">
-                  <c:v>Посетители</c:v>
-                </c:pt>
-              </c:strCache>
-            </c:strRef>
-          </c:tx>
-          <c:spPr>
-            <a:solidFill>
-              <a:srgbClr val="D38A62"/>
-            </a:solidFill>
-            <a:ln w="31750" cap="flat">
-              <a:solidFill>
-                <a:srgbClr val="D38A62"/>
-              </a:solidFill>
-              <a:prstDash val="solid"/>
-              <a:round/>
-            </a:ln>
-            <a:effectLst/>
-          </c:spPr>
-          <c:invertIfNegative val="0"/>
-          <c:dLbls>
-            <c:numFmt formatCode="#,##0" sourceLinked="0"/>
-            <c:txPr>
-              <a:bodyPr/>
-              <a:lstStyle/>
-              <a:p>
-                <a:pPr>
-                  <a:defRPr b="0" i="0" strike="noStrike" sz="1000" u="none">
-                    <a:solidFill>
-                      <a:srgbClr val="20221F"/>
-                    </a:solidFill>
-                    <a:latin typeface="Arial"/>
-                  </a:defRPr>
-                </a:pPr>
-              </a:p>
-            </c:txPr>
-            <c:dLblPos val="t"/>
-            <c:showLegendKey val="0"/>
-            <c:showVal val="1"/>
-            <c:showCatName val="0"/>
-            <c:showSerName val="0"/>
-            <c:showPercent val="0"/>
-            <c:showBubbleSize val="0"/>
-            <c:showLeaderLines val="0"/>
-          </c:dLbls>
-          <c:marker>
-            <c:symbol val="circle"/>
-            <c:size val="7"/>
-            <c:spPr>
-              <a:solidFill>
-                <a:srgbClr val="D38A62"/>
-              </a:solidFill>
-              <a:ln w="9525" cap="flat">
-                <a:solidFill>
-                  <a:srgbClr val="D38A62"/>
-                </a:solidFill>
-                <a:prstDash val="solid"/>
-                <a:round/>
-              </a:ln>
-              <a:effectLst/>
-            </c:spPr>
-          </c:marker>
-          <c:cat>
-            <c:multiLvlStrRef>
-              <c:f>Sheet1!$A$2:$A$5</c:f>
-              <c:multiLvlStrCache>
-                <c:ptCount val="4"/>
-                <c:lvl>
-                  <c:pt idx="0">
-                    <c:v>22.09</c:v>
-                  </c:pt>
-                  <c:pt idx="1">
-                    <c:v>23.09</c:v>
-                  </c:pt>
-                  <c:pt idx="2">
-                    <c:v>26.09</c:v>
-                  </c:pt>
-                  <c:pt idx="3">
-                    <c:v>28.09</c:v>
-                  </c:pt>
-                </c:lvl>
-              </c:multiLvlStrCache>
-            </c:multiLvlStrRef>
-          </c:cat>
-          <c:val>
-            <c:numRef>
-              <c:f>Sheet1!$B$2:$B$5</c:f>
-              <c:numCache>
-                <c:formatCode>General</c:formatCode>
-                <c:ptCount val="4"/>
-                <c:pt idx="0">
-                  <c:v>9</c:v>
-                </c:pt>
-                <c:pt idx="1">
-                  <c:v>1</c:v>
-                </c:pt>
-                <c:pt idx="2">
-                  <c:v>3</c:v>
-                </c:pt>
-                <c:pt idx="3">
-                  <c:v>8</c:v>
-                </c:pt>
-              </c:numCache>
-            </c:numRef>
-          </c:val>
-          <c:smooth val="0"/>
-        </c:ser>
-        <c:dLbls>
-          <c:numFmt formatCode="#,##0" sourceLinked="0"/>
-          <c:txPr>
-            <a:bodyPr/>
-            <a:lstStyle/>
-            <a:p>
-              <a:pPr>
-                <a:defRPr b="0" i="0" strike="noStrike" sz="1000" u="none">
-                  <a:solidFill>
-                    <a:srgbClr val="20221F"/>
-                  </a:solidFill>
-                  <a:latin typeface="Arial"/>
-                </a:defRPr>
-              </a:pPr>
-            </a:p>
-          </c:txPr>
-          <c:dLblPos val="t"/>
-          <c:showLegendKey val="0"/>
-          <c:showVal val="1"/>
-          <c:showCatName val="0"/>
-          <c:showSerName val="0"/>
-          <c:showPercent val="0"/>
-          <c:showBubbleSize val="0"/>
-          <c:showLeaderLines val="0"/>
-        </c:dLbls>
-        <c:marker val="1"/>
-        <c:axId val="2094734554"/>
-        <c:axId val="2094734552"/>
-        <c:axId val="2094734556"/>
-      </c:lineChart>
-      <c:catAx>
-        <c:axId val="2094734554"/>
-        <c:scaling>
-          <c:orientation val="minMax"/>
-        </c:scaling>
-        <c:delete val="0"/>
-        <c:axPos val="b"/>
-        <c:numFmt formatCode="General" sourceLinked="1"/>
-        <c:majorTickMark val="out"/>
-        <c:minorTickMark val="none"/>
-        <c:tickLblPos val="low"/>
-        <c:spPr>
-          <a:ln w="12700" cap="flat">
-            <a:noFill/>
-            <a:prstDash val="solid"/>
-            <a:round/>
-          </a:ln>
-        </c:spPr>
-        <c:txPr>
-          <a:bodyPr/>
-          <a:lstStyle/>
-          <a:p>
-            <a:pPr>
-              <a:defRPr sz="950" b="0" i="0" u="none" strike="noStrike">
-                <a:solidFill>
-                  <a:srgbClr val="20221F"/>
-                </a:solidFill>
-                <a:latin typeface="Arial"/>
-              </a:defRPr>
-            </a:pPr>
-            <a:endParaRPr lang="en-US"/>
-          </a:p>
-        </c:txPr>
-        <c:crossAx val="2094734552"/>
-        <c:crosses val="autoZero"/>
-        <c:auto val="1"/>
-        <c:lblAlgn val="ctr"/>
-        <c:noMultiLvlLbl val="1"/>
-      </c:catAx>
-      <c:valAx>
-        <c:axId val="2094734552"/>
-        <c:scaling>
-          <c:orientation val="minMax"/>
-        </c:scaling>
-        <c:delete val="1"/>
-        <c:axPos val="l"/>
-        <c:numFmt formatCode="General" sourceLinked="0"/>
-        <c:majorTickMark val="out"/>
-        <c:minorTickMark val="none"/>
-        <c:tickLblPos val="nextTo"/>
-        <c:spPr>
-          <a:ln w="12700" cap="flat">
-            <a:solidFill>
-              <a:srgbClr val="888888"/>
-            </a:solidFill>
-            <a:prstDash val="solid"/>
-            <a:round/>
-          </a:ln>
-        </c:spPr>
-        <c:txPr>
-          <a:bodyPr/>
-          <a:lstStyle/>
-          <a:p>
-            <a:pPr>
-              <a:defRPr sz="1200" b="0" i="0" u="none" strike="noStrike">
-                <a:solidFill>
-                  <a:srgbClr val="000000"/>
-                </a:solidFill>
-                <a:latin typeface="Arial"/>
-              </a:defRPr>
-            </a:pPr>
-            <a:endParaRPr lang="en-US"/>
-          </a:p>
-        </c:txPr>
-        <c:crossAx val="2094734554"/>
-        <c:crosses val="autoZero"/>
-        <c:crossBetween val="between"/>
-      </c:valAx>
-      <c:spPr>
-        <a:noFill/>
-        <a:ln>
-          <a:noFill/>
-        </a:ln>
-        <a:effectLst/>
-      </c:spPr>
-    </c:plotArea>
-    <c:plotVisOnly val="1"/>
-    <c:dispBlanksAs val="span"/>
-  </c:chart>
-  <c:spPr>
-    <a:solidFill>
-      <a:srgbClr val="FFFFFF"/>
-    </a:solidFill>
-    <a:ln>
-      <a:noFill/>
-    </a:ln>
-    <a:effectLst/>
-  </c:spPr>
-  <c:externalData r:id="rId1">
-    <c:autoUpdate val="0"/>
-  </c:externalData>
-</c:chartSpace>
-</file>
-
-<file path=ppt/charts/chart3.xml><?xml version="1.0" encoding="utf-8"?>
-<c:chartSpace xmlns:c="http://schemas.openxmlformats.org/drawingml/2006/chart" xmlns:a="http://schemas.openxmlformats.org/drawingml/2006/main" xmlns:r="http://schemas.openxmlformats.org/officeDocument/2006/relationships">
-  <c:date1904 val="0"/>
-  <c:roundedCorners val="1"/>
+  <c:style val="2"/>
   <c:chart>
     <c:autoTitleDeleted val="1"/>
     <c:plotArea>
@@ -656,6 +382,11 @@
               </a:solidFill>
               <a:effectLst/>
             </c:spPr>
+            <c:extLst>
+              <c:ext xmlns:c16="http://schemas.microsoft.com/office/drawing/2014/chart" uri="{C3380CC4-5D6E-409C-BE32-E72D297353CC}">
+                <c16:uniqueId val="{00000001-F411-45B8-A25C-49AA1F64DAE2}"/>
+              </c:ext>
+            </c:extLst>
           </c:dPt>
           <c:dPt>
             <c:idx val="1"/>
@@ -666,6 +397,11 @@
               </a:solidFill>
               <a:effectLst/>
             </c:spPr>
+            <c:extLst>
+              <c:ext xmlns:c16="http://schemas.microsoft.com/office/drawing/2014/chart" uri="{C3380CC4-5D6E-409C-BE32-E72D297353CC}">
+                <c16:uniqueId val="{00000003-F411-45B8-A25C-49AA1F64DAE2}"/>
+              </c:ext>
+            </c:extLst>
           </c:dPt>
           <c:dPt>
             <c:idx val="2"/>
@@ -676,6 +412,11 @@
               </a:solidFill>
               <a:effectLst/>
             </c:spPr>
+            <c:extLst>
+              <c:ext xmlns:c16="http://schemas.microsoft.com/office/drawing/2014/chart" uri="{C3380CC4-5D6E-409C-BE32-E72D297353CC}">
+                <c16:uniqueId val="{00000005-F411-45B8-A25C-49AA1F64DAE2}"/>
+              </c:ext>
+            </c:extLst>
           </c:dPt>
           <c:dLbls>
             <c:dLbl>
@@ -694,6 +435,7 @@
                       <a:latin typeface="Arial"/>
                     </a:defRPr>
                   </a:pPr>
+                  <a:endParaRPr lang="ru-RU"/>
                 </a:p>
               </c:txPr>
               <c:showLegendKey val="0"/>
@@ -702,6 +444,12 @@
               <c:showSerName val="0"/>
               <c:showPercent val="0"/>
               <c:showBubbleSize val="0"/>
+              <c:extLst>
+                <c:ext xmlns:c15="http://schemas.microsoft.com/office/drawing/2012/chart" uri="{CE6537A1-D6FC-4f65-9D91-7224C49458BB}"/>
+                <c:ext xmlns:c16="http://schemas.microsoft.com/office/drawing/2014/chart" uri="{C3380CC4-5D6E-409C-BE32-E72D297353CC}">
+                  <c16:uniqueId val="{00000001-F411-45B8-A25C-49AA1F64DAE2}"/>
+                </c:ext>
+              </c:extLst>
             </c:dLbl>
             <c:dLbl>
               <c:idx val="1"/>
@@ -719,6 +467,7 @@
                       <a:latin typeface="Arial"/>
                     </a:defRPr>
                   </a:pPr>
+                  <a:endParaRPr lang="ru-RU"/>
                 </a:p>
               </c:txPr>
               <c:showLegendKey val="0"/>
@@ -727,6 +476,12 @@
               <c:showSerName val="0"/>
               <c:showPercent val="0"/>
               <c:showBubbleSize val="0"/>
+              <c:extLst>
+                <c:ext xmlns:c15="http://schemas.microsoft.com/office/drawing/2012/chart" uri="{CE6537A1-D6FC-4f65-9D91-7224C49458BB}"/>
+                <c:ext xmlns:c16="http://schemas.microsoft.com/office/drawing/2014/chart" uri="{C3380CC4-5D6E-409C-BE32-E72D297353CC}">
+                  <c16:uniqueId val="{00000003-F411-45B8-A25C-49AA1F64DAE2}"/>
+                </c:ext>
+              </c:extLst>
             </c:dLbl>
             <c:dLbl>
               <c:idx val="2"/>
@@ -744,6 +499,7 @@
                       <a:latin typeface="Arial"/>
                     </a:defRPr>
                   </a:pPr>
+                  <a:endParaRPr lang="ru-RU"/>
                 </a:p>
               </c:txPr>
               <c:showLegendKey val="0"/>
@@ -752,8 +508,21 @@
               <c:showSerName val="0"/>
               <c:showPercent val="0"/>
               <c:showBubbleSize val="0"/>
+              <c:extLst>
+                <c:ext xmlns:c15="http://schemas.microsoft.com/office/drawing/2012/chart" uri="{CE6537A1-D6FC-4f65-9D91-7224C49458BB}"/>
+                <c:ext xmlns:c16="http://schemas.microsoft.com/office/drawing/2014/chart" uri="{C3380CC4-5D6E-409C-BE32-E72D297353CC}">
+                  <c16:uniqueId val="{00000005-F411-45B8-A25C-49AA1F64DAE2}"/>
+                </c:ext>
+              </c:extLst>
             </c:dLbl>
             <c:numFmt formatCode="0&quot;%&quot;" sourceLinked="0"/>
+            <c:spPr>
+              <a:noFill/>
+              <a:ln>
+                <a:noFill/>
+              </a:ln>
+              <a:effectLst/>
+            </c:spPr>
             <c:txPr>
               <a:bodyPr/>
               <a:lstStyle/>
@@ -766,6 +535,7 @@
                     <a:latin typeface="Arial"/>
                   </a:defRPr>
                 </a:pPr>
+                <a:endParaRPr lang="ru-RU"/>
               </a:p>
             </c:txPr>
             <c:showLegendKey val="0"/>
@@ -775,6 +545,9 @@
             <c:showPercent val="1"/>
             <c:showBubbleSize val="0"/>
             <c:showLeaderLines val="0"/>
+            <c:extLst>
+              <c:ext xmlns:c15="http://schemas.microsoft.com/office/drawing/2012/chart" uri="{CE6537A1-D6FC-4f65-9D91-7224C49458BB}"/>
+            </c:extLst>
           </c:dLbls>
           <c:cat>
             <c:strRef>
@@ -797,6 +570,7 @@
             <c:numRef>
               <c:f>Sheet1!$B$2:$B$4</c:f>
               <c:numCache>
+                <c:formatCode>General</c:formatCode>
                 <c:ptCount val="3"/>
                 <c:pt idx="0">
                   <c:v>50</c:v>
@@ -810,7 +584,21 @@
               </c:numCache>
             </c:numRef>
           </c:val>
+          <c:extLst>
+            <c:ext xmlns:c16="http://schemas.microsoft.com/office/drawing/2014/chart" uri="{C3380CC4-5D6E-409C-BE32-E72D297353CC}">
+              <c16:uniqueId val="{00000006-F411-45B8-A25C-49AA1F64DAE2}"/>
+            </c:ext>
+          </c:extLst>
         </c:ser>
+        <c:dLbls>
+          <c:showLegendKey val="0"/>
+          <c:showVal val="0"/>
+          <c:showCatName val="0"/>
+          <c:showSerName val="0"/>
+          <c:showPercent val="0"/>
+          <c:showBubbleSize val="0"/>
+          <c:showLeaderLines val="0"/>
+        </c:dLbls>
         <c:firstSliceAng val="0"/>
         <c:holeSize val="55"/>
       </c:doughnutChart>
@@ -842,6 +630,7 @@
     </c:legend>
     <c:plotVisOnly val="1"/>
     <c:dispBlanksAs val="span"/>
+    <c:showDLblsOverMax val="1"/>
   </c:chart>
   <c:spPr>
     <a:noFill/>
@@ -878,234 +667,10 @@
           <a:chExt cx="0" cy="0"/>
         </a:xfrm>
       </p:grpSpPr>
-      <p:sp>
-        <p:nvSpPr>
-          <p:cNvPr id="2" name="Header Placeholder 1"/>
-          <p:cNvSpPr>
-            <a:spLocks noGrp="1"/>
-          </p:cNvSpPr>
-          <p:nvPr>
-            <p:ph type="hdr" sz="quarter"/>
-          </p:nvPr>
-        </p:nvSpPr>
-        <p:spPr>
-          <a:xfrm>
-            <a:off x="0" y="0"/>
-            <a:ext cx="2971800" cy="458788"/>
-          </a:xfrm>
-          <a:prstGeom prst="rect">
-            <a:avLst/>
-          </a:prstGeom>
-        </p:spPr>
-        <p:txBody>
-          <a:bodyPr vert="horz" lIns="91440" tIns="45720" rIns="91440" bIns="45720" rtlCol="0"/>
-          <a:lstStyle>
-            <a:lvl1pPr algn="l">
-              <a:defRPr sz="1200"/>
-            </a:lvl1pPr>
-          </a:lstStyle>
-          <a:p>
-            <a:endParaRPr lang="en-US"/>
-          </a:p>
-        </p:txBody>
-      </p:sp>
-      <p:sp>
-        <p:nvSpPr>
-          <p:cNvPr id="3" name="Date Placeholder 2"/>
-          <p:cNvSpPr>
-            <a:spLocks noGrp="1"/>
-          </p:cNvSpPr>
-          <p:nvPr>
-            <p:ph type="dt" idx="1"/>
-          </p:nvPr>
-        </p:nvSpPr>
-        <p:spPr>
-          <a:xfrm>
-            <a:off x="3884613" y="0"/>
-            <a:ext cx="2971800" cy="458788"/>
-          </a:xfrm>
-          <a:prstGeom prst="rect">
-            <a:avLst/>
-          </a:prstGeom>
-        </p:spPr>
-        <p:txBody>
-          <a:bodyPr vert="horz" lIns="91440" tIns="45720" rIns="91440" bIns="45720" rtlCol="0"/>
-          <a:lstStyle>
-            <a:lvl1pPr algn="r">
-              <a:defRPr sz="1200"/>
-            </a:lvl1pPr>
-          </a:lstStyle>
-          <a:p>
-            <a:fld id="{5282F153-3F37-0F45-9E97-73ACFA13230C}" type="datetimeFigureOut">
-              <a:rPr lang="en-US"/>
-              <a:t>7/23/19</a:t>
-            </a:fld>
-            <a:endParaRPr lang="en-US"/>
-          </a:p>
-        </p:txBody>
-      </p:sp>
-      <p:sp>
-        <p:nvSpPr>
-          <p:cNvPr id="4" name="Slide Image Placeholder 3"/>
-          <p:cNvSpPr>
-            <a:spLocks noGrp="1" noRot="1" noChangeAspect="1"/>
-          </p:cNvSpPr>
-          <p:nvPr>
-            <p:ph type="sldImg" idx="2"/>
-          </p:nvPr>
-        </p:nvSpPr>
-        <p:spPr>
-          <a:xfrm>
-            <a:off x="685800" y="1143000"/>
-            <a:ext cx="5486400" cy="3086100"/>
-          </a:xfrm>
-          <a:prstGeom prst="rect">
-            <a:avLst/>
-          </a:prstGeom>
-          <a:noFill/>
-          <a:ln w="12700">
-            <a:solidFill>
-              <a:prstClr val="black"/>
-            </a:solidFill>
-          </a:ln>
-        </p:spPr>
-        <p:txBody>
-          <a:bodyPr vert="horz" lIns="91440" tIns="45720" rIns="91440" bIns="45720" rtlCol="0" anchor="ctr"/>
-          <a:lstStyle/>
-          <a:p>
-            <a:endParaRPr lang="en-US"/>
-          </a:p>
-        </p:txBody>
-      </p:sp>
-      <p:sp>
-        <p:nvSpPr>
-          <p:cNvPr id="5" name="Notes Placeholder 4"/>
-          <p:cNvSpPr>
-            <a:spLocks noGrp="1"/>
-          </p:cNvSpPr>
-          <p:nvPr>
-            <p:ph type="body" sz="quarter" idx="3"/>
-          </p:nvPr>
-        </p:nvSpPr>
-        <p:spPr>
-          <a:xfrm>
-            <a:off x="685800" y="4400550"/>
-            <a:ext cx="5486400" cy="3600450"/>
-          </a:xfrm>
-          <a:prstGeom prst="rect">
-            <a:avLst/>
-          </a:prstGeom>
-        </p:spPr>
-        <p:txBody>
-          <a:bodyPr vert="horz" lIns="91440" tIns="45720" rIns="91440" bIns="45720" rtlCol="0"/>
-          <a:lstStyle/>
-          <a:p>
-            <a:pPr lvl="0"/>
-            <a:r>
-              <a:rPr lang="en-US"/>
-              <a:t>Click to edit Master text styles</a:t>
-            </a:r>
-          </a:p>
-          <a:p>
-            <a:pPr lvl="1"/>
-            <a:r>
-              <a:rPr lang="en-US"/>
-              <a:t>Second level</a:t>
-            </a:r>
-          </a:p>
-          <a:p>
-            <a:pPr lvl="2"/>
-            <a:r>
-              <a:rPr lang="en-US"/>
-              <a:t>Third level</a:t>
-            </a:r>
-          </a:p>
-          <a:p>
-            <a:pPr lvl="3"/>
-            <a:r>
-              <a:rPr lang="en-US"/>
-              <a:t>Fourth level</a:t>
-            </a:r>
-          </a:p>
-          <a:p>
-            <a:pPr lvl="4"/>
-            <a:r>
-              <a:rPr lang="en-US"/>
-              <a:t>Fifth level</a:t>
-            </a:r>
-          </a:p>
-        </p:txBody>
-      </p:sp>
-      <p:sp>
-        <p:nvSpPr>
-          <p:cNvPr id="6" name="Footer Placeholder 5"/>
-          <p:cNvSpPr>
-            <a:spLocks noGrp="1"/>
-          </p:cNvSpPr>
-          <p:nvPr>
-            <p:ph type="ftr" sz="quarter" idx="4"/>
-          </p:nvPr>
-        </p:nvSpPr>
-        <p:spPr>
-          <a:xfrm>
-            <a:off x="0" y="8685213"/>
-            <a:ext cx="2971800" cy="458787"/>
-          </a:xfrm>
-          <a:prstGeom prst="rect">
-            <a:avLst/>
-          </a:prstGeom>
-        </p:spPr>
-        <p:txBody>
-          <a:bodyPr vert="horz" lIns="91440" tIns="45720" rIns="91440" bIns="45720" rtlCol="0" anchor="b"/>
-          <a:lstStyle>
-            <a:lvl1pPr algn="l">
-              <a:defRPr sz="1200"/>
-            </a:lvl1pPr>
-          </a:lstStyle>
-          <a:p>
-            <a:endParaRPr lang="en-US"/>
-          </a:p>
-        </p:txBody>
-      </p:sp>
-      <p:sp>
-        <p:nvSpPr>
-          <p:cNvPr id="7" name="Slide Number Placeholder 6"/>
-          <p:cNvSpPr>
-            <a:spLocks noGrp="1"/>
-          </p:cNvSpPr>
-          <p:nvPr>
-            <p:ph type="sldNum" sz="quarter" idx="5"/>
-          </p:nvPr>
-        </p:nvSpPr>
-        <p:spPr>
-          <a:xfrm>
-            <a:off x="3884613" y="8685213"/>
-            <a:ext cx="2971800" cy="458787"/>
-          </a:xfrm>
-          <a:prstGeom prst="rect">
-            <a:avLst/>
-          </a:prstGeom>
-        </p:spPr>
-        <p:txBody>
-          <a:bodyPr vert="horz" lIns="91440" tIns="45720" rIns="91440" bIns="45720" rtlCol="0" anchor="b"/>
-          <a:lstStyle>
-            <a:lvl1pPr algn="r">
-              <a:defRPr sz="1200"/>
-            </a:lvl1pPr>
-          </a:lstStyle>
-          <a:p>
-            <a:fld id="{CE5E9CC1-C706-0F49-92D6-E571CC5EEA8F}" type="slidenum">
-              <a:rPr lang="en-US"/>
-              <a:t>‹#›</a:t>
-            </a:fld>
-            <a:endParaRPr lang="en-US"/>
-          </a:p>
-        </p:txBody>
-      </p:sp>
     </p:spTree>
     <p:extLst>
       <p:ext uri="{BB962C8B-B14F-4D97-AF65-F5344CB8AC3E}">
-        <p14:creationId xmlns:p14="http://schemas.microsoft.com/office/powerpoint/2010/main" val="1024086991"/>
+        <p14:creationId xmlns:p14="http://schemas.microsoft.com/office/powerpoint/2010/main" val="4188070394"/>
       </p:ext>
     </p:extLst>
   </p:cSld>
@@ -1255,7 +820,6 @@
 Мы создаём Famigo — цифровое пространство, где собрана вся жизнь семьи. Сегодня бюджет, календарь, список покупок и общение разбросаны по десятку разных приложений, и никто в семье не видит полной картины. Famigo связывает эти разделы между собой: купили продукт — обновился бюджет, создали событие в календаре — пришло уведомление в общий чат.
 Мы уже разрабатываем MVP на React, Node.js и PostgreSQL и привлекаем 50 000 долларов на посевном раунде, чтобы завершить продукт и запустить его для первых семей-пользователей. Мы — команда из трёх разработчиков с опытом в архитектуре, анализе и маркетинге, и ищем инвестора, который поможет нам выйти на рынок семейных приложений нового поколения.</a:t>
             </a:r>
-            <a:endParaRPr lang="en-US" dirty="0"/>
           </a:p>
         </p:txBody>
       </p:sp>
@@ -1339,10 +903,6 @@
           <a:bodyPr/>
           <a:lstStyle/>
           <a:p>
-            <a:r>
-              <a:rPr lang="en-US" dirty="0"/>
-              <a:t/>
-            </a:r>
             <a:endParaRPr lang="en-US" dirty="0"/>
           </a:p>
         </p:txBody>
@@ -1427,10 +987,6 @@
           <a:bodyPr/>
           <a:lstStyle/>
           <a:p>
-            <a:r>
-              <a:rPr lang="en-US" dirty="0"/>
-              <a:t/>
-            </a:r>
             <a:endParaRPr lang="en-US" dirty="0"/>
           </a:p>
         </p:txBody>
@@ -1515,10 +1071,6 @@
           <a:bodyPr/>
           <a:lstStyle/>
           <a:p>
-            <a:r>
-              <a:rPr lang="en-US" dirty="0"/>
-              <a:t/>
-            </a:r>
             <a:endParaRPr lang="en-US" dirty="0"/>
           </a:p>
         </p:txBody>
@@ -1603,10 +1155,6 @@
           <a:bodyPr/>
           <a:lstStyle/>
           <a:p>
-            <a:r>
-              <a:rPr lang="en-US" dirty="0"/>
-              <a:t/>
-            </a:r>
             <a:endParaRPr lang="en-US" dirty="0"/>
           </a:p>
         </p:txBody>
@@ -1691,10 +1239,6 @@
           <a:bodyPr/>
           <a:lstStyle/>
           <a:p>
-            <a:r>
-              <a:rPr lang="en-US" dirty="0"/>
-              <a:t/>
-            </a:r>
             <a:endParaRPr lang="en-US" dirty="0"/>
           </a:p>
         </p:txBody>
@@ -1779,10 +1323,6 @@
           <a:bodyPr/>
           <a:lstStyle/>
           <a:p>
-            <a:r>
-              <a:rPr lang="en-US" dirty="0"/>
-              <a:t/>
-            </a:r>
             <a:endParaRPr lang="en-US" dirty="0"/>
           </a:p>
         </p:txBody>
@@ -1867,10 +1407,6 @@
           <a:bodyPr/>
           <a:lstStyle/>
           <a:p>
-            <a:r>
-              <a:rPr lang="en-US" dirty="0"/>
-              <a:t/>
-            </a:r>
             <a:endParaRPr lang="en-US" dirty="0"/>
           </a:p>
         </p:txBody>
@@ -1955,10 +1491,6 @@
           <a:bodyPr/>
           <a:lstStyle/>
           <a:p>
-            <a:r>
-              <a:rPr lang="en-US" dirty="0"/>
-              <a:t/>
-            </a:r>
             <a:endParaRPr lang="en-US" dirty="0"/>
           </a:p>
         </p:txBody>
@@ -2043,10 +1575,6 @@
           <a:bodyPr/>
           <a:lstStyle/>
           <a:p>
-            <a:r>
-              <a:rPr lang="en-US" dirty="0"/>
-              <a:t/>
-            </a:r>
             <a:endParaRPr lang="en-US" dirty="0"/>
           </a:p>
         </p:txBody>
@@ -2120,6 +1648,11 @@
 <file path=ppt/slideMasters/slideMaster1.xml><?xml version="1.0" encoding="utf-8"?>
 <p:sldMaster xmlns:a="http://schemas.openxmlformats.org/drawingml/2006/main" xmlns:r="http://schemas.openxmlformats.org/officeDocument/2006/relationships" xmlns:p="http://schemas.openxmlformats.org/presentationml/2006/main">
   <p:cSld>
+    <p:bg>
+      <p:bgRef idx="1001">
+        <a:schemeClr val="bg1"/>
+      </p:bgRef>
+    </p:bg>
     <p:spTree>
       <p:nvGrpSpPr>
         <p:cNvPr id="1" name=""/>
@@ -2402,6 +1935,7 @@
         <a:solidFill>
           <a:srgbClr val="667A55"/>
         </a:solidFill>
+        <a:effectLst/>
       </p:bgPr>
     </p:bg>
     <p:spTree>
@@ -2505,11 +2039,11 @@
           <a:bodyPr wrap="square" lIns="0" tIns="0" rIns="0" bIns="0" rtlCol="0" anchor="ctr"/>
           <a:lstStyle/>
           <a:p>
-            <a:pPr indent="0" marL="0">
-              <a:buNone/>
-            </a:pPr>
-            <a:r>
-              <a:rPr lang="en-US" sz="1300" b="1" spc="300" kern="0" dirty="0">
+            <a:pPr marL="0" indent="0">
+              <a:buNone/>
+            </a:pPr>
+            <a:r>
+              <a:rPr lang="en-US" sz="1300" b="1" kern="0" spc="300" dirty="0">
                 <a:solidFill>
                   <a:srgbClr val="E5EBE0"/>
                 </a:solidFill>
@@ -2544,7 +2078,7 @@
           <a:bodyPr wrap="square" lIns="0" tIns="0" rIns="0" bIns="0" rtlCol="0" anchor="ctr"/>
           <a:lstStyle/>
           <a:p>
-            <a:pPr indent="0" marL="0">
+            <a:pPr marL="0" indent="0">
               <a:buNone/>
             </a:pPr>
             <a:r>
@@ -2583,7 +2117,7 @@
           <a:bodyPr wrap="square" lIns="0" tIns="0" rIns="0" bIns="0" rtlCol="0" anchor="ctr"/>
           <a:lstStyle/>
           <a:p>
-            <a:pPr indent="0" marL="0">
+            <a:pPr marL="0" indent="0">
               <a:buNone/>
             </a:pPr>
             <a:r>
@@ -2622,7 +2156,7 @@
           <a:bodyPr wrap="square" lIns="0" tIns="0" rIns="0" bIns="0" rtlCol="0" anchor="ctr"/>
           <a:lstStyle/>
           <a:p>
-            <a:pPr indent="0" marL="0">
+            <a:pPr marL="0" indent="0">
               <a:buNone/>
             </a:pPr>
             <a:r>
@@ -2683,7 +2217,7 @@
           <a:bodyPr wrap="square" lIns="0" tIns="0" rIns="0" bIns="0" rtlCol="0" anchor="ctr"/>
           <a:lstStyle/>
           <a:p>
-            <a:pPr algn="ctr" indent="0" marL="0">
+            <a:pPr marL="0" indent="0" algn="ctr">
               <a:buNone/>
             </a:pPr>
             <a:r>
@@ -2747,7 +2281,7 @@
           <a:bodyPr wrap="square" lIns="0" tIns="0" rIns="0" bIns="0" rtlCol="0" anchor="ctr"/>
           <a:lstStyle/>
           <a:p>
-            <a:pPr indent="0" marL="0">
+            <a:pPr marL="0" indent="0">
               <a:buNone/>
             </a:pPr>
             <a:r>
@@ -2786,7 +2320,7 @@
           <a:bodyPr wrap="square" lIns="0" tIns="0" rIns="0" bIns="0" rtlCol="0" anchor="ctr"/>
           <a:lstStyle/>
           <a:p>
-            <a:pPr indent="0" marL="0">
+            <a:pPr marL="0" indent="0">
               <a:buNone/>
             </a:pPr>
             <a:r>
@@ -2820,6 +2354,7 @@
         <a:solidFill>
           <a:srgbClr val="667A55"/>
         </a:solidFill>
+        <a:effectLst/>
       </p:bgPr>
     </p:bg>
     <p:spTree>
@@ -2901,7 +2436,7 @@
           <a:bodyPr wrap="square" lIns="0" tIns="0" rIns="0" bIns="0" rtlCol="0" anchor="ctr"/>
           <a:lstStyle/>
           <a:p>
-            <a:pPr indent="0" marL="0">
+            <a:pPr marL="0" indent="0">
               <a:buNone/>
             </a:pPr>
             <a:r>
@@ -2940,7 +2475,7 @@
           <a:bodyPr wrap="square" lIns="0" tIns="0" rIns="0" bIns="0" rtlCol="0" anchor="ctr"/>
           <a:lstStyle/>
           <a:p>
-            <a:pPr indent="0" marL="0">
+            <a:pPr marL="0" indent="0">
               <a:buNone/>
             </a:pPr>
             <a:r>
@@ -3004,7 +2539,7 @@
           <a:bodyPr wrap="square" lIns="0" tIns="0" rIns="0" bIns="0" rtlCol="0" anchor="ctr"/>
           <a:lstStyle/>
           <a:p>
-            <a:pPr indent="0" marL="0">
+            <a:pPr marL="0" indent="0">
               <a:buNone/>
             </a:pPr>
             <a:r>
@@ -3043,7 +2578,7 @@
           <a:bodyPr wrap="square" lIns="0" tIns="0" rIns="0" bIns="0" rtlCol="0" anchor="ctr"/>
           <a:lstStyle/>
           <a:p>
-            <a:pPr indent="0" marL="0">
+            <a:pPr marL="0" indent="0">
               <a:buNone/>
             </a:pPr>
             <a:r>
@@ -3082,7 +2617,7 @@
           <a:bodyPr wrap="square" lIns="0" tIns="0" rIns="0" bIns="0" rtlCol="0" anchor="ctr"/>
           <a:lstStyle/>
           <a:p>
-            <a:pPr indent="0" marL="0">
+            <a:pPr marL="0" indent="0">
               <a:buNone/>
             </a:pPr>
             <a:r>
@@ -3121,7 +2656,7 @@
           <a:bodyPr wrap="square" lIns="0" tIns="0" rIns="0" bIns="0" rtlCol="0" anchor="ctr"/>
           <a:lstStyle/>
           <a:p>
-            <a:pPr indent="0" marL="0">
+            <a:pPr marL="0" indent="0">
               <a:buNone/>
             </a:pPr>
             <a:r>
@@ -3160,7 +2695,7 @@
           <a:bodyPr wrap="square" lIns="0" tIns="0" rIns="0" bIns="0" rtlCol="0" anchor="ctr"/>
           <a:lstStyle/>
           <a:p>
-            <a:pPr algn="r" indent="0" marL="0">
+            <a:pPr marL="0" indent="0" algn="r">
               <a:buNone/>
             </a:pPr>
             <a:r>
@@ -3194,6 +2729,7 @@
         <a:solidFill>
           <a:srgbClr val="F5F3EE"/>
         </a:solidFill>
+        <a:effectLst/>
       </p:bgPr>
     </p:bg>
     <p:spTree>
@@ -3231,11 +2767,11 @@
           <a:bodyPr wrap="square" lIns="0" tIns="0" rIns="0" bIns="0" rtlCol="0" anchor="ctr"/>
           <a:lstStyle/>
           <a:p>
-            <a:pPr indent="0" marL="0">
-              <a:buNone/>
-            </a:pPr>
-            <a:r>
-              <a:rPr lang="en-US" sz="1300" b="1" spc="200" kern="0" dirty="0">
+            <a:pPr marL="0" indent="0">
+              <a:buNone/>
+            </a:pPr>
+            <a:r>
+              <a:rPr lang="en-US" sz="1300" b="1" kern="0" spc="200" dirty="0">
                 <a:solidFill>
                   <a:srgbClr val="667A55"/>
                 </a:solidFill>
@@ -3270,7 +2806,7 @@
           <a:bodyPr wrap="square" lIns="0" tIns="0" rIns="0" bIns="0" rtlCol="0" anchor="ctr"/>
           <a:lstStyle/>
           <a:p>
-            <a:pPr indent="0" marL="0">
+            <a:pPr marL="0" indent="0">
               <a:buNone/>
             </a:pPr>
             <a:r>
@@ -3309,7 +2845,7 @@
           <a:bodyPr wrap="square" lIns="0" tIns="0" rIns="0" bIns="0" rtlCol="0" anchor="ctr"/>
           <a:lstStyle/>
           <a:p>
-            <a:pPr indent="0" marL="0">
+            <a:pPr marL="0" indent="0">
               <a:lnSpc>
                 <a:spcPct val="130000"/>
               </a:lnSpc>
@@ -3373,7 +2909,7 @@
           <a:bodyPr wrap="square" lIns="0" tIns="0" rIns="0" bIns="0" rtlCol="0" anchor="ctr"/>
           <a:lstStyle/>
           <a:p>
-            <a:pPr indent="0" marL="0">
+            <a:pPr marL="0" indent="0">
               <a:buNone/>
             </a:pPr>
             <a:r>
@@ -3412,7 +2948,7 @@
           <a:bodyPr wrap="square" lIns="0" tIns="0" rIns="0" bIns="0" rtlCol="0" anchor="ctr"/>
           <a:lstStyle/>
           <a:p>
-            <a:pPr indent="0" marL="0">
+            <a:pPr marL="0" indent="0">
               <a:lnSpc>
                 <a:spcPct val="125000"/>
               </a:lnSpc>
@@ -3501,7 +3037,7 @@
           <a:bodyPr wrap="square" lIns="0" tIns="0" rIns="0" bIns="0" rtlCol="0" anchor="ctr"/>
           <a:lstStyle/>
           <a:p>
-            <a:pPr algn="ctr" indent="0" marL="0">
+            <a:pPr marL="0" indent="0" algn="ctr">
               <a:buNone/>
             </a:pPr>
             <a:r>
@@ -3540,7 +3076,7 @@
           <a:bodyPr wrap="square" lIns="0" tIns="0" rIns="0" bIns="0" rtlCol="0" anchor="ctr"/>
           <a:lstStyle/>
           <a:p>
-            <a:pPr indent="0" marL="0">
+            <a:pPr marL="0" indent="0">
               <a:buNone/>
             </a:pPr>
             <a:r>
@@ -3579,7 +3115,7 @@
           <a:bodyPr wrap="square" lIns="0" tIns="0" rIns="0" bIns="0" rtlCol="0" anchor="ctr"/>
           <a:lstStyle/>
           <a:p>
-            <a:pPr indent="0" marL="0">
+            <a:pPr marL="0" indent="0">
               <a:buNone/>
             </a:pPr>
             <a:r>
@@ -3665,7 +3201,7 @@
           <a:bodyPr wrap="square" lIns="0" tIns="0" rIns="0" bIns="0" rtlCol="0" anchor="ctr"/>
           <a:lstStyle/>
           <a:p>
-            <a:pPr algn="ctr" indent="0" marL="0">
+            <a:pPr marL="0" indent="0" algn="ctr">
               <a:buNone/>
             </a:pPr>
             <a:r>
@@ -3704,7 +3240,7 @@
           <a:bodyPr wrap="square" lIns="0" tIns="0" rIns="0" bIns="0" rtlCol="0" anchor="ctr"/>
           <a:lstStyle/>
           <a:p>
-            <a:pPr indent="0" marL="0">
+            <a:pPr marL="0" indent="0">
               <a:buNone/>
             </a:pPr>
             <a:r>
@@ -3743,7 +3279,7 @@
           <a:bodyPr wrap="square" lIns="0" tIns="0" rIns="0" bIns="0" rtlCol="0" anchor="ctr"/>
           <a:lstStyle/>
           <a:p>
-            <a:pPr indent="0" marL="0">
+            <a:pPr marL="0" indent="0">
               <a:buNone/>
             </a:pPr>
             <a:r>
@@ -3829,7 +3365,7 @@
           <a:bodyPr wrap="square" lIns="0" tIns="0" rIns="0" bIns="0" rtlCol="0" anchor="ctr"/>
           <a:lstStyle/>
           <a:p>
-            <a:pPr algn="ctr" indent="0" marL="0">
+            <a:pPr marL="0" indent="0" algn="ctr">
               <a:buNone/>
             </a:pPr>
             <a:r>
@@ -3868,7 +3404,7 @@
           <a:bodyPr wrap="square" lIns="0" tIns="0" rIns="0" bIns="0" rtlCol="0" anchor="ctr"/>
           <a:lstStyle/>
           <a:p>
-            <a:pPr indent="0" marL="0">
+            <a:pPr marL="0" indent="0">
               <a:buNone/>
             </a:pPr>
             <a:r>
@@ -3907,7 +3443,7 @@
           <a:bodyPr wrap="square" lIns="0" tIns="0" rIns="0" bIns="0" rtlCol="0" anchor="ctr"/>
           <a:lstStyle/>
           <a:p>
-            <a:pPr indent="0" marL="0">
+            <a:pPr marL="0" indent="0">
               <a:buNone/>
             </a:pPr>
             <a:r>
@@ -3993,7 +3529,7 @@
           <a:bodyPr wrap="square" lIns="0" tIns="0" rIns="0" bIns="0" rtlCol="0" anchor="ctr"/>
           <a:lstStyle/>
           <a:p>
-            <a:pPr algn="ctr" indent="0" marL="0">
+            <a:pPr marL="0" indent="0" algn="ctr">
               <a:buNone/>
             </a:pPr>
             <a:r>
@@ -4032,7 +3568,7 @@
           <a:bodyPr wrap="square" lIns="0" tIns="0" rIns="0" bIns="0" rtlCol="0" anchor="ctr"/>
           <a:lstStyle/>
           <a:p>
-            <a:pPr indent="0" marL="0">
+            <a:pPr marL="0" indent="0">
               <a:buNone/>
             </a:pPr>
             <a:r>
@@ -4071,7 +3607,7 @@
           <a:bodyPr wrap="square" lIns="0" tIns="0" rIns="0" bIns="0" rtlCol="0" anchor="ctr"/>
           <a:lstStyle/>
           <a:p>
-            <a:pPr indent="0" marL="0">
+            <a:pPr marL="0" indent="0">
               <a:buNone/>
             </a:pPr>
             <a:r>
@@ -4110,7 +3646,7 @@
           <a:bodyPr wrap="square" lIns="0" tIns="0" rIns="0" bIns="0" rtlCol="0" anchor="ctr"/>
           <a:lstStyle/>
           <a:p>
-            <a:pPr indent="0" marL="0">
+            <a:pPr marL="0" indent="0">
               <a:buNone/>
             </a:pPr>
             <a:r>
@@ -4149,7 +3685,7 @@
           <a:bodyPr wrap="square" lIns="0" tIns="0" rIns="0" bIns="0" rtlCol="0" anchor="ctr"/>
           <a:lstStyle/>
           <a:p>
-            <a:pPr indent="0" marL="0">
+            <a:pPr marL="0" indent="0">
               <a:buNone/>
             </a:pPr>
             <a:r>
@@ -4188,7 +3724,7 @@
           <a:bodyPr wrap="square" lIns="0" tIns="0" rIns="0" bIns="0" rtlCol="0" anchor="ctr"/>
           <a:lstStyle/>
           <a:p>
-            <a:pPr algn="r" indent="0" marL="0">
+            <a:pPr marL="0" indent="0" algn="r">
               <a:buNone/>
             </a:pPr>
             <a:r>
@@ -4222,6 +3758,7 @@
         <a:solidFill>
           <a:srgbClr val="F5F3EE"/>
         </a:solidFill>
+        <a:effectLst/>
       </p:bgPr>
     </p:bg>
     <p:spTree>
@@ -4259,11 +3796,11 @@
           <a:bodyPr wrap="square" lIns="0" tIns="0" rIns="0" bIns="0" rtlCol="0" anchor="ctr"/>
           <a:lstStyle/>
           <a:p>
-            <a:pPr indent="0" marL="0">
-              <a:buNone/>
-            </a:pPr>
-            <a:r>
-              <a:rPr lang="en-US" sz="1300" b="1" spc="200" kern="0" dirty="0">
+            <a:pPr marL="0" indent="0">
+              <a:buNone/>
+            </a:pPr>
+            <a:r>
+              <a:rPr lang="en-US" sz="1300" b="1" kern="0" spc="200" dirty="0">
                 <a:solidFill>
                   <a:srgbClr val="667A55"/>
                 </a:solidFill>
@@ -4298,7 +3835,7 @@
           <a:bodyPr wrap="square" lIns="0" tIns="0" rIns="0" bIns="0" rtlCol="0" anchor="ctr"/>
           <a:lstStyle/>
           <a:p>
-            <a:pPr indent="0" marL="0">
+            <a:pPr marL="0" indent="0">
               <a:buNone/>
             </a:pPr>
             <a:r>
@@ -4337,7 +3874,7 @@
           <a:bodyPr wrap="square" lIns="0" tIns="0" rIns="0" bIns="0" rtlCol="0" anchor="ctr"/>
           <a:lstStyle/>
           <a:p>
-            <a:pPr indent="0" marL="0">
+            <a:pPr marL="0" indent="0">
               <a:lnSpc>
                 <a:spcPct val="125000"/>
               </a:lnSpc>
@@ -4379,7 +3916,7 @@
           <a:bodyPr wrap="square" lIns="0" tIns="0" rIns="0" bIns="0" rtlCol="0" anchor="ctr"/>
           <a:lstStyle/>
           <a:p>
-            <a:pPr indent="0" marL="0">
+            <a:pPr marL="0" indent="0">
               <a:buNone/>
             </a:pPr>
             <a:r>
@@ -4440,7 +3977,7 @@
           <a:bodyPr wrap="square" lIns="0" tIns="0" rIns="0" bIns="0" rtlCol="0" anchor="ctr"/>
           <a:lstStyle/>
           <a:p>
-            <a:pPr algn="ctr" indent="0" marL="0">
+            <a:pPr marL="0" indent="0" algn="ctr">
               <a:buNone/>
             </a:pPr>
             <a:r>
@@ -4479,7 +4016,7 @@
           <a:bodyPr wrap="square" lIns="0" tIns="0" rIns="0" bIns="0" rtlCol="0" anchor="ctr"/>
           <a:lstStyle/>
           <a:p>
-            <a:pPr algn="ctr" indent="0" marL="0">
+            <a:pPr marL="0" indent="0" algn="ctr">
               <a:buNone/>
             </a:pPr>
             <a:r>
@@ -4540,7 +4077,7 @@
           <a:bodyPr wrap="square" lIns="0" tIns="0" rIns="0" bIns="0" rtlCol="0" anchor="ctr"/>
           <a:lstStyle/>
           <a:p>
-            <a:pPr algn="ctr" indent="0" marL="0">
+            <a:pPr marL="0" indent="0" algn="ctr">
               <a:buNone/>
             </a:pPr>
             <a:r>
@@ -4579,7 +4116,7 @@
           <a:bodyPr wrap="square" lIns="0" tIns="0" rIns="0" bIns="0" rtlCol="0" anchor="ctr"/>
           <a:lstStyle/>
           <a:p>
-            <a:pPr algn="ctr" indent="0" marL="0">
+            <a:pPr marL="0" indent="0" algn="ctr">
               <a:buNone/>
             </a:pPr>
             <a:r>
@@ -4640,7 +4177,7 @@
           <a:bodyPr wrap="square" lIns="0" tIns="0" rIns="0" bIns="0" rtlCol="0" anchor="ctr"/>
           <a:lstStyle/>
           <a:p>
-            <a:pPr algn="ctr" indent="0" marL="0">
+            <a:pPr marL="0" indent="0" algn="ctr">
               <a:buNone/>
             </a:pPr>
             <a:r>
@@ -4679,7 +4216,7 @@
           <a:bodyPr wrap="square" lIns="0" tIns="0" rIns="0" bIns="0" rtlCol="0" anchor="ctr"/>
           <a:lstStyle/>
           <a:p>
-            <a:pPr algn="ctr" indent="0" marL="0">
+            <a:pPr marL="0" indent="0" algn="ctr">
               <a:buNone/>
             </a:pPr>
             <a:r>
@@ -4740,7 +4277,7 @@
           <a:bodyPr wrap="square" lIns="0" tIns="0" rIns="0" bIns="0" rtlCol="0" anchor="ctr"/>
           <a:lstStyle/>
           <a:p>
-            <a:pPr algn="ctr" indent="0" marL="0">
+            <a:pPr marL="0" indent="0" algn="ctr">
               <a:buNone/>
             </a:pPr>
             <a:r>
@@ -4779,7 +4316,7 @@
           <a:bodyPr wrap="square" lIns="0" tIns="0" rIns="0" bIns="0" rtlCol="0" anchor="ctr"/>
           <a:lstStyle/>
           <a:p>
-            <a:pPr algn="ctr" indent="0" marL="0">
+            <a:pPr marL="0" indent="0" algn="ctr">
               <a:buNone/>
             </a:pPr>
             <a:r>
@@ -4840,7 +4377,7 @@
           <a:bodyPr wrap="square" lIns="0" tIns="0" rIns="0" bIns="0" rtlCol="0" anchor="ctr"/>
           <a:lstStyle/>
           <a:p>
-            <a:pPr algn="ctr" indent="0" marL="0">
+            <a:pPr marL="0" indent="0" algn="ctr">
               <a:buNone/>
             </a:pPr>
             <a:r>
@@ -4879,7 +4416,7 @@
           <a:bodyPr wrap="square" lIns="0" tIns="0" rIns="0" bIns="0" rtlCol="0" anchor="ctr"/>
           <a:lstStyle/>
           <a:p>
-            <a:pPr indent="0" marL="0">
+            <a:pPr marL="0" indent="0">
               <a:buNone/>
             </a:pPr>
             <a:r>
@@ -4940,7 +4477,7 @@
           <a:bodyPr wrap="square" lIns="0" tIns="0" rIns="0" bIns="0" rtlCol="0" anchor="ctr"/>
           <a:lstStyle/>
           <a:p>
-            <a:pPr algn="ctr" indent="0" marL="0">
+            <a:pPr marL="0" indent="0" algn="ctr">
               <a:buNone/>
             </a:pPr>
             <a:r>
@@ -4979,7 +4516,7 @@
           <a:bodyPr wrap="square" lIns="0" tIns="0" rIns="0" bIns="0" rtlCol="0" anchor="ctr"/>
           <a:lstStyle/>
           <a:p>
-            <a:pPr algn="ctr" indent="0" marL="0">
+            <a:pPr marL="0" indent="0" algn="ctr">
               <a:buNone/>
             </a:pPr>
             <a:r>
@@ -5040,7 +4577,7 @@
           <a:bodyPr wrap="square" lIns="0" tIns="0" rIns="0" bIns="0" rtlCol="0" anchor="ctr"/>
           <a:lstStyle/>
           <a:p>
-            <a:pPr algn="ctr" indent="0" marL="0">
+            <a:pPr marL="0" indent="0" algn="ctr">
               <a:buNone/>
             </a:pPr>
             <a:r>
@@ -5079,7 +4616,7 @@
           <a:bodyPr wrap="square" lIns="0" tIns="0" rIns="0" bIns="0" rtlCol="0" anchor="ctr"/>
           <a:lstStyle/>
           <a:p>
-            <a:pPr algn="ctr" indent="0" marL="0">
+            <a:pPr marL="0" indent="0" algn="ctr">
               <a:buNone/>
             </a:pPr>
             <a:r>
@@ -5140,7 +4677,7 @@
           <a:bodyPr wrap="square" lIns="0" tIns="0" rIns="0" bIns="0" rtlCol="0" anchor="ctr"/>
           <a:lstStyle/>
           <a:p>
-            <a:pPr algn="ctr" indent="0" marL="0">
+            <a:pPr marL="0" indent="0" algn="ctr">
               <a:buNone/>
             </a:pPr>
             <a:r>
@@ -5179,7 +4716,7 @@
           <a:bodyPr wrap="square" lIns="0" tIns="0" rIns="0" bIns="0" rtlCol="0" anchor="ctr"/>
           <a:lstStyle/>
           <a:p>
-            <a:pPr algn="ctr" indent="0" marL="0">
+            <a:pPr marL="0" indent="0" algn="ctr">
               <a:buNone/>
             </a:pPr>
             <a:r>
@@ -5240,7 +4777,7 @@
           <a:bodyPr wrap="square" lIns="0" tIns="0" rIns="0" bIns="0" rtlCol="0" anchor="ctr"/>
           <a:lstStyle/>
           <a:p>
-            <a:pPr algn="ctr" indent="0" marL="0">
+            <a:pPr marL="0" indent="0" algn="ctr">
               <a:buNone/>
             </a:pPr>
             <a:r>
@@ -5279,7 +4816,7 @@
           <a:bodyPr wrap="square" lIns="0" tIns="0" rIns="0" bIns="0" rtlCol="0" anchor="ctr"/>
           <a:lstStyle/>
           <a:p>
-            <a:pPr algn="ctr" indent="0" marL="0">
+            <a:pPr marL="0" indent="0" algn="ctr">
               <a:buNone/>
             </a:pPr>
             <a:r>
@@ -5340,7 +4877,7 @@
           <a:bodyPr wrap="square" lIns="0" tIns="0" rIns="0" bIns="0" rtlCol="0" anchor="ctr"/>
           <a:lstStyle/>
           <a:p>
-            <a:pPr algn="ctr" indent="0" marL="0">
+            <a:pPr marL="0" indent="0" algn="ctr">
               <a:buNone/>
             </a:pPr>
             <a:r>
@@ -5401,7 +4938,7 @@
           <a:bodyPr wrap="square" lIns="0" tIns="0" rIns="0" bIns="0" rtlCol="0" anchor="ctr"/>
           <a:lstStyle/>
           <a:p>
-            <a:pPr indent="0" marL="0">
+            <a:pPr marL="0" indent="0">
               <a:lnSpc>
                 <a:spcPct val="125000"/>
               </a:lnSpc>
@@ -5443,7 +4980,7 @@
           <a:bodyPr wrap="square" lIns="0" tIns="0" rIns="0" bIns="0" rtlCol="0" anchor="ctr"/>
           <a:lstStyle/>
           <a:p>
-            <a:pPr indent="0" marL="0">
+            <a:pPr marL="0" indent="0">
               <a:buNone/>
             </a:pPr>
             <a:r>
@@ -5482,7 +5019,7 @@
           <a:bodyPr wrap="square" lIns="0" tIns="0" rIns="0" bIns="0" rtlCol="0" anchor="ctr"/>
           <a:lstStyle/>
           <a:p>
-            <a:pPr algn="r" indent="0" marL="0">
+            <a:pPr marL="0" indent="0" algn="r">
               <a:buNone/>
             </a:pPr>
             <a:r>
@@ -5516,6 +5053,7 @@
         <a:solidFill>
           <a:srgbClr val="F5F3EE"/>
         </a:solidFill>
+        <a:effectLst/>
       </p:bgPr>
     </p:bg>
     <p:spTree>
@@ -5553,11 +5091,11 @@
           <a:bodyPr wrap="square" lIns="0" tIns="0" rIns="0" bIns="0" rtlCol="0" anchor="ctr"/>
           <a:lstStyle/>
           <a:p>
-            <a:pPr indent="0" marL="0">
-              <a:buNone/>
-            </a:pPr>
-            <a:r>
-              <a:rPr lang="en-US" sz="1300" b="1" spc="200" kern="0" dirty="0">
+            <a:pPr marL="0" indent="0">
+              <a:buNone/>
+            </a:pPr>
+            <a:r>
+              <a:rPr lang="en-US" sz="1300" b="1" kern="0" spc="200" dirty="0">
                 <a:solidFill>
                   <a:srgbClr val="667A55"/>
                 </a:solidFill>
@@ -5592,7 +5130,7 @@
           <a:bodyPr wrap="square" lIns="0" tIns="0" rIns="0" bIns="0" rtlCol="0" anchor="ctr"/>
           <a:lstStyle/>
           <a:p>
-            <a:pPr indent="0" marL="0">
+            <a:pPr marL="0" indent="0">
               <a:buNone/>
             </a:pPr>
             <a:r>
@@ -5631,7 +5169,7 @@
           <a:bodyPr wrap="square" lIns="0" tIns="0" rIns="0" bIns="0" rtlCol="0" anchor="ctr"/>
           <a:lstStyle/>
           <a:p>
-            <a:pPr indent="0" marL="0">
+            <a:pPr marL="0" indent="0">
               <a:buNone/>
             </a:pPr>
             <a:r>
@@ -5717,7 +5255,7 @@
           <a:bodyPr wrap="square" lIns="0" tIns="0" rIns="0" bIns="0" rtlCol="0" anchor="ctr"/>
           <a:lstStyle/>
           <a:p>
-            <a:pPr algn="ctr" indent="0" marL="0">
+            <a:pPr marL="0" indent="0" algn="ctr">
               <a:buNone/>
             </a:pPr>
             <a:r>
@@ -5756,7 +5294,7 @@
           <a:bodyPr wrap="square" lIns="0" tIns="0" rIns="0" bIns="0" rtlCol="0" anchor="ctr"/>
           <a:lstStyle/>
           <a:p>
-            <a:pPr indent="0" marL="0">
+            <a:pPr marL="0" indent="0">
               <a:buNone/>
             </a:pPr>
             <a:r>
@@ -5795,7 +5333,7 @@
           <a:bodyPr wrap="square" lIns="0" tIns="0" rIns="0" bIns="0" rtlCol="0" anchor="ctr"/>
           <a:lstStyle/>
           <a:p>
-            <a:pPr indent="0" marL="0">
+            <a:pPr marL="0" indent="0">
               <a:lnSpc>
                 <a:spcPct val="115000"/>
               </a:lnSpc>
@@ -5884,7 +5422,7 @@
           <a:bodyPr wrap="square" lIns="0" tIns="0" rIns="0" bIns="0" rtlCol="0" anchor="ctr"/>
           <a:lstStyle/>
           <a:p>
-            <a:pPr algn="ctr" indent="0" marL="0">
+            <a:pPr marL="0" indent="0" algn="ctr">
               <a:buNone/>
             </a:pPr>
             <a:r>
@@ -5923,7 +5461,7 @@
           <a:bodyPr wrap="square" lIns="0" tIns="0" rIns="0" bIns="0" rtlCol="0" anchor="ctr"/>
           <a:lstStyle/>
           <a:p>
-            <a:pPr indent="0" marL="0">
+            <a:pPr marL="0" indent="0">
               <a:buNone/>
             </a:pPr>
             <a:r>
@@ -5962,7 +5500,7 @@
           <a:bodyPr wrap="square" lIns="0" tIns="0" rIns="0" bIns="0" rtlCol="0" anchor="ctr"/>
           <a:lstStyle/>
           <a:p>
-            <a:pPr indent="0" marL="0">
+            <a:pPr marL="0" indent="0">
               <a:lnSpc>
                 <a:spcPct val="115000"/>
               </a:lnSpc>
@@ -6051,7 +5589,7 @@
           <a:bodyPr wrap="square" lIns="0" tIns="0" rIns="0" bIns="0" rtlCol="0" anchor="ctr"/>
           <a:lstStyle/>
           <a:p>
-            <a:pPr algn="ctr" indent="0" marL="0">
+            <a:pPr marL="0" indent="0" algn="ctr">
               <a:buNone/>
             </a:pPr>
             <a:r>
@@ -6090,7 +5628,7 @@
           <a:bodyPr wrap="square" lIns="0" tIns="0" rIns="0" bIns="0" rtlCol="0" anchor="ctr"/>
           <a:lstStyle/>
           <a:p>
-            <a:pPr indent="0" marL="0">
+            <a:pPr marL="0" indent="0">
               <a:buNone/>
             </a:pPr>
             <a:r>
@@ -6129,7 +5667,7 @@
           <a:bodyPr wrap="square" lIns="0" tIns="0" rIns="0" bIns="0" rtlCol="0" anchor="ctr"/>
           <a:lstStyle/>
           <a:p>
-            <a:pPr indent="0" marL="0">
+            <a:pPr marL="0" indent="0">
               <a:lnSpc>
                 <a:spcPct val="115000"/>
               </a:lnSpc>
@@ -6218,7 +5756,7 @@
           <a:bodyPr wrap="square" lIns="0" tIns="0" rIns="0" bIns="0" rtlCol="0" anchor="ctr"/>
           <a:lstStyle/>
           <a:p>
-            <a:pPr algn="ctr" indent="0" marL="0">
+            <a:pPr marL="0" indent="0" algn="ctr">
               <a:buNone/>
             </a:pPr>
             <a:r>
@@ -6257,7 +5795,7 @@
           <a:bodyPr wrap="square" lIns="0" tIns="0" rIns="0" bIns="0" rtlCol="0" anchor="ctr"/>
           <a:lstStyle/>
           <a:p>
-            <a:pPr indent="0" marL="0">
+            <a:pPr marL="0" indent="0">
               <a:buNone/>
             </a:pPr>
             <a:r>
@@ -6296,7 +5834,7 @@
           <a:bodyPr wrap="square" lIns="0" tIns="0" rIns="0" bIns="0" rtlCol="0" anchor="ctr"/>
           <a:lstStyle/>
           <a:p>
-            <a:pPr indent="0" marL="0">
+            <a:pPr marL="0" indent="0">
               <a:lnSpc>
                 <a:spcPct val="115000"/>
               </a:lnSpc>
@@ -6385,7 +5923,7 @@
           <a:bodyPr wrap="square" lIns="0" tIns="0" rIns="0" bIns="0" rtlCol="0" anchor="ctr"/>
           <a:lstStyle/>
           <a:p>
-            <a:pPr algn="ctr" indent="0" marL="0">
+            <a:pPr marL="0" indent="0" algn="ctr">
               <a:buNone/>
             </a:pPr>
             <a:r>
@@ -6424,7 +5962,7 @@
           <a:bodyPr wrap="square" lIns="0" tIns="0" rIns="0" bIns="0" rtlCol="0" anchor="ctr"/>
           <a:lstStyle/>
           <a:p>
-            <a:pPr indent="0" marL="0">
+            <a:pPr marL="0" indent="0">
               <a:buNone/>
             </a:pPr>
             <a:r>
@@ -6463,7 +6001,7 @@
           <a:bodyPr wrap="square" lIns="0" tIns="0" rIns="0" bIns="0" rtlCol="0" anchor="ctr"/>
           <a:lstStyle/>
           <a:p>
-            <a:pPr indent="0" marL="0">
+            <a:pPr marL="0" indent="0">
               <a:lnSpc>
                 <a:spcPct val="115000"/>
               </a:lnSpc>
@@ -6552,7 +6090,7 @@
           <a:bodyPr wrap="square" lIns="0" tIns="0" rIns="0" bIns="0" rtlCol="0" anchor="ctr"/>
           <a:lstStyle/>
           <a:p>
-            <a:pPr algn="ctr" indent="0" marL="0">
+            <a:pPr marL="0" indent="0" algn="ctr">
               <a:buNone/>
             </a:pPr>
             <a:r>
@@ -6591,7 +6129,7 @@
           <a:bodyPr wrap="square" lIns="0" tIns="0" rIns="0" bIns="0" rtlCol="0" anchor="ctr"/>
           <a:lstStyle/>
           <a:p>
-            <a:pPr indent="0" marL="0">
+            <a:pPr marL="0" indent="0">
               <a:buNone/>
             </a:pPr>
             <a:r>
@@ -6630,7 +6168,7 @@
           <a:bodyPr wrap="square" lIns="0" tIns="0" rIns="0" bIns="0" rtlCol="0" anchor="ctr"/>
           <a:lstStyle/>
           <a:p>
-            <a:pPr indent="0" marL="0">
+            <a:pPr marL="0" indent="0">
               <a:lnSpc>
                 <a:spcPct val="115000"/>
               </a:lnSpc>
@@ -6672,7 +6210,7 @@
           <a:bodyPr wrap="square" lIns="0" tIns="0" rIns="0" bIns="0" rtlCol="0" anchor="ctr"/>
           <a:lstStyle/>
           <a:p>
-            <a:pPr indent="0" marL="0">
+            <a:pPr marL="0" indent="0">
               <a:buNone/>
             </a:pPr>
             <a:r>
@@ -6711,9 +6249,20 @@
           <a:bodyPr wrap="square" lIns="0" tIns="0" rIns="0" bIns="0" rtlCol="0" anchor="ctr"/>
           <a:lstStyle/>
           <a:p>
-            <a:pPr indent="0" marL="0">
-              <a:buNone/>
-            </a:pPr>
+            <a:pPr marL="0" indent="0">
+              <a:buNone/>
+            </a:pPr>
+            <a:r>
+              <a:rPr lang="ru-RU" sz="1100" i="1" dirty="0">
+                <a:solidFill>
+                  <a:srgbClr val="73766F"/>
+                </a:solidFill>
+                <a:latin typeface="Calibri" pitchFamily="34" charset="0"/>
+                <a:ea typeface="Calibri" pitchFamily="34" charset="-122"/>
+                <a:cs typeface="Calibri" pitchFamily="34" charset="-120"/>
+              </a:rPr>
+              <a:t>Стек</a:t>
+            </a:r>
             <a:r>
               <a:rPr lang="en-US" sz="1100" i="1" dirty="0">
                 <a:solidFill>
@@ -6723,7 +6272,7 @@
                 <a:ea typeface="Calibri" pitchFamily="34" charset="-122"/>
                 <a:cs typeface="Calibri" pitchFamily="34" charset="-120"/>
               </a:rPr>
-              <a:t>Технологии: React · TypeScript · Node.js · PostgreSQL · WebSocket · Docker</a:t>
+              <a:t>: React · Go· PostgreSQL · WebSocket · Docker</a:t>
             </a:r>
             <a:endParaRPr lang="en-US" sz="1100" dirty="0"/>
           </a:p>
@@ -6750,7 +6299,7 @@
           <a:bodyPr wrap="square" lIns="0" tIns="0" rIns="0" bIns="0" rtlCol="0" anchor="ctr"/>
           <a:lstStyle/>
           <a:p>
-            <a:pPr indent="0" marL="0">
+            <a:pPr marL="0" indent="0">
               <a:buNone/>
             </a:pPr>
             <a:r>
@@ -6789,7 +6338,7 @@
           <a:bodyPr wrap="square" lIns="0" tIns="0" rIns="0" bIns="0" rtlCol="0" anchor="ctr"/>
           <a:lstStyle/>
           <a:p>
-            <a:pPr algn="r" indent="0" marL="0">
+            <a:pPr marL="0" indent="0" algn="r">
               <a:buNone/>
             </a:pPr>
             <a:r>
@@ -6823,6 +6372,7 @@
         <a:solidFill>
           <a:srgbClr val="F5F3EE"/>
         </a:solidFill>
+        <a:effectLst/>
       </p:bgPr>
     </p:bg>
     <p:spTree>
@@ -6860,11 +6410,11 @@
           <a:bodyPr wrap="square" lIns="0" tIns="0" rIns="0" bIns="0" rtlCol="0" anchor="ctr"/>
           <a:lstStyle/>
           <a:p>
-            <a:pPr indent="0" marL="0">
-              <a:buNone/>
-            </a:pPr>
-            <a:r>
-              <a:rPr lang="en-US" sz="1300" b="1" spc="200" kern="0" dirty="0">
+            <a:pPr marL="0" indent="0">
+              <a:buNone/>
+            </a:pPr>
+            <a:r>
+              <a:rPr lang="en-US" sz="1300" b="1" kern="0" spc="200" dirty="0">
                 <a:solidFill>
                   <a:srgbClr val="667A55"/>
                 </a:solidFill>
@@ -6899,7 +6449,7 @@
           <a:bodyPr wrap="square" lIns="0" tIns="0" rIns="0" bIns="0" rtlCol="0" anchor="ctr"/>
           <a:lstStyle/>
           <a:p>
-            <a:pPr indent="0" marL="0">
+            <a:pPr marL="0" indent="0">
               <a:buNone/>
             </a:pPr>
             <a:r>
@@ -6938,7 +6488,7 @@
           <a:bodyPr wrap="square" lIns="0" tIns="0" rIns="0" bIns="0" rtlCol="0" anchor="ctr"/>
           <a:lstStyle/>
           <a:p>
-            <a:pPr indent="0" marL="0">
+            <a:pPr marL="0" indent="0">
               <a:lnSpc>
                 <a:spcPct val="130000"/>
               </a:lnSpc>
@@ -6980,7 +6530,7 @@
           <a:bodyPr wrap="square" lIns="0" tIns="0" rIns="0" bIns="0" rtlCol="0" anchor="ctr"/>
           <a:lstStyle/>
           <a:p>
-            <a:pPr indent="0" marL="0">
+            <a:pPr marL="0" indent="0">
               <a:buNone/>
             </a:pPr>
             <a:r>
@@ -7039,7 +6589,7 @@
           <a:bodyPr wrap="square" lIns="0" tIns="0" rIns="0" bIns="0" rtlCol="0" anchor="ctr"/>
           <a:lstStyle/>
           <a:p>
-            <a:pPr indent="0" marL="0">
+            <a:pPr marL="0" indent="0">
               <a:buNone/>
             </a:pPr>
             <a:r>
@@ -7098,7 +6648,7 @@
           <a:bodyPr wrap="square" lIns="0" tIns="0" rIns="0" bIns="0" rtlCol="0" anchor="ctr"/>
           <a:lstStyle/>
           <a:p>
-            <a:pPr indent="0" marL="0">
+            <a:pPr marL="0" indent="0">
               <a:buNone/>
             </a:pPr>
             <a:r>
@@ -7157,19 +6707,12 @@
           <a:bodyPr wrap="square" lIns="0" tIns="0" rIns="0" bIns="0" rtlCol="0" anchor="ctr"/>
           <a:lstStyle/>
           <a:p>
-            <a:pPr indent="0" marL="0">
-              <a:buNone/>
-            </a:pPr>
-            <a:r>
-              <a:rPr lang="en-US" sz="1300" dirty="0">
-                <a:solidFill>
-                  <a:srgbClr val="20221F"/>
-                </a:solidFill>
-                <a:latin typeface="Calibri" pitchFamily="34" charset="0"/>
-                <a:ea typeface="Calibri" pitchFamily="34" charset="-122"/>
-                <a:cs typeface="Calibri" pitchFamily="34" charset="-120"/>
-              </a:rPr>
-              <a:t>Домохозяйства из нескольких поколений</a:t>
+            <a:pPr marL="0" indent="0">
+              <a:buNone/>
+            </a:pPr>
+            <a:r>
+              <a:rPr lang="ru-RU" sz="1300" dirty="0"/>
+              <a:t>Владельцы нескольких домов</a:t>
             </a:r>
             <a:endParaRPr lang="en-US" sz="1300" dirty="0"/>
           </a:p>
@@ -7223,7 +6766,7 @@
           <a:bodyPr wrap="square" lIns="0" tIns="0" rIns="0" bIns="0" rtlCol="0" anchor="ctr"/>
           <a:lstStyle/>
           <a:p>
-            <a:pPr indent="0" marL="0">
+            <a:pPr marL="0" indent="0">
               <a:buNone/>
             </a:pPr>
             <a:r>
@@ -7282,7 +6825,7 @@
           <a:bodyPr wrap="square" lIns="0" tIns="0" rIns="0" bIns="0" rtlCol="0" anchor="ctr"/>
           <a:lstStyle/>
           <a:p>
-            <a:pPr indent="0" marL="0">
+            <a:pPr marL="0" indent="0">
               <a:buNone/>
             </a:pPr>
             <a:endParaRPr lang="en-US" sz="1200" dirty="0"/>
@@ -7310,7 +6853,7 @@
           <a:bodyPr wrap="square" lIns="0" tIns="0" rIns="0" bIns="0" rtlCol="0" anchor="ctr"/>
           <a:lstStyle/>
           <a:p>
-            <a:pPr indent="0" marL="0">
+            <a:pPr marL="0" indent="0">
               <a:buNone/>
             </a:pPr>
             <a:r>
@@ -7349,7 +6892,7 @@
           <a:bodyPr wrap="square" lIns="0" tIns="0" rIns="0" bIns="0" rtlCol="0" anchor="ctr"/>
           <a:lstStyle/>
           <a:p>
-            <a:pPr indent="0" marL="0">
+            <a:pPr marL="0" indent="0">
               <a:buNone/>
             </a:pPr>
             <a:r>
@@ -7388,7 +6931,7 @@
           <a:bodyPr wrap="square" lIns="0" tIns="0" rIns="0" bIns="0" rtlCol="0" anchor="ctr"/>
           <a:lstStyle/>
           <a:p>
-            <a:pPr indent="0" marL="0">
+            <a:pPr marL="0" indent="0">
               <a:buNone/>
             </a:pPr>
             <a:r>
@@ -7427,7 +6970,7 @@
           <a:bodyPr wrap="square" lIns="0" tIns="0" rIns="0" bIns="0" rtlCol="0" anchor="ctr"/>
           <a:lstStyle/>
           <a:p>
-            <a:pPr indent="0" marL="0">
+            <a:pPr marL="0" indent="0">
               <a:buNone/>
             </a:pPr>
             <a:r>
@@ -7466,7 +7009,7 @@
           <a:bodyPr wrap="square" lIns="0" tIns="0" rIns="0" bIns="0" rtlCol="0" anchor="ctr"/>
           <a:lstStyle/>
           <a:p>
-            <a:pPr indent="0" marL="0">
+            <a:pPr marL="0" indent="0">
               <a:buNone/>
             </a:pPr>
             <a:r>
@@ -7525,7 +7068,7 @@
           <a:bodyPr wrap="square" lIns="0" tIns="0" rIns="0" bIns="0" rtlCol="0" anchor="ctr"/>
           <a:lstStyle/>
           <a:p>
-            <a:pPr indent="0" marL="0">
+            <a:pPr marL="0" indent="0">
               <a:buNone/>
             </a:pPr>
             <a:r>
@@ -7564,7 +7107,7 @@
           <a:bodyPr wrap="square" lIns="0" tIns="0" rIns="0" bIns="0" rtlCol="0" anchor="ctr"/>
           <a:lstStyle/>
           <a:p>
-            <a:pPr indent="0" marL="0">
+            <a:pPr marL="0" indent="0">
               <a:buNone/>
             </a:pPr>
             <a:r>
@@ -7603,7 +7146,7 @@
           <a:bodyPr wrap="square" lIns="0" tIns="0" rIns="0" bIns="0" rtlCol="0" anchor="ctr"/>
           <a:lstStyle/>
           <a:p>
-            <a:pPr indent="0" marL="0">
+            <a:pPr marL="0" indent="0">
               <a:buNone/>
             </a:pPr>
             <a:r>
@@ -7642,7 +7185,7 @@
           <a:bodyPr wrap="square" lIns="0" tIns="0" rIns="0" bIns="0" rtlCol="0" anchor="ctr"/>
           <a:lstStyle/>
           <a:p>
-            <a:pPr indent="0" marL="0">
+            <a:pPr marL="0" indent="0">
               <a:buNone/>
             </a:pPr>
             <a:r>
@@ -7681,7 +7224,7 @@
           <a:bodyPr wrap="square" lIns="0" tIns="0" rIns="0" bIns="0" rtlCol="0" anchor="ctr"/>
           <a:lstStyle/>
           <a:p>
-            <a:pPr indent="0" marL="0">
+            <a:pPr marL="0" indent="0">
               <a:buNone/>
             </a:pPr>
             <a:r>
@@ -7720,7 +7263,7 @@
           <a:bodyPr wrap="square" lIns="0" tIns="0" rIns="0" bIns="0" rtlCol="0" anchor="ctr"/>
           <a:lstStyle/>
           <a:p>
-            <a:pPr indent="0" marL="0">
+            <a:pPr marL="0" indent="0">
               <a:buNone/>
             </a:pPr>
             <a:r>
@@ -7779,7 +7322,7 @@
           <a:bodyPr wrap="square" lIns="0" tIns="0" rIns="0" bIns="0" rtlCol="0" anchor="ctr"/>
           <a:lstStyle/>
           <a:p>
-            <a:pPr indent="0" marL="0">
+            <a:pPr marL="0" indent="0">
               <a:buNone/>
             </a:pPr>
             <a:r>
@@ -7818,7 +7361,7 @@
           <a:bodyPr wrap="square" lIns="0" tIns="0" rIns="0" bIns="0" rtlCol="0" anchor="ctr"/>
           <a:lstStyle/>
           <a:p>
-            <a:pPr indent="0" marL="0">
+            <a:pPr marL="0" indent="0">
               <a:buNone/>
             </a:pPr>
             <a:r>
@@ -7857,7 +7400,7 @@
           <a:bodyPr wrap="square" lIns="0" tIns="0" rIns="0" bIns="0" rtlCol="0" anchor="ctr"/>
           <a:lstStyle/>
           <a:p>
-            <a:pPr indent="0" marL="0">
+            <a:pPr marL="0" indent="0">
               <a:buNone/>
             </a:pPr>
             <a:r>
@@ -7896,7 +7439,7 @@
           <a:bodyPr wrap="square" lIns="0" tIns="0" rIns="0" bIns="0" rtlCol="0" anchor="ctr"/>
           <a:lstStyle/>
           <a:p>
-            <a:pPr indent="0" marL="0">
+            <a:pPr marL="0" indent="0">
               <a:buNone/>
             </a:pPr>
             <a:r>
@@ -7935,7 +7478,7 @@
           <a:bodyPr wrap="square" lIns="0" tIns="0" rIns="0" bIns="0" rtlCol="0" anchor="ctr"/>
           <a:lstStyle/>
           <a:p>
-            <a:pPr algn="r" indent="0" marL="0">
+            <a:pPr marL="0" indent="0" algn="r">
               <a:buNone/>
             </a:pPr>
             <a:r>
@@ -7969,6 +7512,7 @@
         <a:solidFill>
           <a:srgbClr val="F5F3EE"/>
         </a:solidFill>
+        <a:effectLst/>
       </p:bgPr>
     </p:bg>
     <p:spTree>
@@ -8006,11 +7550,11 @@
           <a:bodyPr wrap="square" lIns="0" tIns="0" rIns="0" bIns="0" rtlCol="0" anchor="ctr"/>
           <a:lstStyle/>
           <a:p>
-            <a:pPr indent="0" marL="0">
-              <a:buNone/>
-            </a:pPr>
-            <a:r>
-              <a:rPr lang="en-US" sz="1300" b="1" spc="200" kern="0" dirty="0">
+            <a:pPr marL="0" indent="0">
+              <a:buNone/>
+            </a:pPr>
+            <a:r>
+              <a:rPr lang="en-US" sz="1300" b="1" kern="0" spc="200" dirty="0">
                 <a:solidFill>
                   <a:srgbClr val="667A55"/>
                 </a:solidFill>
@@ -8045,7 +7589,7 @@
           <a:bodyPr wrap="square" lIns="0" tIns="0" rIns="0" bIns="0" rtlCol="0" anchor="ctr"/>
           <a:lstStyle/>
           <a:p>
-            <a:pPr indent="0" marL="0">
+            <a:pPr marL="0" indent="0">
               <a:buNone/>
             </a:pPr>
             <a:r>
@@ -8131,7 +7675,7 @@
           <a:bodyPr wrap="square" lIns="0" tIns="0" rIns="0" bIns="0" rtlCol="0" anchor="ctr"/>
           <a:lstStyle/>
           <a:p>
-            <a:pPr algn="ctr" indent="0" marL="0">
+            <a:pPr marL="0" indent="0" algn="ctr">
               <a:buNone/>
             </a:pPr>
             <a:r>
@@ -8170,7 +7714,7 @@
           <a:bodyPr wrap="square" lIns="0" tIns="0" rIns="0" bIns="0" rtlCol="0" anchor="ctr"/>
           <a:lstStyle/>
           <a:p>
-            <a:pPr indent="0" marL="0">
+            <a:pPr marL="0" indent="0">
               <a:buNone/>
             </a:pPr>
             <a:r>
@@ -8209,7 +7753,7 @@
           <a:bodyPr wrap="square" lIns="0" tIns="0" rIns="0" bIns="0" rtlCol="0" anchor="ctr"/>
           <a:lstStyle/>
           <a:p>
-            <a:pPr indent="0" marL="0">
+            <a:pPr marL="0" indent="0">
               <a:lnSpc>
                 <a:spcPct val="130000"/>
               </a:lnSpc>
@@ -8298,7 +7842,7 @@
           <a:bodyPr wrap="square" lIns="0" tIns="0" rIns="0" bIns="0" rtlCol="0" anchor="ctr"/>
           <a:lstStyle/>
           <a:p>
-            <a:pPr algn="ctr" indent="0" marL="0">
+            <a:pPr marL="0" indent="0" algn="ctr">
               <a:buNone/>
             </a:pPr>
             <a:r>
@@ -8337,7 +7881,7 @@
           <a:bodyPr wrap="square" lIns="0" tIns="0" rIns="0" bIns="0" rtlCol="0" anchor="ctr"/>
           <a:lstStyle/>
           <a:p>
-            <a:pPr indent="0" marL="0">
+            <a:pPr marL="0" indent="0">
               <a:buNone/>
             </a:pPr>
             <a:r>
@@ -8349,7 +7893,29 @@
                 <a:ea typeface="Cambria" pitchFamily="34" charset="-122"/>
                 <a:cs typeface="Cambria" pitchFamily="34" charset="-120"/>
               </a:rPr>
-              <a:t>Premium-подписка</a:t>
+              <a:t>Premium (250 </a:t>
+            </a:r>
+            <a:r>
+              <a:rPr lang="ru-RU" sz="1800" b="1">
+                <a:solidFill>
+                  <a:srgbClr val="20221F"/>
+                </a:solidFill>
+                <a:latin typeface="Cambria" pitchFamily="34" charset="0"/>
+                <a:ea typeface="Cambria" pitchFamily="34" charset="-122"/>
+                <a:cs typeface="Cambria" pitchFamily="34" charset="-120"/>
+              </a:rPr>
+              <a:t>руб. </a:t>
+            </a:r>
+            <a:r>
+              <a:rPr lang="ru-RU" sz="1800" b="1" dirty="0">
+                <a:solidFill>
+                  <a:srgbClr val="20221F"/>
+                </a:solidFill>
+                <a:latin typeface="Cambria" pitchFamily="34" charset="0"/>
+                <a:ea typeface="Cambria" pitchFamily="34" charset="-122"/>
+                <a:cs typeface="Cambria" pitchFamily="34" charset="-120"/>
+              </a:rPr>
+              <a:t>/ мес.)</a:t>
             </a:r>
             <a:endParaRPr lang="en-US" sz="1800" dirty="0"/>
           </a:p>
@@ -8376,7 +7942,7 @@
           <a:bodyPr wrap="square" lIns="0" tIns="0" rIns="0" bIns="0" rtlCol="0" anchor="ctr"/>
           <a:lstStyle/>
           <a:p>
-            <a:pPr indent="0" marL="0">
+            <a:pPr marL="0" indent="0">
               <a:lnSpc>
                 <a:spcPct val="130000"/>
               </a:lnSpc>
@@ -8391,7 +7957,40 @@
                 <a:ea typeface="Calibri" pitchFamily="34" charset="-122"/>
                 <a:cs typeface="Calibri" pitchFamily="34" charset="-120"/>
               </a:rPr>
-              <a:t>Расширенная аналитика бюджета, больше домов и участников, приоритетная поддержка.</a:t>
+              <a:t>Расширенная аналитика бюджета, больше домов и участников, </a:t>
+            </a:r>
+            <a:r>
+              <a:rPr lang="ru-RU" sz="1300" dirty="0">
+                <a:solidFill>
+                  <a:srgbClr val="73766F"/>
+                </a:solidFill>
+                <a:latin typeface="Calibri" pitchFamily="34" charset="0"/>
+                <a:ea typeface="Calibri" pitchFamily="34" charset="-122"/>
+                <a:cs typeface="Calibri" pitchFamily="34" charset="-120"/>
+              </a:rPr>
+              <a:t>приоритетная</a:t>
+            </a:r>
+            <a:r>
+              <a:rPr lang="en-US" sz="1300" dirty="0">
+                <a:solidFill>
+                  <a:srgbClr val="73766F"/>
+                </a:solidFill>
+                <a:latin typeface="Calibri" pitchFamily="34" charset="0"/>
+                <a:ea typeface="Calibri" pitchFamily="34" charset="-122"/>
+                <a:cs typeface="Calibri" pitchFamily="34" charset="-120"/>
+              </a:rPr>
+              <a:t> </a:t>
+            </a:r>
+            <a:r>
+              <a:rPr lang="ru-RU" sz="1300" dirty="0">
+                <a:solidFill>
+                  <a:srgbClr val="73766F"/>
+                </a:solidFill>
+                <a:latin typeface="Calibri" pitchFamily="34" charset="0"/>
+                <a:ea typeface="Calibri" pitchFamily="34" charset="-122"/>
+                <a:cs typeface="Calibri" pitchFamily="34" charset="-120"/>
+              </a:rPr>
+              <a:t>поддержка, геолокация членов семьи.</a:t>
             </a:r>
             <a:endParaRPr lang="en-US" sz="1300" dirty="0"/>
           </a:p>
@@ -8465,7 +8064,7 @@
           <a:bodyPr wrap="square" lIns="0" tIns="0" rIns="0" bIns="0" rtlCol="0" anchor="ctr"/>
           <a:lstStyle/>
           <a:p>
-            <a:pPr algn="ctr" indent="0" marL="0">
+            <a:pPr marL="0" indent="0" algn="ctr">
               <a:buNone/>
             </a:pPr>
             <a:r>
@@ -8504,7 +8103,7 @@
           <a:bodyPr wrap="square" lIns="0" tIns="0" rIns="0" bIns="0" rtlCol="0" anchor="ctr"/>
           <a:lstStyle/>
           <a:p>
-            <a:pPr indent="0" marL="0">
+            <a:pPr marL="0" indent="0">
               <a:buNone/>
             </a:pPr>
             <a:r>
@@ -8543,7 +8142,7 @@
           <a:bodyPr wrap="square" lIns="0" tIns="0" rIns="0" bIns="0" rtlCol="0" anchor="ctr"/>
           <a:lstStyle/>
           <a:p>
-            <a:pPr indent="0" marL="0">
+            <a:pPr marL="0" indent="0">
               <a:lnSpc>
                 <a:spcPct val="130000"/>
               </a:lnSpc>
@@ -8585,7 +8184,7 @@
           <a:bodyPr wrap="square" lIns="0" tIns="0" rIns="0" bIns="0" rtlCol="0" anchor="ctr"/>
           <a:lstStyle/>
           <a:p>
-            <a:pPr indent="0" marL="0">
+            <a:pPr marL="0" indent="0">
               <a:buNone/>
             </a:pPr>
             <a:r>
@@ -8624,7 +8223,7 @@
           <a:bodyPr wrap="square" lIns="0" tIns="0" rIns="0" bIns="0" rtlCol="0" anchor="ctr"/>
           <a:lstStyle/>
           <a:p>
-            <a:pPr algn="r" indent="0" marL="0">
+            <a:pPr marL="0" indent="0" algn="r">
               <a:buNone/>
             </a:pPr>
             <a:r>
@@ -8652,12 +8251,13 @@
 
 <file path=ppt/slides/slide7.xml><?xml version="1.0" encoding="utf-8"?>
 <p:sld xmlns:a="http://schemas.openxmlformats.org/drawingml/2006/main" xmlns:r="http://schemas.openxmlformats.org/officeDocument/2006/relationships" xmlns:p="http://schemas.openxmlformats.org/presentationml/2006/main">
-  <p:cSld name="Slide 7">
+  <p:cSld name="Slide 8">
     <p:bg>
       <p:bgPr>
         <a:solidFill>
           <a:srgbClr val="F5F3EE"/>
         </a:solidFill>
+        <a:effectLst/>
       </p:bgPr>
     </p:bg>
     <p:spTree>
@@ -8695,11 +8295,11 @@
           <a:bodyPr wrap="square" lIns="0" tIns="0" rIns="0" bIns="0" rtlCol="0" anchor="ctr"/>
           <a:lstStyle/>
           <a:p>
-            <a:pPr indent="0" marL="0">
-              <a:buNone/>
-            </a:pPr>
-            <a:r>
-              <a:rPr lang="en-US" sz="1300" b="1" spc="200" kern="0" dirty="0">
+            <a:pPr marL="0" indent="0">
+              <a:buNone/>
+            </a:pPr>
+            <a:r>
+              <a:rPr lang="en-US" sz="1300" b="1" kern="0" spc="200" dirty="0">
                 <a:solidFill>
                   <a:srgbClr val="667A55"/>
                 </a:solidFill>
@@ -8707,7 +8307,7 @@
                 <a:ea typeface="Calibri" pitchFamily="34" charset="-122"/>
                 <a:cs typeface="Calibri" pitchFamily="34" charset="-120"/>
               </a:rPr>
-              <a:t>КОМАНДА</a:t>
+              <a:t>ПРОГРЕСС</a:t>
             </a:r>
             <a:endParaRPr lang="en-US" sz="1300" dirty="0"/>
           </a:p>
@@ -8734,7 +8334,7 @@
           <a:bodyPr wrap="square" lIns="0" tIns="0" rIns="0" bIns="0" rtlCol="0" anchor="ctr"/>
           <a:lstStyle/>
           <a:p>
-            <a:pPr indent="0" marL="0">
+            <a:pPr marL="0" indent="0">
               <a:buNone/>
             </a:pPr>
             <a:r>
@@ -8746,7 +8346,7 @@
                 <a:ea typeface="Cambria" pitchFamily="34" charset="-122"/>
                 <a:cs typeface="Cambria" pitchFamily="34" charset="-120"/>
               </a:rPr>
-              <a:t>Три роли, закрывающие продукт, технологию и рост</a:t>
+              <a:t>Лендинг запущен — есть первые посетители</a:t>
             </a:r>
             <a:endParaRPr lang="en-US" sz="3400" dirty="0"/>
           </a:p>
@@ -8760,12 +8360,615 @@
         </p:nvSpPr>
         <p:spPr>
           <a:xfrm>
-            <a:off x="548640" y="1828800"/>
-            <a:ext cx="3502152" cy="3566160"/>
+            <a:off x="548640" y="1691640"/>
+            <a:ext cx="3749040" cy="365760"/>
           </a:xfrm>
           <a:prstGeom prst="roundRect">
             <a:avLst>
-              <a:gd name="adj" fmla="val 2611"/>
+              <a:gd name="adj" fmla="val 50000"/>
+            </a:avLst>
+          </a:prstGeom>
+          <a:solidFill>
+            <a:srgbClr val="E5EBE0"/>
+          </a:solidFill>
+          <a:ln/>
+        </p:spPr>
+      </p:sp>
+      <p:sp>
+        <p:nvSpPr>
+          <p:cNvPr id="5" name="Text 3"/>
+          <p:cNvSpPr txBox="1"/>
+          <p:nvPr/>
+        </p:nvSpPr>
+        <p:spPr>
+          <a:xfrm>
+            <a:off x="548640" y="1691640"/>
+            <a:ext cx="3749040" cy="365760"/>
+          </a:xfrm>
+          <a:prstGeom prst="rect">
+            <a:avLst/>
+          </a:prstGeom>
+          <a:noFill/>
+          <a:ln/>
+        </p:spPr>
+        <p:txBody>
+          <a:bodyPr wrap="square" lIns="0" tIns="0" rIns="0" bIns="0" rtlCol="0" anchor="ctr"/>
+          <a:lstStyle/>
+          <a:p>
+            <a:pPr marL="0" indent="0" algn="ctr">
+              <a:buNone/>
+            </a:pPr>
+            <a:r>
+              <a:rPr lang="en-US" sz="1150" b="1" dirty="0">
+                <a:solidFill>
+                  <a:srgbClr val="667A55"/>
+                </a:solidFill>
+                <a:latin typeface="Calibri" pitchFamily="34" charset="0"/>
+                <a:ea typeface="Calibri" pitchFamily="34" charset="-122"/>
+                <a:cs typeface="Calibri" pitchFamily="34" charset="-120"/>
+              </a:rPr>
+              <a:t>Этап: Pre-seed · Лендинг live</a:t>
+            </a:r>
+            <a:endParaRPr lang="en-US" sz="1150" dirty="0"/>
+          </a:p>
+        </p:txBody>
+      </p:sp>
+      <p:sp>
+        <p:nvSpPr>
+          <p:cNvPr id="6" name="Text 4"/>
+          <p:cNvSpPr txBox="1"/>
+          <p:nvPr/>
+        </p:nvSpPr>
+        <p:spPr>
+          <a:xfrm>
+            <a:off x="548640" y="2212848"/>
+            <a:ext cx="5349240" cy="274320"/>
+          </a:xfrm>
+          <a:prstGeom prst="rect">
+            <a:avLst/>
+          </a:prstGeom>
+          <a:noFill/>
+          <a:ln/>
+        </p:spPr>
+        <p:txBody>
+          <a:bodyPr wrap="square" lIns="0" tIns="0" rIns="0" bIns="0" rtlCol="0" anchor="ctr"/>
+          <a:lstStyle/>
+          <a:p>
+            <a:pPr marL="0" indent="0">
+              <a:buNone/>
+            </a:pPr>
+            <a:r>
+              <a:rPr lang="en-US" sz="1200" b="1" dirty="0">
+                <a:solidFill>
+                  <a:srgbClr val="667A55"/>
+                </a:solidFill>
+                <a:latin typeface="Calibri" pitchFamily="34" charset="0"/>
+                <a:ea typeface="Calibri" pitchFamily="34" charset="-122"/>
+                <a:cs typeface="Calibri" pitchFamily="34" charset="-120"/>
+              </a:rPr>
+              <a:t>Готово к MVP</a:t>
+            </a:r>
+            <a:endParaRPr lang="en-US" sz="1200" dirty="0"/>
+          </a:p>
+        </p:txBody>
+      </p:sp>
+      <p:sp>
+        <p:nvSpPr>
+          <p:cNvPr id="7" name="Text 5"/>
+          <p:cNvSpPr txBox="1"/>
+          <p:nvPr/>
+        </p:nvSpPr>
+        <p:spPr>
+          <a:xfrm>
+            <a:off x="548640" y="2505456"/>
+            <a:ext cx="5349240" cy="502920"/>
+          </a:xfrm>
+          <a:prstGeom prst="rect">
+            <a:avLst/>
+          </a:prstGeom>
+          <a:noFill/>
+          <a:ln/>
+        </p:spPr>
+        <p:txBody>
+          <a:bodyPr wrap="square" lIns="0" tIns="0" rIns="0" bIns="0" rtlCol="0" anchor="ctr"/>
+          <a:lstStyle/>
+          <a:p>
+            <a:pPr marL="0" indent="0">
+              <a:lnSpc>
+                <a:spcPct val="125000"/>
+              </a:lnSpc>
+              <a:buNone/>
+            </a:pPr>
+            <a:r>
+              <a:rPr lang="en-US" sz="1250" dirty="0">
+                <a:solidFill>
+                  <a:srgbClr val="20221F"/>
+                </a:solidFill>
+                <a:latin typeface="Calibri" pitchFamily="34" charset="0"/>
+                <a:ea typeface="Calibri" pitchFamily="34" charset="-122"/>
+                <a:cs typeface="Calibri" pitchFamily="34" charset="-120"/>
+              </a:rPr>
+              <a:t>Регистрация и авторизация, семья и приглашения, бюджет, календарь, холодильник, семейный чат.</a:t>
+            </a:r>
+            <a:endParaRPr lang="en-US" sz="1250" dirty="0"/>
+          </a:p>
+        </p:txBody>
+      </p:sp>
+      <p:sp>
+        <p:nvSpPr>
+          <p:cNvPr id="8" name="Text 6"/>
+          <p:cNvSpPr txBox="1"/>
+          <p:nvPr/>
+        </p:nvSpPr>
+        <p:spPr>
+          <a:xfrm>
+            <a:off x="548640" y="3200400"/>
+            <a:ext cx="4572000" cy="274320"/>
+          </a:xfrm>
+          <a:prstGeom prst="rect">
+            <a:avLst/>
+          </a:prstGeom>
+          <a:noFill/>
+          <a:ln/>
+        </p:spPr>
+        <p:txBody>
+          <a:bodyPr wrap="square" lIns="0" tIns="0" rIns="0" bIns="0" rtlCol="0" anchor="ctr"/>
+          <a:lstStyle/>
+          <a:p>
+            <a:pPr marL="0" indent="0">
+              <a:buNone/>
+            </a:pPr>
+            <a:r>
+              <a:rPr lang="en-US" sz="1200" b="1" dirty="0">
+                <a:solidFill>
+                  <a:srgbClr val="667A55"/>
+                </a:solidFill>
+                <a:latin typeface="Calibri" pitchFamily="34" charset="0"/>
+                <a:ea typeface="Calibri" pitchFamily="34" charset="-122"/>
+                <a:cs typeface="Calibri" pitchFamily="34" charset="-120"/>
+              </a:rPr>
+              <a:t>Дорожная карта</a:t>
+            </a:r>
+            <a:endParaRPr lang="en-US" sz="1200" dirty="0"/>
+          </a:p>
+        </p:txBody>
+      </p:sp>
+      <p:sp>
+        <p:nvSpPr>
+          <p:cNvPr id="9" name="Shape 7"/>
+          <p:cNvSpPr/>
+          <p:nvPr/>
+        </p:nvSpPr>
+        <p:spPr>
+          <a:xfrm>
+            <a:off x="548640" y="3529584"/>
+            <a:ext cx="1508760" cy="402336"/>
+          </a:xfrm>
+          <a:prstGeom prst="roundRect">
+            <a:avLst>
+              <a:gd name="adj" fmla="val 50000"/>
+            </a:avLst>
+          </a:prstGeom>
+          <a:solidFill>
+            <a:srgbClr val="667A55"/>
+          </a:solidFill>
+          <a:ln/>
+        </p:spPr>
+      </p:sp>
+      <p:sp>
+        <p:nvSpPr>
+          <p:cNvPr id="10" name="Text 8"/>
+          <p:cNvSpPr txBox="1"/>
+          <p:nvPr/>
+        </p:nvSpPr>
+        <p:spPr>
+          <a:xfrm>
+            <a:off x="548640" y="3529584"/>
+            <a:ext cx="1508760" cy="402336"/>
+          </a:xfrm>
+          <a:prstGeom prst="rect">
+            <a:avLst/>
+          </a:prstGeom>
+          <a:noFill/>
+          <a:ln/>
+        </p:spPr>
+        <p:txBody>
+          <a:bodyPr wrap="square" lIns="0" tIns="0" rIns="0" bIns="0" rtlCol="0" anchor="ctr"/>
+          <a:lstStyle/>
+          <a:p>
+            <a:pPr marL="0" indent="0" algn="ctr">
+              <a:buNone/>
+            </a:pPr>
+            <a:r>
+              <a:rPr lang="en-US" sz="1300" b="1" dirty="0">
+                <a:solidFill>
+                  <a:srgbClr val="FFFFFF"/>
+                </a:solidFill>
+                <a:latin typeface="Calibri" pitchFamily="34" charset="0"/>
+                <a:ea typeface="Calibri" pitchFamily="34" charset="-122"/>
+                <a:cs typeface="Calibri" pitchFamily="34" charset="-120"/>
+              </a:rPr>
+              <a:t>MVP</a:t>
+            </a:r>
+            <a:endParaRPr lang="en-US" sz="1300" dirty="0"/>
+          </a:p>
+        </p:txBody>
+      </p:sp>
+      <p:sp>
+        <p:nvSpPr>
+          <p:cNvPr id="11" name="Text 9"/>
+          <p:cNvSpPr txBox="1"/>
+          <p:nvPr/>
+        </p:nvSpPr>
+        <p:spPr>
+          <a:xfrm>
+            <a:off x="2057400" y="3529584"/>
+            <a:ext cx="274320" cy="402336"/>
+          </a:xfrm>
+          <a:prstGeom prst="rect">
+            <a:avLst/>
+          </a:prstGeom>
+          <a:noFill/>
+          <a:ln/>
+        </p:spPr>
+        <p:txBody>
+          <a:bodyPr wrap="square" lIns="0" tIns="0" rIns="0" bIns="0" rtlCol="0" anchor="ctr"/>
+          <a:lstStyle/>
+          <a:p>
+            <a:pPr marL="0" indent="0" algn="ctr">
+              <a:buNone/>
+            </a:pPr>
+            <a:r>
+              <a:rPr lang="en-US" sz="1600" dirty="0">
+                <a:solidFill>
+                  <a:srgbClr val="73766F"/>
+                </a:solidFill>
+                <a:latin typeface="Calibri" pitchFamily="34" charset="0"/>
+                <a:ea typeface="Calibri" pitchFamily="34" charset="-122"/>
+                <a:cs typeface="Calibri" pitchFamily="34" charset="-120"/>
+              </a:rPr>
+              <a:t>→</a:t>
+            </a:r>
+            <a:endParaRPr lang="en-US" sz="1600" dirty="0"/>
+          </a:p>
+        </p:txBody>
+      </p:sp>
+      <p:sp>
+        <p:nvSpPr>
+          <p:cNvPr id="12" name="Shape 10"/>
+          <p:cNvSpPr/>
+          <p:nvPr/>
+        </p:nvSpPr>
+        <p:spPr>
+          <a:xfrm>
+            <a:off x="2331720" y="3529584"/>
+            <a:ext cx="1508760" cy="402336"/>
+          </a:xfrm>
+          <a:prstGeom prst="roundRect">
+            <a:avLst>
+              <a:gd name="adj" fmla="val 50000"/>
+            </a:avLst>
+          </a:prstGeom>
+          <a:solidFill>
+            <a:srgbClr val="F3E2D8"/>
+          </a:solidFill>
+          <a:ln/>
+        </p:spPr>
+      </p:sp>
+      <p:sp>
+        <p:nvSpPr>
+          <p:cNvPr id="13" name="Text 11"/>
+          <p:cNvSpPr txBox="1"/>
+          <p:nvPr/>
+        </p:nvSpPr>
+        <p:spPr>
+          <a:xfrm>
+            <a:off x="2331720" y="3529584"/>
+            <a:ext cx="1508760" cy="402336"/>
+          </a:xfrm>
+          <a:prstGeom prst="rect">
+            <a:avLst/>
+          </a:prstGeom>
+          <a:noFill/>
+          <a:ln/>
+        </p:spPr>
+        <p:txBody>
+          <a:bodyPr wrap="square" lIns="0" tIns="0" rIns="0" bIns="0" rtlCol="0" anchor="ctr"/>
+          <a:lstStyle/>
+          <a:p>
+            <a:pPr marL="0" indent="0" algn="ctr">
+              <a:buNone/>
+            </a:pPr>
+            <a:r>
+              <a:rPr lang="en-US" sz="1300" b="1" dirty="0">
+                <a:solidFill>
+                  <a:srgbClr val="D38A62"/>
+                </a:solidFill>
+                <a:latin typeface="Calibri" pitchFamily="34" charset="0"/>
+                <a:ea typeface="Calibri" pitchFamily="34" charset="-122"/>
+                <a:cs typeface="Calibri" pitchFamily="34" charset="-120"/>
+              </a:rPr>
+              <a:t>V2</a:t>
+            </a:r>
+            <a:endParaRPr lang="en-US" sz="1300" dirty="0"/>
+          </a:p>
+        </p:txBody>
+      </p:sp>
+      <p:sp>
+        <p:nvSpPr>
+          <p:cNvPr id="14" name="Text 12"/>
+          <p:cNvSpPr txBox="1"/>
+          <p:nvPr/>
+        </p:nvSpPr>
+        <p:spPr>
+          <a:xfrm>
+            <a:off x="3840480" y="3529584"/>
+            <a:ext cx="274320" cy="402336"/>
+          </a:xfrm>
+          <a:prstGeom prst="rect">
+            <a:avLst/>
+          </a:prstGeom>
+          <a:noFill/>
+          <a:ln/>
+        </p:spPr>
+        <p:txBody>
+          <a:bodyPr wrap="square" lIns="0" tIns="0" rIns="0" bIns="0" rtlCol="0" anchor="ctr"/>
+          <a:lstStyle/>
+          <a:p>
+            <a:pPr marL="0" indent="0" algn="ctr">
+              <a:buNone/>
+            </a:pPr>
+            <a:r>
+              <a:rPr lang="en-US" sz="1600" dirty="0">
+                <a:solidFill>
+                  <a:srgbClr val="73766F"/>
+                </a:solidFill>
+                <a:latin typeface="Calibri" pitchFamily="34" charset="0"/>
+                <a:ea typeface="Calibri" pitchFamily="34" charset="-122"/>
+                <a:cs typeface="Calibri" pitchFamily="34" charset="-120"/>
+              </a:rPr>
+              <a:t>→</a:t>
+            </a:r>
+            <a:endParaRPr lang="en-US" sz="1600" dirty="0"/>
+          </a:p>
+        </p:txBody>
+      </p:sp>
+      <p:sp>
+        <p:nvSpPr>
+          <p:cNvPr id="15" name="Shape 13"/>
+          <p:cNvSpPr/>
+          <p:nvPr/>
+        </p:nvSpPr>
+        <p:spPr>
+          <a:xfrm>
+            <a:off x="4114800" y="3529584"/>
+            <a:ext cx="1508760" cy="402336"/>
+          </a:xfrm>
+          <a:prstGeom prst="roundRect">
+            <a:avLst>
+              <a:gd name="adj" fmla="val 50000"/>
+            </a:avLst>
+          </a:prstGeom>
+          <a:solidFill>
+            <a:srgbClr val="F3E2D8"/>
+          </a:solidFill>
+          <a:ln/>
+        </p:spPr>
+      </p:sp>
+      <p:sp>
+        <p:nvSpPr>
+          <p:cNvPr id="16" name="Text 14"/>
+          <p:cNvSpPr txBox="1"/>
+          <p:nvPr/>
+        </p:nvSpPr>
+        <p:spPr>
+          <a:xfrm>
+            <a:off x="4114800" y="3529584"/>
+            <a:ext cx="1508760" cy="402336"/>
+          </a:xfrm>
+          <a:prstGeom prst="rect">
+            <a:avLst/>
+          </a:prstGeom>
+          <a:noFill/>
+          <a:ln/>
+        </p:spPr>
+        <p:txBody>
+          <a:bodyPr wrap="square" lIns="0" tIns="0" rIns="0" bIns="0" rtlCol="0" anchor="ctr"/>
+          <a:lstStyle/>
+          <a:p>
+            <a:pPr marL="0" indent="0" algn="ctr">
+              <a:buNone/>
+            </a:pPr>
+            <a:r>
+              <a:rPr lang="en-US" sz="1300" b="1" dirty="0">
+                <a:solidFill>
+                  <a:srgbClr val="D38A62"/>
+                </a:solidFill>
+                <a:latin typeface="Calibri" pitchFamily="34" charset="0"/>
+                <a:ea typeface="Calibri" pitchFamily="34" charset="-122"/>
+                <a:cs typeface="Calibri" pitchFamily="34" charset="-120"/>
+              </a:rPr>
+              <a:t>V3</a:t>
+            </a:r>
+            <a:endParaRPr lang="en-US" sz="1300" dirty="0"/>
+          </a:p>
+        </p:txBody>
+      </p:sp>
+      <p:sp>
+        <p:nvSpPr>
+          <p:cNvPr id="17" name="Text 15"/>
+          <p:cNvSpPr txBox="1"/>
+          <p:nvPr/>
+        </p:nvSpPr>
+        <p:spPr>
+          <a:xfrm>
+            <a:off x="548640" y="4059936"/>
+            <a:ext cx="5349240" cy="868680"/>
+          </a:xfrm>
+          <a:prstGeom prst="rect">
+            <a:avLst/>
+          </a:prstGeom>
+          <a:noFill/>
+          <a:ln/>
+        </p:spPr>
+        <p:txBody>
+          <a:bodyPr wrap="square" lIns="0" tIns="0" rIns="0" bIns="0" rtlCol="0" anchor="ctr"/>
+          <a:lstStyle/>
+          <a:p>
+            <a:pPr marL="0" indent="0">
+              <a:lnSpc>
+                <a:spcPct val="130000"/>
+              </a:lnSpc>
+              <a:buNone/>
+            </a:pPr>
+            <a:r>
+              <a:rPr lang="en-US" sz="1100" dirty="0">
+                <a:solidFill>
+                  <a:srgbClr val="73766F"/>
+                </a:solidFill>
+                <a:latin typeface="Calibri" pitchFamily="34" charset="0"/>
+                <a:ea typeface="Calibri" pitchFamily="34" charset="-122"/>
+                <a:cs typeface="Calibri" pitchFamily="34" charset="-120"/>
+              </a:rPr>
+              <a:t>Основной сценарий: семья, бюджет, календарь, продукты, чат   ·   Уведомления, карта, список покупок, оповещения о </a:t>
+            </a:r>
+            <a:r>
+              <a:rPr lang="en-US" sz="1100" dirty="0" err="1">
+                <a:solidFill>
+                  <a:srgbClr val="73766F"/>
+                </a:solidFill>
+                <a:latin typeface="Calibri" pitchFamily="34" charset="0"/>
+                <a:ea typeface="Calibri" pitchFamily="34" charset="-122"/>
+                <a:cs typeface="Calibri" pitchFamily="34" charset="-120"/>
+              </a:rPr>
+              <a:t>продуктах</a:t>
+            </a:r>
+            <a:r>
+              <a:rPr lang="en-US" sz="1100" dirty="0">
+                <a:solidFill>
+                  <a:srgbClr val="73766F"/>
+                </a:solidFill>
+                <a:latin typeface="Calibri" pitchFamily="34" charset="0"/>
+                <a:ea typeface="Calibri" pitchFamily="34" charset="-122"/>
+                <a:cs typeface="Calibri" pitchFamily="34" charset="-120"/>
+              </a:rPr>
+              <a:t>   ·   Real-time </a:t>
+            </a:r>
+            <a:r>
+              <a:rPr lang="en-US" sz="1100" dirty="0" err="1">
+                <a:solidFill>
+                  <a:srgbClr val="73766F"/>
+                </a:solidFill>
+                <a:latin typeface="Calibri" pitchFamily="34" charset="0"/>
+                <a:ea typeface="Calibri" pitchFamily="34" charset="-122"/>
+                <a:cs typeface="Calibri" pitchFamily="34" charset="-120"/>
+              </a:rPr>
+              <a:t>геолокация</a:t>
+            </a:r>
+            <a:r>
+              <a:rPr lang="en-US" sz="1100" dirty="0">
+                <a:solidFill>
+                  <a:srgbClr val="73766F"/>
+                </a:solidFill>
+                <a:latin typeface="Calibri" pitchFamily="34" charset="0"/>
+                <a:ea typeface="Calibri" pitchFamily="34" charset="-122"/>
+                <a:cs typeface="Calibri" pitchFamily="34" charset="-120"/>
+              </a:rPr>
+              <a:t>, push, </a:t>
+            </a:r>
+            <a:r>
+              <a:rPr lang="en-US" sz="1100" dirty="0" err="1">
+                <a:solidFill>
+                  <a:srgbClr val="73766F"/>
+                </a:solidFill>
+                <a:latin typeface="Calibri" pitchFamily="34" charset="0"/>
+                <a:ea typeface="Calibri" pitchFamily="34" charset="-122"/>
+                <a:cs typeface="Calibri" pitchFamily="34" charset="-120"/>
+              </a:rPr>
+              <a:t>аналитика</a:t>
+            </a:r>
+            <a:r>
+              <a:rPr lang="en-US" sz="1100" dirty="0">
+                <a:solidFill>
+                  <a:srgbClr val="73766F"/>
+                </a:solidFill>
+                <a:latin typeface="Calibri" pitchFamily="34" charset="0"/>
+                <a:ea typeface="Calibri" pitchFamily="34" charset="-122"/>
+                <a:cs typeface="Calibri" pitchFamily="34" charset="-120"/>
+              </a:rPr>
+              <a:t>, </a:t>
+            </a:r>
+            <a:r>
+              <a:rPr lang="en-US" sz="1100" dirty="0" err="1">
+                <a:solidFill>
+                  <a:srgbClr val="73766F"/>
+                </a:solidFill>
+                <a:latin typeface="Calibri" pitchFamily="34" charset="0"/>
+                <a:ea typeface="Calibri" pitchFamily="34" charset="-122"/>
+                <a:cs typeface="Calibri" pitchFamily="34" charset="-120"/>
+              </a:rPr>
+              <a:t>автоматизация</a:t>
+            </a:r>
+            <a:endParaRPr lang="en-US" sz="1100" dirty="0"/>
+          </a:p>
+        </p:txBody>
+      </p:sp>
+      <p:sp>
+        <p:nvSpPr>
+          <p:cNvPr id="18" name="Text 16"/>
+          <p:cNvSpPr txBox="1"/>
+          <p:nvPr/>
+        </p:nvSpPr>
+        <p:spPr>
+          <a:xfrm>
+            <a:off x="548640" y="5010912"/>
+            <a:ext cx="5349240" cy="365760"/>
+          </a:xfrm>
+          <a:prstGeom prst="rect">
+            <a:avLst/>
+          </a:prstGeom>
+          <a:noFill/>
+          <a:ln/>
+        </p:spPr>
+        <p:txBody>
+          <a:bodyPr wrap="square" lIns="0" tIns="0" rIns="0" bIns="0" rtlCol="0" anchor="ctr"/>
+          <a:lstStyle/>
+          <a:p>
+            <a:pPr marL="0" indent="0">
+              <a:lnSpc>
+                <a:spcPct val="120000"/>
+              </a:lnSpc>
+              <a:buNone/>
+            </a:pPr>
+            <a:r>
+              <a:rPr lang="en-US" sz="1050" i="1" dirty="0">
+                <a:solidFill>
+                  <a:srgbClr val="73766F"/>
+                </a:solidFill>
+                <a:latin typeface="Calibri" pitchFamily="34" charset="0"/>
+                <a:ea typeface="Calibri" pitchFamily="34" charset="-122"/>
+                <a:cs typeface="Calibri" pitchFamily="34" charset="-120"/>
+              </a:rPr>
+              <a:t>07.09.2026 — список покупок добавлен в экосистему, рассматривается для включения в MVP.</a:t>
+            </a:r>
+            <a:endParaRPr lang="en-US" sz="1050" dirty="0"/>
+          </a:p>
+        </p:txBody>
+      </p:sp>
+      <p:sp>
+        <p:nvSpPr>
+          <p:cNvPr id="20" name="Shape 18"/>
+          <p:cNvSpPr/>
+          <p:nvPr/>
+        </p:nvSpPr>
+        <p:spPr>
+          <a:xfrm>
+            <a:off x="6263640" y="1691640"/>
+            <a:ext cx="5074920" cy="4434840"/>
+          </a:xfrm>
+          <a:prstGeom prst="roundRect">
+            <a:avLst>
+              <a:gd name="adj" fmla="val 2062"/>
             </a:avLst>
           </a:prstGeom>
           <a:solidFill>
@@ -8781,203 +8984,140 @@
       </p:sp>
       <p:sp>
         <p:nvSpPr>
-          <p:cNvPr id="5" name="Shape 3"/>
+          <p:cNvPr id="21" name="Text 19"/>
+          <p:cNvSpPr txBox="1"/>
+          <p:nvPr/>
+        </p:nvSpPr>
+        <p:spPr>
+          <a:xfrm>
+            <a:off x="6583680" y="1929384"/>
+            <a:ext cx="4434840" cy="320040"/>
+          </a:xfrm>
+          <a:prstGeom prst="rect">
+            <a:avLst/>
+          </a:prstGeom>
+          <a:noFill/>
+          <a:ln/>
+        </p:spPr>
+        <p:txBody>
+          <a:bodyPr wrap="square" lIns="0" tIns="0" rIns="0" bIns="0" rtlCol="0" anchor="ctr"/>
+          <a:lstStyle/>
+          <a:p>
+            <a:pPr marL="0" indent="0">
+              <a:buNone/>
+            </a:pPr>
+            <a:r>
+              <a:rPr lang="en-US" sz="1500" b="1" dirty="0">
+                <a:solidFill>
+                  <a:srgbClr val="20221F"/>
+                </a:solidFill>
+                <a:latin typeface="Calibri" pitchFamily="34" charset="0"/>
+                <a:ea typeface="Calibri" pitchFamily="34" charset="-122"/>
+                <a:cs typeface="Calibri" pitchFamily="34" charset="-120"/>
+              </a:rPr>
+              <a:t>Лендинг Famigo: первые данные</a:t>
+            </a:r>
+            <a:endParaRPr lang="en-US" sz="1500" dirty="0"/>
+          </a:p>
+        </p:txBody>
+      </p:sp>
+      <p:sp>
+        <p:nvSpPr>
+          <p:cNvPr id="22" name="Text 20"/>
+          <p:cNvSpPr txBox="1"/>
+          <p:nvPr/>
+        </p:nvSpPr>
+        <p:spPr>
+          <a:xfrm>
+            <a:off x="6583680" y="2221992"/>
+            <a:ext cx="4434840" cy="274320"/>
+          </a:xfrm>
+          <a:prstGeom prst="rect">
+            <a:avLst/>
+          </a:prstGeom>
+          <a:noFill/>
+          <a:ln/>
+        </p:spPr>
+        <p:txBody>
+          <a:bodyPr wrap="square" lIns="0" tIns="0" rIns="0" bIns="0" rtlCol="0" anchor="ctr"/>
+          <a:lstStyle/>
+          <a:p>
+            <a:pPr marL="0" indent="0">
+              <a:buNone/>
+            </a:pPr>
+            <a:r>
+              <a:rPr lang="en-US" sz="1050" dirty="0">
+                <a:solidFill>
+                  <a:srgbClr val="73766F"/>
+                </a:solidFill>
+                <a:latin typeface="Calibri" pitchFamily="34" charset="0"/>
+                <a:ea typeface="Calibri" pitchFamily="34" charset="-122"/>
+                <a:cs typeface="Calibri" pitchFamily="34" charset="-120"/>
+              </a:rPr>
+              <a:t>Яндекс.Метрика · сентябрь 2026</a:t>
+            </a:r>
+            <a:endParaRPr lang="en-US" sz="1050" dirty="0"/>
+          </a:p>
+        </p:txBody>
+      </p:sp>
+      <p:sp>
+        <p:nvSpPr>
+          <p:cNvPr id="23" name="Text 21"/>
+          <p:cNvSpPr txBox="1"/>
+          <p:nvPr/>
+        </p:nvSpPr>
+        <p:spPr>
+          <a:xfrm>
+            <a:off x="6583680" y="2514600"/>
+            <a:ext cx="4434840" cy="365760"/>
+          </a:xfrm>
+          <a:prstGeom prst="rect">
+            <a:avLst/>
+          </a:prstGeom>
+          <a:noFill/>
+          <a:ln/>
+        </p:spPr>
+        <p:txBody>
+          <a:bodyPr wrap="square" lIns="0" tIns="0" rIns="0" bIns="0" rtlCol="0" anchor="ctr"/>
+          <a:lstStyle/>
+          <a:p>
+            <a:pPr marL="0" indent="0">
+              <a:lnSpc>
+                <a:spcPct val="120000"/>
+              </a:lnSpc>
+              <a:buNone/>
+            </a:pPr>
+            <a:r>
+              <a:rPr lang="en-US" sz="1100" b="1" dirty="0">
+                <a:solidFill>
+                  <a:srgbClr val="20221F"/>
+                </a:solidFill>
+                <a:latin typeface="Calibri" pitchFamily="34" charset="0"/>
+                <a:ea typeface="Calibri" pitchFamily="34" charset="-122"/>
+                <a:cs typeface="Calibri" pitchFamily="34" charset="-120"/>
+              </a:rPr>
+              <a:t>20 посетителей · 21 визит · 49 просмотров · 2,33 стр/визит · 4 м 4 с на сайте · 38,1 % отказов</a:t>
+            </a:r>
+            <a:endParaRPr lang="en-US" sz="1100" dirty="0"/>
+          </a:p>
+        </p:txBody>
+      </p:sp>
+      <p:sp>
+        <p:nvSpPr>
+          <p:cNvPr id="24" name="Shape 22"/>
           <p:cNvSpPr/>
           <p:nvPr/>
         </p:nvSpPr>
         <p:spPr>
           <a:xfrm>
-            <a:off x="841248" y="2148840"/>
-            <a:ext cx="822960" cy="822960"/>
-          </a:xfrm>
-          <a:prstGeom prst="ellipse">
-            <a:avLst/>
-          </a:prstGeom>
-          <a:solidFill>
-            <a:srgbClr val="667A55"/>
-          </a:solidFill>
-          <a:ln/>
-        </p:spPr>
-      </p:sp>
-      <p:sp>
-        <p:nvSpPr>
-          <p:cNvPr id="6" name="Text 4"/>
-          <p:cNvSpPr txBox="1"/>
-          <p:nvPr/>
-        </p:nvSpPr>
-        <p:spPr>
-          <a:xfrm>
-            <a:off x="841248" y="2148840"/>
-            <a:ext cx="822960" cy="822960"/>
-          </a:xfrm>
-          <a:prstGeom prst="rect">
-            <a:avLst/>
-          </a:prstGeom>
-          <a:noFill/>
-          <a:ln/>
-        </p:spPr>
-        <p:txBody>
-          <a:bodyPr wrap="square" lIns="0" tIns="0" rIns="0" bIns="0" rtlCol="0" anchor="ctr"/>
-          <a:lstStyle/>
-          <a:p>
-            <a:pPr algn="ctr" indent="0" marL="0">
-              <a:buNone/>
-            </a:pPr>
-            <a:r>
-              <a:rPr lang="en-US" sz="2400" b="1" dirty="0">
-                <a:solidFill>
-                  <a:srgbClr val="FFFFFF"/>
-                </a:solidFill>
-                <a:latin typeface="Cambria" pitchFamily="34" charset="0"/>
-                <a:ea typeface="Cambria" pitchFamily="34" charset="-122"/>
-                <a:cs typeface="Cambria" pitchFamily="34" charset="-120"/>
-              </a:rPr>
-              <a:t>ЦА</a:t>
-            </a:r>
-            <a:endParaRPr lang="en-US" sz="2400" dirty="0"/>
-          </a:p>
-        </p:txBody>
-      </p:sp>
-      <p:sp>
-        <p:nvSpPr>
-          <p:cNvPr id="7" name="Text 5"/>
-          <p:cNvSpPr txBox="1"/>
-          <p:nvPr/>
-        </p:nvSpPr>
-        <p:spPr>
-          <a:xfrm>
-            <a:off x="841248" y="3154680"/>
-            <a:ext cx="2916936" cy="365760"/>
-          </a:xfrm>
-          <a:prstGeom prst="rect">
-            <a:avLst/>
-          </a:prstGeom>
-          <a:noFill/>
-          <a:ln/>
-        </p:spPr>
-        <p:txBody>
-          <a:bodyPr wrap="square" lIns="0" tIns="0" rIns="0" bIns="0" rtlCol="0" anchor="ctr"/>
-          <a:lstStyle/>
-          <a:p>
-            <a:pPr indent="0" marL="0">
-              <a:buNone/>
-            </a:pPr>
-            <a:r>
-              <a:rPr lang="en-US" sz="1650" b="1" dirty="0">
-                <a:solidFill>
-                  <a:srgbClr val="20221F"/>
-                </a:solidFill>
-                <a:latin typeface="Cambria" pitchFamily="34" charset="0"/>
-                <a:ea typeface="Cambria" pitchFamily="34" charset="-122"/>
-                <a:cs typeface="Cambria" pitchFamily="34" charset="-120"/>
-              </a:rPr>
-              <a:t>Цейсновский А.Э.</a:t>
-            </a:r>
-            <a:endParaRPr lang="en-US" sz="1650" dirty="0"/>
-          </a:p>
-        </p:txBody>
-      </p:sp>
-      <p:sp>
-        <p:nvSpPr>
-          <p:cNvPr id="8" name="Text 6"/>
-          <p:cNvSpPr txBox="1"/>
-          <p:nvPr/>
-        </p:nvSpPr>
-        <p:spPr>
-          <a:xfrm>
-            <a:off x="841248" y="3520440"/>
-            <a:ext cx="2916936" cy="320040"/>
-          </a:xfrm>
-          <a:prstGeom prst="rect">
-            <a:avLst/>
-          </a:prstGeom>
-          <a:noFill/>
-          <a:ln/>
-        </p:spPr>
-        <p:txBody>
-          <a:bodyPr wrap="square" lIns="0" tIns="0" rIns="0" bIns="0" rtlCol="0" anchor="ctr"/>
-          <a:lstStyle/>
-          <a:p>
-            <a:pPr indent="0" marL="0">
-              <a:buNone/>
-            </a:pPr>
-            <a:r>
-              <a:rPr lang="en-US" sz="1250" b="1" dirty="0">
-                <a:solidFill>
-                  <a:srgbClr val="667A55"/>
-                </a:solidFill>
-                <a:latin typeface="Calibri" pitchFamily="34" charset="0"/>
-                <a:ea typeface="Calibri" pitchFamily="34" charset="-122"/>
-                <a:cs typeface="Calibri" pitchFamily="34" charset="-120"/>
-              </a:rPr>
-              <a:t>Тимлид / разработчик</a:t>
-            </a:r>
-            <a:endParaRPr lang="en-US" sz="1250" dirty="0"/>
-          </a:p>
-        </p:txBody>
-      </p:sp>
-      <p:sp>
-        <p:nvSpPr>
-          <p:cNvPr id="9" name="Text 7"/>
-          <p:cNvSpPr txBox="1"/>
-          <p:nvPr/>
-        </p:nvSpPr>
-        <p:spPr>
-          <a:xfrm>
-            <a:off x="841248" y="3931920"/>
-            <a:ext cx="2916936" cy="1280160"/>
-          </a:xfrm>
-          <a:prstGeom prst="rect">
-            <a:avLst/>
-          </a:prstGeom>
-          <a:noFill/>
-          <a:ln/>
-        </p:spPr>
-        <p:txBody>
-          <a:bodyPr wrap="square" lIns="0" tIns="0" rIns="0" bIns="0" rtlCol="0" anchor="ctr"/>
-          <a:lstStyle/>
-          <a:p>
-            <a:pPr indent="0" marL="0">
-              <a:lnSpc>
-                <a:spcPct val="130000"/>
-              </a:lnSpc>
-              <a:buNone/>
-            </a:pPr>
-            <a:r>
-              <a:rPr lang="en-US" sz="1200" dirty="0">
-                <a:solidFill>
-                  <a:srgbClr val="73766F"/>
-                </a:solidFill>
-                <a:latin typeface="Calibri" pitchFamily="34" charset="0"/>
-                <a:ea typeface="Calibri" pitchFamily="34" charset="-122"/>
-                <a:cs typeface="Calibri" pitchFamily="34" charset="-120"/>
-              </a:rPr>
-              <a:t>Архитектура проекта, разработка, координация команды.</a:t>
-            </a:r>
-            <a:endParaRPr lang="en-US" sz="1200" dirty="0"/>
-          </a:p>
-        </p:txBody>
-      </p:sp>
-      <p:sp>
-        <p:nvSpPr>
-          <p:cNvPr id="10" name="Shape 8"/>
-          <p:cNvSpPr/>
-          <p:nvPr/>
-        </p:nvSpPr>
-        <p:spPr>
-          <a:xfrm>
-            <a:off x="4233672" y="1828800"/>
-            <a:ext cx="3502152" cy="3566160"/>
-          </a:xfrm>
-          <a:prstGeom prst="roundRect">
-            <a:avLst>
-              <a:gd name="adj" fmla="val 2611"/>
-            </a:avLst>
-          </a:prstGeom>
-          <a:solidFill>
-            <a:srgbClr val="FFFFFF"/>
-          </a:solidFill>
-          <a:ln w="12700">
+            <a:off x="6583680" y="2916936"/>
+            <a:ext cx="4434840" cy="0"/>
+          </a:xfrm>
+          <a:prstGeom prst="line">
+            <a:avLst/>
+          </a:prstGeom>
+          <a:noFill/>
+          <a:ln w="9525">
             <a:solidFill>
               <a:srgbClr val="E4E4DE"/>
             </a:solidFill>
@@ -8987,128 +9127,30 @@
       </p:sp>
       <p:sp>
         <p:nvSpPr>
-          <p:cNvPr id="11" name="Shape 9"/>
-          <p:cNvSpPr/>
-          <p:nvPr/>
-        </p:nvSpPr>
-        <p:spPr>
-          <a:xfrm>
-            <a:off x="4526280" y="2148840"/>
-            <a:ext cx="822960" cy="822960"/>
-          </a:xfrm>
-          <a:prstGeom prst="ellipse">
-            <a:avLst/>
-          </a:prstGeom>
-          <a:solidFill>
-            <a:srgbClr val="667A55"/>
-          </a:solidFill>
-          <a:ln/>
-        </p:spPr>
-      </p:sp>
-      <p:sp>
-        <p:nvSpPr>
-          <p:cNvPr id="12" name="Text 10"/>
-          <p:cNvSpPr txBox="1"/>
-          <p:nvPr/>
-        </p:nvSpPr>
-        <p:spPr>
-          <a:xfrm>
-            <a:off x="4526280" y="2148840"/>
-            <a:ext cx="822960" cy="822960"/>
-          </a:xfrm>
-          <a:prstGeom prst="rect">
-            <a:avLst/>
-          </a:prstGeom>
-          <a:noFill/>
-          <a:ln/>
-        </p:spPr>
-        <p:txBody>
-          <a:bodyPr wrap="square" lIns="0" tIns="0" rIns="0" bIns="0" rtlCol="0" anchor="ctr"/>
-          <a:lstStyle/>
-          <a:p>
-            <a:pPr algn="ctr" indent="0" marL="0">
-              <a:buNone/>
-            </a:pPr>
-            <a:r>
-              <a:rPr lang="en-US" sz="2400" b="1" dirty="0">
-                <a:solidFill>
-                  <a:srgbClr val="FFFFFF"/>
-                </a:solidFill>
-                <a:latin typeface="Cambria" pitchFamily="34" charset="0"/>
-                <a:ea typeface="Cambria" pitchFamily="34" charset="-122"/>
-                <a:cs typeface="Cambria" pitchFamily="34" charset="-120"/>
-              </a:rPr>
-              <a:t>ЛС</a:t>
-            </a:r>
-            <a:endParaRPr lang="en-US" sz="2400" dirty="0"/>
-          </a:p>
-        </p:txBody>
-      </p:sp>
-      <p:sp>
-        <p:nvSpPr>
-          <p:cNvPr id="13" name="Text 11"/>
-          <p:cNvSpPr txBox="1"/>
-          <p:nvPr/>
-        </p:nvSpPr>
-        <p:spPr>
-          <a:xfrm>
-            <a:off x="4526280" y="3154680"/>
-            <a:ext cx="2916936" cy="365760"/>
-          </a:xfrm>
-          <a:prstGeom prst="rect">
-            <a:avLst/>
-          </a:prstGeom>
-          <a:noFill/>
-          <a:ln/>
-        </p:spPr>
-        <p:txBody>
-          <a:bodyPr wrap="square" lIns="0" tIns="0" rIns="0" bIns="0" rtlCol="0" anchor="ctr"/>
-          <a:lstStyle/>
-          <a:p>
-            <a:pPr indent="0" marL="0">
-              <a:buNone/>
-            </a:pPr>
-            <a:r>
-              <a:rPr lang="en-US" sz="1650" b="1" dirty="0">
-                <a:solidFill>
-                  <a:srgbClr val="20221F"/>
-                </a:solidFill>
-                <a:latin typeface="Cambria" pitchFamily="34" charset="0"/>
-                <a:ea typeface="Cambria" pitchFamily="34" charset="-122"/>
-                <a:cs typeface="Cambria" pitchFamily="34" charset="-120"/>
-              </a:rPr>
-              <a:t>Лапутин С.А.</a:t>
-            </a:r>
-            <a:endParaRPr lang="en-US" sz="1650" dirty="0"/>
-          </a:p>
-        </p:txBody>
-      </p:sp>
-      <p:sp>
-        <p:nvSpPr>
-          <p:cNvPr id="14" name="Text 12"/>
-          <p:cNvSpPr txBox="1"/>
-          <p:nvPr/>
-        </p:nvSpPr>
-        <p:spPr>
-          <a:xfrm>
-            <a:off x="4526280" y="3520440"/>
-            <a:ext cx="2916936" cy="320040"/>
-          </a:xfrm>
-          <a:prstGeom prst="rect">
-            <a:avLst/>
-          </a:prstGeom>
-          <a:noFill/>
-          <a:ln/>
-        </p:spPr>
-        <p:txBody>
-          <a:bodyPr wrap="square" lIns="0" tIns="0" rIns="0" bIns="0" rtlCol="0" anchor="ctr"/>
-          <a:lstStyle/>
-          <a:p>
-            <a:pPr indent="0" marL="0">
-              <a:buNone/>
-            </a:pPr>
-            <a:r>
-              <a:rPr lang="en-US" sz="1250" b="1" dirty="0">
+          <p:cNvPr id="25" name="Text 23"/>
+          <p:cNvSpPr txBox="1"/>
+          <p:nvPr/>
+        </p:nvSpPr>
+        <p:spPr>
+          <a:xfrm>
+            <a:off x="6583680" y="3008376"/>
+            <a:ext cx="4434840" cy="219456"/>
+          </a:xfrm>
+          <a:prstGeom prst="rect">
+            <a:avLst/>
+          </a:prstGeom>
+          <a:noFill/>
+          <a:ln/>
+        </p:spPr>
+        <p:txBody>
+          <a:bodyPr wrap="square" lIns="0" tIns="0" rIns="0" bIns="0" rtlCol="0" anchor="ctr"/>
+          <a:lstStyle/>
+          <a:p>
+            <a:pPr marL="0" indent="0">
+              <a:buNone/>
+            </a:pPr>
+            <a:r>
+              <a:rPr lang="en-US" sz="1100" b="1" dirty="0">
                 <a:solidFill>
                   <a:srgbClr val="667A55"/>
                 </a:solidFill>
@@ -9116,263 +9158,31 @@
                 <a:ea typeface="Calibri" pitchFamily="34" charset="-122"/>
                 <a:cs typeface="Calibri" pitchFamily="34" charset="-120"/>
               </a:rPr>
-              <a:t>Разработчик / аналитик</a:t>
-            </a:r>
-            <a:endParaRPr lang="en-US" sz="1250" dirty="0"/>
-          </a:p>
-        </p:txBody>
-      </p:sp>
-      <p:sp>
-        <p:nvSpPr>
-          <p:cNvPr id="15" name="Text 13"/>
-          <p:cNvSpPr txBox="1"/>
-          <p:nvPr/>
-        </p:nvSpPr>
-        <p:spPr>
-          <a:xfrm>
-            <a:off x="4526280" y="3931920"/>
-            <a:ext cx="2916936" cy="1280160"/>
-          </a:xfrm>
-          <a:prstGeom prst="rect">
-            <a:avLst/>
-          </a:prstGeom>
-          <a:noFill/>
-          <a:ln/>
-        </p:spPr>
-        <p:txBody>
-          <a:bodyPr wrap="square" lIns="0" tIns="0" rIns="0" bIns="0" rtlCol="0" anchor="ctr"/>
-          <a:lstStyle/>
-          <a:p>
-            <a:pPr indent="0" marL="0">
-              <a:lnSpc>
-                <a:spcPct val="130000"/>
-              </a:lnSpc>
-              <a:buNone/>
-            </a:pPr>
-            <a:r>
-              <a:rPr lang="en-US" sz="1200" dirty="0">
-                <a:solidFill>
-                  <a:srgbClr val="73766F"/>
-                </a:solidFill>
-                <a:latin typeface="Calibri" pitchFamily="34" charset="0"/>
-                <a:ea typeface="Calibri" pitchFamily="34" charset="-122"/>
-                <a:cs typeface="Calibri" pitchFamily="34" charset="-120"/>
-              </a:rPr>
-              <a:t>Анализ требований, разработка, проработка функциональности.</a:t>
-            </a:r>
-            <a:endParaRPr lang="en-US" sz="1200" dirty="0"/>
-          </a:p>
-        </p:txBody>
-      </p:sp>
-      <p:sp>
-        <p:nvSpPr>
-          <p:cNvPr id="16" name="Shape 14"/>
-          <p:cNvSpPr/>
-          <p:nvPr/>
-        </p:nvSpPr>
-        <p:spPr>
-          <a:xfrm>
-            <a:off x="7918704" y="1828800"/>
-            <a:ext cx="3502152" cy="3566160"/>
-          </a:xfrm>
-          <a:prstGeom prst="roundRect">
-            <a:avLst>
-              <a:gd name="adj" fmla="val 2611"/>
-            </a:avLst>
-          </a:prstGeom>
-          <a:solidFill>
-            <a:srgbClr val="FFFFFF"/>
-          </a:solidFill>
-          <a:ln w="12700">
-            <a:solidFill>
-              <a:srgbClr val="E4E4DE"/>
-            </a:solidFill>
-            <a:prstDash val="solid"/>
-          </a:ln>
-        </p:spPr>
-      </p:sp>
-      <p:sp>
-        <p:nvSpPr>
-          <p:cNvPr id="17" name="Shape 15"/>
-          <p:cNvSpPr/>
-          <p:nvPr/>
-        </p:nvSpPr>
-        <p:spPr>
-          <a:xfrm>
-            <a:off x="8211312" y="2148840"/>
-            <a:ext cx="822960" cy="822960"/>
-          </a:xfrm>
-          <a:prstGeom prst="ellipse">
-            <a:avLst/>
-          </a:prstGeom>
-          <a:solidFill>
-            <a:srgbClr val="667A55"/>
-          </a:solidFill>
-          <a:ln/>
-        </p:spPr>
-      </p:sp>
-      <p:sp>
-        <p:nvSpPr>
-          <p:cNvPr id="18" name="Text 16"/>
-          <p:cNvSpPr txBox="1"/>
-          <p:nvPr/>
-        </p:nvSpPr>
-        <p:spPr>
-          <a:xfrm>
-            <a:off x="8211312" y="2148840"/>
-            <a:ext cx="822960" cy="822960"/>
-          </a:xfrm>
-          <a:prstGeom prst="rect">
-            <a:avLst/>
-          </a:prstGeom>
-          <a:noFill/>
-          <a:ln/>
-        </p:spPr>
-        <p:txBody>
-          <a:bodyPr wrap="square" lIns="0" tIns="0" rIns="0" bIns="0" rtlCol="0" anchor="ctr"/>
-          <a:lstStyle/>
-          <a:p>
-            <a:pPr algn="ctr" indent="0" marL="0">
-              <a:buNone/>
-            </a:pPr>
-            <a:r>
-              <a:rPr lang="en-US" sz="2400" b="1" dirty="0">
-                <a:solidFill>
-                  <a:srgbClr val="FFFFFF"/>
-                </a:solidFill>
-                <a:latin typeface="Cambria" pitchFamily="34" charset="0"/>
-                <a:ea typeface="Cambria" pitchFamily="34" charset="-122"/>
-                <a:cs typeface="Cambria" pitchFamily="34" charset="-120"/>
-              </a:rPr>
-              <a:t>ТГ</a:t>
-            </a:r>
-            <a:endParaRPr lang="en-US" sz="2400" dirty="0"/>
-          </a:p>
-        </p:txBody>
-      </p:sp>
-      <p:sp>
-        <p:nvSpPr>
-          <p:cNvPr id="19" name="Text 17"/>
-          <p:cNvSpPr txBox="1"/>
-          <p:nvPr/>
-        </p:nvSpPr>
-        <p:spPr>
-          <a:xfrm>
-            <a:off x="8211312" y="3154680"/>
-            <a:ext cx="2916936" cy="365760"/>
-          </a:xfrm>
-          <a:prstGeom prst="rect">
-            <a:avLst/>
-          </a:prstGeom>
-          <a:noFill/>
-          <a:ln/>
-        </p:spPr>
-        <p:txBody>
-          <a:bodyPr wrap="square" lIns="0" tIns="0" rIns="0" bIns="0" rtlCol="0" anchor="ctr"/>
-          <a:lstStyle/>
-          <a:p>
-            <a:pPr indent="0" marL="0">
-              <a:buNone/>
-            </a:pPr>
-            <a:r>
-              <a:rPr lang="en-US" sz="1650" b="1" dirty="0">
-                <a:solidFill>
-                  <a:srgbClr val="20221F"/>
-                </a:solidFill>
-                <a:latin typeface="Cambria" pitchFamily="34" charset="0"/>
-                <a:ea typeface="Cambria" pitchFamily="34" charset="-122"/>
-                <a:cs typeface="Cambria" pitchFamily="34" charset="-120"/>
-              </a:rPr>
-              <a:t>Толмачев Г.А.</a:t>
-            </a:r>
-            <a:endParaRPr lang="en-US" sz="1650" dirty="0"/>
-          </a:p>
-        </p:txBody>
-      </p:sp>
-      <p:sp>
-        <p:nvSpPr>
-          <p:cNvPr id="20" name="Text 18"/>
-          <p:cNvSpPr txBox="1"/>
-          <p:nvPr/>
-        </p:nvSpPr>
-        <p:spPr>
-          <a:xfrm>
-            <a:off x="8211312" y="3520440"/>
-            <a:ext cx="2916936" cy="320040"/>
-          </a:xfrm>
-          <a:prstGeom prst="rect">
-            <a:avLst/>
-          </a:prstGeom>
-          <a:noFill/>
-          <a:ln/>
-        </p:spPr>
-        <p:txBody>
-          <a:bodyPr wrap="square" lIns="0" tIns="0" rIns="0" bIns="0" rtlCol="0" anchor="ctr"/>
-          <a:lstStyle/>
-          <a:p>
-            <a:pPr indent="0" marL="0">
-              <a:buNone/>
-            </a:pPr>
-            <a:r>
-              <a:rPr lang="en-US" sz="1250" b="1" dirty="0">
-                <a:solidFill>
-                  <a:srgbClr val="667A55"/>
-                </a:solidFill>
-                <a:latin typeface="Calibri" pitchFamily="34" charset="0"/>
-                <a:ea typeface="Calibri" pitchFamily="34" charset="-122"/>
-                <a:cs typeface="Calibri" pitchFamily="34" charset="-120"/>
-              </a:rPr>
-              <a:t>Разработчик / маркетолог</a:t>
-            </a:r>
-            <a:endParaRPr lang="en-US" sz="1250" dirty="0"/>
-          </a:p>
-        </p:txBody>
-      </p:sp>
-      <p:sp>
-        <p:nvSpPr>
-          <p:cNvPr id="21" name="Text 19"/>
-          <p:cNvSpPr txBox="1"/>
-          <p:nvPr/>
-        </p:nvSpPr>
-        <p:spPr>
-          <a:xfrm>
-            <a:off x="8211312" y="3931920"/>
-            <a:ext cx="2916936" cy="1280160"/>
-          </a:xfrm>
-          <a:prstGeom prst="rect">
-            <a:avLst/>
-          </a:prstGeom>
-          <a:noFill/>
-          <a:ln/>
-        </p:spPr>
-        <p:txBody>
-          <a:bodyPr wrap="square" lIns="0" tIns="0" rIns="0" bIns="0" rtlCol="0" anchor="ctr"/>
-          <a:lstStyle/>
-          <a:p>
-            <a:pPr indent="0" marL="0">
-              <a:lnSpc>
-                <a:spcPct val="130000"/>
-              </a:lnSpc>
-              <a:buNone/>
-            </a:pPr>
-            <a:r>
-              <a:rPr lang="en-US" sz="1200" dirty="0">
-                <a:solidFill>
-                  <a:srgbClr val="73766F"/>
-                </a:solidFill>
-                <a:latin typeface="Calibri" pitchFamily="34" charset="0"/>
-                <a:ea typeface="Calibri" pitchFamily="34" charset="-122"/>
-                <a:cs typeface="Calibri" pitchFamily="34" charset="-120"/>
-              </a:rPr>
-              <a:t>Разработка, маркетинговая стратегия, анализ рынка и аудитории.</a:t>
-            </a:r>
-            <a:endParaRPr lang="en-US" sz="1200" dirty="0"/>
-          </a:p>
-        </p:txBody>
-      </p:sp>
-      <p:sp>
-        <p:nvSpPr>
-          <p:cNvPr id="22" name="Text 20"/>
+              <a:t>Источники трафика (посетители)</a:t>
+            </a:r>
+            <a:endParaRPr lang="en-US" sz="1100" dirty="0"/>
+          </a:p>
+        </p:txBody>
+      </p:sp>
+      <p:graphicFrame>
+        <p:nvGraphicFramePr>
+          <p:cNvPr id="26" name="Chart 0"/>
+          <p:cNvGraphicFramePr/>
+          <p:nvPr/>
+        </p:nvGraphicFramePr>
+        <p:xfrm>
+          <a:off x="6446520" y="3227832"/>
+          <a:ext cx="4709160" cy="1298448"/>
+        </p:xfrm>
+        <a:graphic>
+          <a:graphicData uri="http://schemas.openxmlformats.org/drawingml/2006/chart">
+            <c:chart xmlns:c="http://schemas.openxmlformats.org/drawingml/2006/chart" xmlns:r="http://schemas.openxmlformats.org/officeDocument/2006/relationships" r:id="rId3"/>
+          </a:graphicData>
+        </a:graphic>
+      </p:graphicFrame>
+      <p:sp>
+        <p:nvSpPr>
+          <p:cNvPr id="29" name="Text 25"/>
           <p:cNvSpPr txBox="1"/>
           <p:nvPr/>
         </p:nvSpPr>
@@ -9391,7 +9201,7 @@
           <a:bodyPr wrap="square" lIns="0" tIns="0" rIns="0" bIns="0" rtlCol="0" anchor="ctr"/>
           <a:lstStyle/>
           <a:p>
-            <a:pPr indent="0" marL="0">
+            <a:pPr marL="0" indent="0">
               <a:buNone/>
             </a:pPr>
             <a:r>
@@ -9411,7 +9221,7 @@
       </p:sp>
       <p:sp>
         <p:nvSpPr>
-          <p:cNvPr id="23" name="Text 21"/>
+          <p:cNvPr id="30" name="Text 26"/>
           <p:cNvSpPr txBox="1"/>
           <p:nvPr/>
         </p:nvSpPr>
@@ -9430,7 +9240,7 @@
           <a:bodyPr wrap="square" lIns="0" tIns="0" rIns="0" bIns="0" rtlCol="0" anchor="ctr"/>
           <a:lstStyle/>
           <a:p>
-            <a:pPr algn="r" indent="0" marL="0">
+            <a:pPr marL="0" indent="0" algn="r">
               <a:buNone/>
             </a:pPr>
             <a:r>
@@ -9442,12 +9252,42 @@
                 <a:ea typeface="Calibri" pitchFamily="34" charset="-122"/>
                 <a:cs typeface="Calibri" pitchFamily="34" charset="-120"/>
               </a:rPr>
-              <a:t>7</a:t>
+              <a:t>8</a:t>
             </a:r>
             <a:endParaRPr lang="en-US" sz="1000" dirty="0"/>
           </a:p>
         </p:txBody>
       </p:sp>
+      <p:pic>
+        <p:nvPicPr>
+          <p:cNvPr id="32" name="Рисунок 31">
+            <a:extLst>
+              <a:ext uri="{FF2B5EF4-FFF2-40B4-BE49-F238E27FC236}">
+                <a16:creationId xmlns:a16="http://schemas.microsoft.com/office/drawing/2014/main" id="{76CD4ACF-AD35-EAE2-7942-4603EA4DC759}"/>
+              </a:ext>
+            </a:extLst>
+          </p:cNvPr>
+          <p:cNvPicPr>
+            <a:picLocks noChangeAspect="1"/>
+          </p:cNvPicPr>
+          <p:nvPr/>
+        </p:nvPicPr>
+        <p:blipFill>
+          <a:blip r:embed="rId4"/>
+          <a:stretch>
+            <a:fillRect/>
+          </a:stretch>
+        </p:blipFill>
+        <p:spPr>
+          <a:xfrm>
+            <a:off x="6314000" y="4472774"/>
+            <a:ext cx="4965337" cy="1596324"/>
+          </a:xfrm>
+          <a:prstGeom prst="rect">
+            <a:avLst/>
+          </a:prstGeom>
+        </p:spPr>
+      </p:pic>
     </p:spTree>
   </p:cSld>
   <p:clrMapOvr>
@@ -9458,12 +9298,13 @@
 
 <file path=ppt/slides/slide8.xml><?xml version="1.0" encoding="utf-8"?>
 <p:sld xmlns:a="http://schemas.openxmlformats.org/drawingml/2006/main" xmlns:r="http://schemas.openxmlformats.org/officeDocument/2006/relationships" xmlns:p="http://schemas.openxmlformats.org/presentationml/2006/main">
-  <p:cSld name="Slide 8">
+  <p:cSld name="Slide 7">
     <p:bg>
       <p:bgPr>
         <a:solidFill>
           <a:srgbClr val="F5F3EE"/>
         </a:solidFill>
+        <a:effectLst/>
       </p:bgPr>
     </p:bg>
     <p:spTree>
@@ -9501,11 +9342,11 @@
           <a:bodyPr wrap="square" lIns="0" tIns="0" rIns="0" bIns="0" rtlCol="0" anchor="ctr"/>
           <a:lstStyle/>
           <a:p>
-            <a:pPr indent="0" marL="0">
-              <a:buNone/>
-            </a:pPr>
-            <a:r>
-              <a:rPr lang="en-US" sz="1300" b="1" spc="200" kern="0" dirty="0">
+            <a:pPr marL="0" indent="0">
+              <a:buNone/>
+            </a:pPr>
+            <a:r>
+              <a:rPr lang="en-US" sz="1300" b="1" kern="0" spc="200" dirty="0">
                 <a:solidFill>
                   <a:srgbClr val="667A55"/>
                 </a:solidFill>
@@ -9513,7 +9354,7 @@
                 <a:ea typeface="Calibri" pitchFamily="34" charset="-122"/>
                 <a:cs typeface="Calibri" pitchFamily="34" charset="-120"/>
               </a:rPr>
-              <a:t>ПРОГРЕСС</a:t>
+              <a:t>КОМАНДА</a:t>
             </a:r>
             <a:endParaRPr lang="en-US" sz="1300" dirty="0"/>
           </a:p>
@@ -9540,7 +9381,7 @@
           <a:bodyPr wrap="square" lIns="0" tIns="0" rIns="0" bIns="0" rtlCol="0" anchor="ctr"/>
           <a:lstStyle/>
           <a:p>
-            <a:pPr indent="0" marL="0">
+            <a:pPr marL="0" indent="0">
               <a:buNone/>
             </a:pPr>
             <a:r>
@@ -9552,7 +9393,7 @@
                 <a:ea typeface="Cambria" pitchFamily="34" charset="-122"/>
                 <a:cs typeface="Cambria" pitchFamily="34" charset="-120"/>
               </a:rPr>
-              <a:t>Лендинг запущен — есть первые посетители</a:t>
+              <a:t>Три роли, закрывающие продукт, технологию и рост</a:t>
             </a:r>
             <a:endParaRPr lang="en-US" sz="3400" dirty="0"/>
           </a:p>
@@ -9566,577 +9407,12 @@
         </p:nvSpPr>
         <p:spPr>
           <a:xfrm>
-            <a:off x="548640" y="1691640"/>
-            <a:ext cx="3749040" cy="365760"/>
+            <a:off x="548640" y="1828800"/>
+            <a:ext cx="3502152" cy="3566160"/>
           </a:xfrm>
           <a:prstGeom prst="roundRect">
             <a:avLst>
-              <a:gd name="adj" fmla="val 50000"/>
-            </a:avLst>
-          </a:prstGeom>
-          <a:solidFill>
-            <a:srgbClr val="E5EBE0"/>
-          </a:solidFill>
-          <a:ln/>
-        </p:spPr>
-      </p:sp>
-      <p:sp>
-        <p:nvSpPr>
-          <p:cNvPr id="5" name="Text 3"/>
-          <p:cNvSpPr txBox="1"/>
-          <p:nvPr/>
-        </p:nvSpPr>
-        <p:spPr>
-          <a:xfrm>
-            <a:off x="548640" y="1691640"/>
-            <a:ext cx="3749040" cy="365760"/>
-          </a:xfrm>
-          <a:prstGeom prst="rect">
-            <a:avLst/>
-          </a:prstGeom>
-          <a:noFill/>
-          <a:ln/>
-        </p:spPr>
-        <p:txBody>
-          <a:bodyPr wrap="square" lIns="0" tIns="0" rIns="0" bIns="0" rtlCol="0" anchor="ctr"/>
-          <a:lstStyle/>
-          <a:p>
-            <a:pPr algn="ctr" indent="0" marL="0">
-              <a:buNone/>
-            </a:pPr>
-            <a:r>
-              <a:rPr lang="en-US" sz="1150" b="1" dirty="0">
-                <a:solidFill>
-                  <a:srgbClr val="667A55"/>
-                </a:solidFill>
-                <a:latin typeface="Calibri" pitchFamily="34" charset="0"/>
-                <a:ea typeface="Calibri" pitchFamily="34" charset="-122"/>
-                <a:cs typeface="Calibri" pitchFamily="34" charset="-120"/>
-              </a:rPr>
-              <a:t>Этап: Pre-seed · Лендинг live</a:t>
-            </a:r>
-            <a:endParaRPr lang="en-US" sz="1150" dirty="0"/>
-          </a:p>
-        </p:txBody>
-      </p:sp>
-      <p:sp>
-        <p:nvSpPr>
-          <p:cNvPr id="6" name="Text 4"/>
-          <p:cNvSpPr txBox="1"/>
-          <p:nvPr/>
-        </p:nvSpPr>
-        <p:spPr>
-          <a:xfrm>
-            <a:off x="548640" y="2212848"/>
-            <a:ext cx="5349240" cy="274320"/>
-          </a:xfrm>
-          <a:prstGeom prst="rect">
-            <a:avLst/>
-          </a:prstGeom>
-          <a:noFill/>
-          <a:ln/>
-        </p:spPr>
-        <p:txBody>
-          <a:bodyPr wrap="square" lIns="0" tIns="0" rIns="0" bIns="0" rtlCol="0" anchor="ctr"/>
-          <a:lstStyle/>
-          <a:p>
-            <a:pPr indent="0" marL="0">
-              <a:buNone/>
-            </a:pPr>
-            <a:r>
-              <a:rPr lang="en-US" sz="1200" b="1" dirty="0">
-                <a:solidFill>
-                  <a:srgbClr val="667A55"/>
-                </a:solidFill>
-                <a:latin typeface="Calibri" pitchFamily="34" charset="0"/>
-                <a:ea typeface="Calibri" pitchFamily="34" charset="-122"/>
-                <a:cs typeface="Calibri" pitchFamily="34" charset="-120"/>
-              </a:rPr>
-              <a:t>Готово к MVP</a:t>
-            </a:r>
-            <a:endParaRPr lang="en-US" sz="1200" dirty="0"/>
-          </a:p>
-        </p:txBody>
-      </p:sp>
-      <p:sp>
-        <p:nvSpPr>
-          <p:cNvPr id="7" name="Text 5"/>
-          <p:cNvSpPr txBox="1"/>
-          <p:nvPr/>
-        </p:nvSpPr>
-        <p:spPr>
-          <a:xfrm>
-            <a:off x="548640" y="2505456"/>
-            <a:ext cx="5349240" cy="502920"/>
-          </a:xfrm>
-          <a:prstGeom prst="rect">
-            <a:avLst/>
-          </a:prstGeom>
-          <a:noFill/>
-          <a:ln/>
-        </p:spPr>
-        <p:txBody>
-          <a:bodyPr wrap="square" lIns="0" tIns="0" rIns="0" bIns="0" rtlCol="0" anchor="ctr"/>
-          <a:lstStyle/>
-          <a:p>
-            <a:pPr indent="0" marL="0">
-              <a:lnSpc>
-                <a:spcPct val="125000"/>
-              </a:lnSpc>
-              <a:buNone/>
-            </a:pPr>
-            <a:r>
-              <a:rPr lang="en-US" sz="1250" dirty="0">
-                <a:solidFill>
-                  <a:srgbClr val="20221F"/>
-                </a:solidFill>
-                <a:latin typeface="Calibri" pitchFamily="34" charset="0"/>
-                <a:ea typeface="Calibri" pitchFamily="34" charset="-122"/>
-                <a:cs typeface="Calibri" pitchFamily="34" charset="-120"/>
-              </a:rPr>
-              <a:t>Регистрация и авторизация, семья и приглашения, бюджет, календарь, холодильник, семейный чат.</a:t>
-            </a:r>
-            <a:endParaRPr lang="en-US" sz="1250" dirty="0"/>
-          </a:p>
-        </p:txBody>
-      </p:sp>
-      <p:sp>
-        <p:nvSpPr>
-          <p:cNvPr id="8" name="Text 6"/>
-          <p:cNvSpPr txBox="1"/>
-          <p:nvPr/>
-        </p:nvSpPr>
-        <p:spPr>
-          <a:xfrm>
-            <a:off x="548640" y="3200400"/>
-            <a:ext cx="4572000" cy="274320"/>
-          </a:xfrm>
-          <a:prstGeom prst="rect">
-            <a:avLst/>
-          </a:prstGeom>
-          <a:noFill/>
-          <a:ln/>
-        </p:spPr>
-        <p:txBody>
-          <a:bodyPr wrap="square" lIns="0" tIns="0" rIns="0" bIns="0" rtlCol="0" anchor="ctr"/>
-          <a:lstStyle/>
-          <a:p>
-            <a:pPr indent="0" marL="0">
-              <a:buNone/>
-            </a:pPr>
-            <a:r>
-              <a:rPr lang="en-US" sz="1200" b="1" dirty="0">
-                <a:solidFill>
-                  <a:srgbClr val="667A55"/>
-                </a:solidFill>
-                <a:latin typeface="Calibri" pitchFamily="34" charset="0"/>
-                <a:ea typeface="Calibri" pitchFamily="34" charset="-122"/>
-                <a:cs typeface="Calibri" pitchFamily="34" charset="-120"/>
-              </a:rPr>
-              <a:t>Дорожная карта</a:t>
-            </a:r>
-            <a:endParaRPr lang="en-US" sz="1200" dirty="0"/>
-          </a:p>
-        </p:txBody>
-      </p:sp>
-      <p:sp>
-        <p:nvSpPr>
-          <p:cNvPr id="9" name="Shape 7"/>
-          <p:cNvSpPr/>
-          <p:nvPr/>
-        </p:nvSpPr>
-        <p:spPr>
-          <a:xfrm>
-            <a:off x="548640" y="3529584"/>
-            <a:ext cx="1508760" cy="402336"/>
-          </a:xfrm>
-          <a:prstGeom prst="roundRect">
-            <a:avLst>
-              <a:gd name="adj" fmla="val 50000"/>
-            </a:avLst>
-          </a:prstGeom>
-          <a:solidFill>
-            <a:srgbClr val="667A55"/>
-          </a:solidFill>
-          <a:ln/>
-        </p:spPr>
-      </p:sp>
-      <p:sp>
-        <p:nvSpPr>
-          <p:cNvPr id="10" name="Text 8"/>
-          <p:cNvSpPr txBox="1"/>
-          <p:nvPr/>
-        </p:nvSpPr>
-        <p:spPr>
-          <a:xfrm>
-            <a:off x="548640" y="3529584"/>
-            <a:ext cx="1508760" cy="402336"/>
-          </a:xfrm>
-          <a:prstGeom prst="rect">
-            <a:avLst/>
-          </a:prstGeom>
-          <a:noFill/>
-          <a:ln/>
-        </p:spPr>
-        <p:txBody>
-          <a:bodyPr wrap="square" lIns="0" tIns="0" rIns="0" bIns="0" rtlCol="0" anchor="ctr"/>
-          <a:lstStyle/>
-          <a:p>
-            <a:pPr algn="ctr" indent="0" marL="0">
-              <a:buNone/>
-            </a:pPr>
-            <a:r>
-              <a:rPr lang="en-US" sz="1300" b="1" dirty="0">
-                <a:solidFill>
-                  <a:srgbClr val="FFFFFF"/>
-                </a:solidFill>
-                <a:latin typeface="Calibri" pitchFamily="34" charset="0"/>
-                <a:ea typeface="Calibri" pitchFamily="34" charset="-122"/>
-                <a:cs typeface="Calibri" pitchFamily="34" charset="-120"/>
-              </a:rPr>
-              <a:t>MVP</a:t>
-            </a:r>
-            <a:endParaRPr lang="en-US" sz="1300" dirty="0"/>
-          </a:p>
-        </p:txBody>
-      </p:sp>
-      <p:sp>
-        <p:nvSpPr>
-          <p:cNvPr id="11" name="Text 9"/>
-          <p:cNvSpPr txBox="1"/>
-          <p:nvPr/>
-        </p:nvSpPr>
-        <p:spPr>
-          <a:xfrm>
-            <a:off x="2057400" y="3529584"/>
-            <a:ext cx="274320" cy="402336"/>
-          </a:xfrm>
-          <a:prstGeom prst="rect">
-            <a:avLst/>
-          </a:prstGeom>
-          <a:noFill/>
-          <a:ln/>
-        </p:spPr>
-        <p:txBody>
-          <a:bodyPr wrap="square" lIns="0" tIns="0" rIns="0" bIns="0" rtlCol="0" anchor="ctr"/>
-          <a:lstStyle/>
-          <a:p>
-            <a:pPr algn="ctr" indent="0" marL="0">
-              <a:buNone/>
-            </a:pPr>
-            <a:r>
-              <a:rPr lang="en-US" sz="1600" dirty="0">
-                <a:solidFill>
-                  <a:srgbClr val="73766F"/>
-                </a:solidFill>
-                <a:latin typeface="Calibri" pitchFamily="34" charset="0"/>
-                <a:ea typeface="Calibri" pitchFamily="34" charset="-122"/>
-                <a:cs typeface="Calibri" pitchFamily="34" charset="-120"/>
-              </a:rPr>
-              <a:t>→</a:t>
-            </a:r>
-            <a:endParaRPr lang="en-US" sz="1600" dirty="0"/>
-          </a:p>
-        </p:txBody>
-      </p:sp>
-      <p:sp>
-        <p:nvSpPr>
-          <p:cNvPr id="12" name="Shape 10"/>
-          <p:cNvSpPr/>
-          <p:nvPr/>
-        </p:nvSpPr>
-        <p:spPr>
-          <a:xfrm>
-            <a:off x="2331720" y="3529584"/>
-            <a:ext cx="1508760" cy="402336"/>
-          </a:xfrm>
-          <a:prstGeom prst="roundRect">
-            <a:avLst>
-              <a:gd name="adj" fmla="val 50000"/>
-            </a:avLst>
-          </a:prstGeom>
-          <a:solidFill>
-            <a:srgbClr val="F3E2D8"/>
-          </a:solidFill>
-          <a:ln/>
-        </p:spPr>
-      </p:sp>
-      <p:sp>
-        <p:nvSpPr>
-          <p:cNvPr id="13" name="Text 11"/>
-          <p:cNvSpPr txBox="1"/>
-          <p:nvPr/>
-        </p:nvSpPr>
-        <p:spPr>
-          <a:xfrm>
-            <a:off x="2331720" y="3529584"/>
-            <a:ext cx="1508760" cy="402336"/>
-          </a:xfrm>
-          <a:prstGeom prst="rect">
-            <a:avLst/>
-          </a:prstGeom>
-          <a:noFill/>
-          <a:ln/>
-        </p:spPr>
-        <p:txBody>
-          <a:bodyPr wrap="square" lIns="0" tIns="0" rIns="0" bIns="0" rtlCol="0" anchor="ctr"/>
-          <a:lstStyle/>
-          <a:p>
-            <a:pPr algn="ctr" indent="0" marL="0">
-              <a:buNone/>
-            </a:pPr>
-            <a:r>
-              <a:rPr lang="en-US" sz="1300" b="1" dirty="0">
-                <a:solidFill>
-                  <a:srgbClr val="D38A62"/>
-                </a:solidFill>
-                <a:latin typeface="Calibri" pitchFamily="34" charset="0"/>
-                <a:ea typeface="Calibri" pitchFamily="34" charset="-122"/>
-                <a:cs typeface="Calibri" pitchFamily="34" charset="-120"/>
-              </a:rPr>
-              <a:t>V2</a:t>
-            </a:r>
-            <a:endParaRPr lang="en-US" sz="1300" dirty="0"/>
-          </a:p>
-        </p:txBody>
-      </p:sp>
-      <p:sp>
-        <p:nvSpPr>
-          <p:cNvPr id="14" name="Text 12"/>
-          <p:cNvSpPr txBox="1"/>
-          <p:nvPr/>
-        </p:nvSpPr>
-        <p:spPr>
-          <a:xfrm>
-            <a:off x="3840480" y="3529584"/>
-            <a:ext cx="274320" cy="402336"/>
-          </a:xfrm>
-          <a:prstGeom prst="rect">
-            <a:avLst/>
-          </a:prstGeom>
-          <a:noFill/>
-          <a:ln/>
-        </p:spPr>
-        <p:txBody>
-          <a:bodyPr wrap="square" lIns="0" tIns="0" rIns="0" bIns="0" rtlCol="0" anchor="ctr"/>
-          <a:lstStyle/>
-          <a:p>
-            <a:pPr algn="ctr" indent="0" marL="0">
-              <a:buNone/>
-            </a:pPr>
-            <a:r>
-              <a:rPr lang="en-US" sz="1600" dirty="0">
-                <a:solidFill>
-                  <a:srgbClr val="73766F"/>
-                </a:solidFill>
-                <a:latin typeface="Calibri" pitchFamily="34" charset="0"/>
-                <a:ea typeface="Calibri" pitchFamily="34" charset="-122"/>
-                <a:cs typeface="Calibri" pitchFamily="34" charset="-120"/>
-              </a:rPr>
-              <a:t>→</a:t>
-            </a:r>
-            <a:endParaRPr lang="en-US" sz="1600" dirty="0"/>
-          </a:p>
-        </p:txBody>
-      </p:sp>
-      <p:sp>
-        <p:nvSpPr>
-          <p:cNvPr id="15" name="Shape 13"/>
-          <p:cNvSpPr/>
-          <p:nvPr/>
-        </p:nvSpPr>
-        <p:spPr>
-          <a:xfrm>
-            <a:off x="4114800" y="3529584"/>
-            <a:ext cx="1508760" cy="402336"/>
-          </a:xfrm>
-          <a:prstGeom prst="roundRect">
-            <a:avLst>
-              <a:gd name="adj" fmla="val 50000"/>
-            </a:avLst>
-          </a:prstGeom>
-          <a:solidFill>
-            <a:srgbClr val="F3E2D8"/>
-          </a:solidFill>
-          <a:ln/>
-        </p:spPr>
-      </p:sp>
-      <p:sp>
-        <p:nvSpPr>
-          <p:cNvPr id="16" name="Text 14"/>
-          <p:cNvSpPr txBox="1"/>
-          <p:nvPr/>
-        </p:nvSpPr>
-        <p:spPr>
-          <a:xfrm>
-            <a:off x="4114800" y="3529584"/>
-            <a:ext cx="1508760" cy="402336"/>
-          </a:xfrm>
-          <a:prstGeom prst="rect">
-            <a:avLst/>
-          </a:prstGeom>
-          <a:noFill/>
-          <a:ln/>
-        </p:spPr>
-        <p:txBody>
-          <a:bodyPr wrap="square" lIns="0" tIns="0" rIns="0" bIns="0" rtlCol="0" anchor="ctr"/>
-          <a:lstStyle/>
-          <a:p>
-            <a:pPr algn="ctr" indent="0" marL="0">
-              <a:buNone/>
-            </a:pPr>
-            <a:r>
-              <a:rPr lang="en-US" sz="1300" b="1" dirty="0">
-                <a:solidFill>
-                  <a:srgbClr val="D38A62"/>
-                </a:solidFill>
-                <a:latin typeface="Calibri" pitchFamily="34" charset="0"/>
-                <a:ea typeface="Calibri" pitchFamily="34" charset="-122"/>
-                <a:cs typeface="Calibri" pitchFamily="34" charset="-120"/>
-              </a:rPr>
-              <a:t>V3</a:t>
-            </a:r>
-            <a:endParaRPr lang="en-US" sz="1300" dirty="0"/>
-          </a:p>
-        </p:txBody>
-      </p:sp>
-      <p:sp>
-        <p:nvSpPr>
-          <p:cNvPr id="17" name="Text 15"/>
-          <p:cNvSpPr txBox="1"/>
-          <p:nvPr/>
-        </p:nvSpPr>
-        <p:spPr>
-          <a:xfrm>
-            <a:off x="548640" y="4059936"/>
-            <a:ext cx="5349240" cy="868680"/>
-          </a:xfrm>
-          <a:prstGeom prst="rect">
-            <a:avLst/>
-          </a:prstGeom>
-          <a:noFill/>
-          <a:ln/>
-        </p:spPr>
-        <p:txBody>
-          <a:bodyPr wrap="square" lIns="0" tIns="0" rIns="0" bIns="0" rtlCol="0" anchor="ctr"/>
-          <a:lstStyle/>
-          <a:p>
-            <a:pPr indent="0" marL="0">
-              <a:lnSpc>
-                <a:spcPct val="130000"/>
-              </a:lnSpc>
-              <a:buNone/>
-            </a:pPr>
-            <a:r>
-              <a:rPr lang="en-US" sz="1100" dirty="0">
-                <a:solidFill>
-                  <a:srgbClr val="73766F"/>
-                </a:solidFill>
-                <a:latin typeface="Calibri" pitchFamily="34" charset="0"/>
-                <a:ea typeface="Calibri" pitchFamily="34" charset="-122"/>
-                <a:cs typeface="Calibri" pitchFamily="34" charset="-120"/>
-              </a:rPr>
-              <a:t>Основной сценарий: семья, бюджет, календарь, продукты, чат   ·   Уведомления, карта, список покупок, оповещения о продуктах   ·   Real-time геолокация, push, аналитика, автоматизация</a:t>
-            </a:r>
-            <a:endParaRPr lang="en-US" sz="1100" dirty="0"/>
-          </a:p>
-        </p:txBody>
-      </p:sp>
-      <p:sp>
-        <p:nvSpPr>
-          <p:cNvPr id="18" name="Text 16"/>
-          <p:cNvSpPr txBox="1"/>
-          <p:nvPr/>
-        </p:nvSpPr>
-        <p:spPr>
-          <a:xfrm>
-            <a:off x="548640" y="5010912"/>
-            <a:ext cx="5349240" cy="365760"/>
-          </a:xfrm>
-          <a:prstGeom prst="rect">
-            <a:avLst/>
-          </a:prstGeom>
-          <a:noFill/>
-          <a:ln/>
-        </p:spPr>
-        <p:txBody>
-          <a:bodyPr wrap="square" lIns="0" tIns="0" rIns="0" bIns="0" rtlCol="0" anchor="ctr"/>
-          <a:lstStyle/>
-          <a:p>
-            <a:pPr indent="0" marL="0">
-              <a:lnSpc>
-                <a:spcPct val="120000"/>
-              </a:lnSpc>
-              <a:buNone/>
-            </a:pPr>
-            <a:r>
-              <a:rPr lang="en-US" sz="1050" i="1" dirty="0">
-                <a:solidFill>
-                  <a:srgbClr val="73766F"/>
-                </a:solidFill>
-                <a:latin typeface="Calibri" pitchFamily="34" charset="0"/>
-                <a:ea typeface="Calibri" pitchFamily="34" charset="-122"/>
-                <a:cs typeface="Calibri" pitchFamily="34" charset="-120"/>
-              </a:rPr>
-              <a:t>07.09.2026 — список покупок добавлен в экосистему, рассматривается для включения в MVP.</a:t>
-            </a:r>
-            <a:endParaRPr lang="en-US" sz="1050" dirty="0"/>
-          </a:p>
-        </p:txBody>
-      </p:sp>
-      <p:sp>
-        <p:nvSpPr>
-          <p:cNvPr id="19" name="Text 17"/>
-          <p:cNvSpPr txBox="1"/>
-          <p:nvPr/>
-        </p:nvSpPr>
-        <p:spPr>
-          <a:xfrm>
-            <a:off x="548640" y="5532120"/>
-            <a:ext cx="5349240" cy="274320"/>
-          </a:xfrm>
-          <a:prstGeom prst="rect">
-            <a:avLst/>
-          </a:prstGeom>
-          <a:noFill/>
-          <a:ln/>
-        </p:spPr>
-        <p:txBody>
-          <a:bodyPr wrap="square" lIns="0" tIns="0" rIns="0" bIns="0" rtlCol="0" anchor="ctr"/>
-          <a:lstStyle/>
-          <a:p>
-            <a:pPr indent="0" marL="0">
-              <a:buNone/>
-            </a:pPr>
-            <a:r>
-              <a:rPr lang="en-US" sz="1050" i="1" dirty="0">
-                <a:solidFill>
-                  <a:srgbClr val="73766F"/>
-                </a:solidFill>
-                <a:latin typeface="Calibri" pitchFamily="34" charset="0"/>
-                <a:ea typeface="Calibri" pitchFamily="34" charset="-122"/>
-                <a:cs typeface="Calibri" pitchFamily="34" charset="-120"/>
-              </a:rPr>
-              <a:t>Стек: React · TypeScript · Node.js · PostgreSQL · WebSocket · Docker</a:t>
-            </a:r>
-            <a:endParaRPr lang="en-US" sz="1050" dirty="0"/>
-          </a:p>
-        </p:txBody>
-      </p:sp>
-      <p:sp>
-        <p:nvSpPr>
-          <p:cNvPr id="20" name="Shape 18"/>
-          <p:cNvSpPr/>
-          <p:nvPr/>
-        </p:nvSpPr>
-        <p:spPr>
-          <a:xfrm>
-            <a:off x="6263640" y="1691640"/>
-            <a:ext cx="5074920" cy="4434840"/>
-          </a:xfrm>
-          <a:prstGeom prst="roundRect">
-            <a:avLst>
-              <a:gd name="adj" fmla="val 2062"/>
+              <a:gd name="adj" fmla="val 2611"/>
             </a:avLst>
           </a:prstGeom>
           <a:solidFill>
@@ -10152,69 +9428,170 @@
       </p:sp>
       <p:sp>
         <p:nvSpPr>
-          <p:cNvPr id="21" name="Text 19"/>
-          <p:cNvSpPr txBox="1"/>
-          <p:nvPr/>
-        </p:nvSpPr>
-        <p:spPr>
-          <a:xfrm>
-            <a:off x="6583680" y="1929384"/>
-            <a:ext cx="4434840" cy="320040"/>
-          </a:xfrm>
-          <a:prstGeom prst="rect">
-            <a:avLst/>
-          </a:prstGeom>
-          <a:noFill/>
-          <a:ln/>
-        </p:spPr>
-        <p:txBody>
-          <a:bodyPr wrap="square" lIns="0" tIns="0" rIns="0" bIns="0" rtlCol="0" anchor="ctr"/>
-          <a:lstStyle/>
-          <a:p>
-            <a:pPr indent="0" marL="0">
-              <a:buNone/>
-            </a:pPr>
-            <a:r>
-              <a:rPr lang="en-US" sz="1500" b="1" dirty="0">
+          <p:cNvPr id="5" name="Shape 3"/>
+          <p:cNvSpPr/>
+          <p:nvPr/>
+        </p:nvSpPr>
+        <p:spPr>
+          <a:xfrm>
+            <a:off x="841248" y="2148840"/>
+            <a:ext cx="822960" cy="822960"/>
+          </a:xfrm>
+          <a:prstGeom prst="ellipse">
+            <a:avLst/>
+          </a:prstGeom>
+          <a:solidFill>
+            <a:srgbClr val="667A55"/>
+          </a:solidFill>
+          <a:ln/>
+        </p:spPr>
+      </p:sp>
+      <p:sp>
+        <p:nvSpPr>
+          <p:cNvPr id="6" name="Text 4"/>
+          <p:cNvSpPr txBox="1"/>
+          <p:nvPr/>
+        </p:nvSpPr>
+        <p:spPr>
+          <a:xfrm>
+            <a:off x="841248" y="2148840"/>
+            <a:ext cx="822960" cy="822960"/>
+          </a:xfrm>
+          <a:prstGeom prst="rect">
+            <a:avLst/>
+          </a:prstGeom>
+          <a:noFill/>
+          <a:ln/>
+        </p:spPr>
+        <p:txBody>
+          <a:bodyPr wrap="square" lIns="0" tIns="0" rIns="0" bIns="0" rtlCol="0" anchor="ctr"/>
+          <a:lstStyle/>
+          <a:p>
+            <a:pPr marL="0" indent="0" algn="ctr">
+              <a:buNone/>
+            </a:pPr>
+            <a:r>
+              <a:rPr lang="en-US" sz="2400" b="1" dirty="0">
+                <a:solidFill>
+                  <a:srgbClr val="FFFFFF"/>
+                </a:solidFill>
+                <a:latin typeface="Cambria" pitchFamily="34" charset="0"/>
+                <a:ea typeface="Cambria" pitchFamily="34" charset="-122"/>
+                <a:cs typeface="Cambria" pitchFamily="34" charset="-120"/>
+              </a:rPr>
+              <a:t>ЦА</a:t>
+            </a:r>
+            <a:endParaRPr lang="en-US" sz="2400" dirty="0"/>
+          </a:p>
+        </p:txBody>
+      </p:sp>
+      <p:sp>
+        <p:nvSpPr>
+          <p:cNvPr id="7" name="Text 5"/>
+          <p:cNvSpPr txBox="1"/>
+          <p:nvPr/>
+        </p:nvSpPr>
+        <p:spPr>
+          <a:xfrm>
+            <a:off x="841248" y="3154680"/>
+            <a:ext cx="2916936" cy="365760"/>
+          </a:xfrm>
+          <a:prstGeom prst="rect">
+            <a:avLst/>
+          </a:prstGeom>
+          <a:noFill/>
+          <a:ln/>
+        </p:spPr>
+        <p:txBody>
+          <a:bodyPr wrap="square" lIns="0" tIns="0" rIns="0" bIns="0" rtlCol="0" anchor="ctr"/>
+          <a:lstStyle/>
+          <a:p>
+            <a:pPr marL="0" indent="0">
+              <a:buNone/>
+            </a:pPr>
+            <a:r>
+              <a:rPr lang="en-US" sz="1650" b="1" dirty="0">
                 <a:solidFill>
                   <a:srgbClr val="20221F"/>
                 </a:solidFill>
-                <a:latin typeface="Calibri" pitchFamily="34" charset="0"/>
-                <a:ea typeface="Calibri" pitchFamily="34" charset="-122"/>
-                <a:cs typeface="Calibri" pitchFamily="34" charset="-120"/>
-              </a:rPr>
-              <a:t>Лендинг Famigo: первые данные</a:t>
-            </a:r>
-            <a:endParaRPr lang="en-US" sz="1500" dirty="0"/>
-          </a:p>
-        </p:txBody>
-      </p:sp>
-      <p:sp>
-        <p:nvSpPr>
-          <p:cNvPr id="22" name="Text 20"/>
-          <p:cNvSpPr txBox="1"/>
-          <p:nvPr/>
-        </p:nvSpPr>
-        <p:spPr>
-          <a:xfrm>
-            <a:off x="6583680" y="2221992"/>
-            <a:ext cx="4434840" cy="274320"/>
-          </a:xfrm>
-          <a:prstGeom prst="rect">
-            <a:avLst/>
-          </a:prstGeom>
-          <a:noFill/>
-          <a:ln/>
-        </p:spPr>
-        <p:txBody>
-          <a:bodyPr wrap="square" lIns="0" tIns="0" rIns="0" bIns="0" rtlCol="0" anchor="ctr"/>
-          <a:lstStyle/>
-          <a:p>
-            <a:pPr indent="0" marL="0">
-              <a:buNone/>
-            </a:pPr>
-            <a:r>
-              <a:rPr lang="en-US" sz="1050" dirty="0">
+                <a:latin typeface="Cambria" pitchFamily="34" charset="0"/>
+                <a:ea typeface="Cambria" pitchFamily="34" charset="-122"/>
+                <a:cs typeface="Cambria" pitchFamily="34" charset="-120"/>
+              </a:rPr>
+              <a:t>Цейсновский А.Э.</a:t>
+            </a:r>
+            <a:endParaRPr lang="en-US" sz="1650" dirty="0"/>
+          </a:p>
+        </p:txBody>
+      </p:sp>
+      <p:sp>
+        <p:nvSpPr>
+          <p:cNvPr id="8" name="Text 6"/>
+          <p:cNvSpPr txBox="1"/>
+          <p:nvPr/>
+        </p:nvSpPr>
+        <p:spPr>
+          <a:xfrm>
+            <a:off x="841248" y="3520440"/>
+            <a:ext cx="2916936" cy="320040"/>
+          </a:xfrm>
+          <a:prstGeom prst="rect">
+            <a:avLst/>
+          </a:prstGeom>
+          <a:noFill/>
+          <a:ln/>
+        </p:spPr>
+        <p:txBody>
+          <a:bodyPr wrap="square" lIns="0" tIns="0" rIns="0" bIns="0" rtlCol="0" anchor="ctr"/>
+          <a:lstStyle/>
+          <a:p>
+            <a:pPr marL="0" indent="0">
+              <a:buNone/>
+            </a:pPr>
+            <a:r>
+              <a:rPr lang="en-US" sz="1250" b="1" dirty="0">
+                <a:solidFill>
+                  <a:srgbClr val="667A55"/>
+                </a:solidFill>
+                <a:latin typeface="Calibri" pitchFamily="34" charset="0"/>
+                <a:ea typeface="Calibri" pitchFamily="34" charset="-122"/>
+                <a:cs typeface="Calibri" pitchFamily="34" charset="-120"/>
+              </a:rPr>
+              <a:t>Тимлид / разработчик</a:t>
+            </a:r>
+            <a:endParaRPr lang="en-US" sz="1250" dirty="0"/>
+          </a:p>
+        </p:txBody>
+      </p:sp>
+      <p:sp>
+        <p:nvSpPr>
+          <p:cNvPr id="9" name="Text 7"/>
+          <p:cNvSpPr txBox="1"/>
+          <p:nvPr/>
+        </p:nvSpPr>
+        <p:spPr>
+          <a:xfrm>
+            <a:off x="841248" y="3931920"/>
+            <a:ext cx="2916936" cy="1280160"/>
+          </a:xfrm>
+          <a:prstGeom prst="rect">
+            <a:avLst/>
+          </a:prstGeom>
+          <a:noFill/>
+          <a:ln/>
+        </p:spPr>
+        <p:txBody>
+          <a:bodyPr wrap="square" lIns="0" tIns="0" rIns="0" bIns="0" rtlCol="0" anchor="ctr"/>
+          <a:lstStyle/>
+          <a:p>
+            <a:pPr marL="0" indent="0">
+              <a:lnSpc>
+                <a:spcPct val="130000"/>
+              </a:lnSpc>
+              <a:buNone/>
+            </a:pPr>
+            <a:r>
+              <a:rPr lang="en-US" sz="1200" dirty="0">
                 <a:solidFill>
                   <a:srgbClr val="73766F"/>
                 </a:solidFill>
@@ -10222,70 +9599,32 @@
                 <a:ea typeface="Calibri" pitchFamily="34" charset="-122"/>
                 <a:cs typeface="Calibri" pitchFamily="34" charset="-120"/>
               </a:rPr>
-              <a:t>Яндекс.Метрика · сентябрь 2026</a:t>
-            </a:r>
-            <a:endParaRPr lang="en-US" sz="1050" dirty="0"/>
-          </a:p>
-        </p:txBody>
-      </p:sp>
-      <p:sp>
-        <p:nvSpPr>
-          <p:cNvPr id="23" name="Text 21"/>
-          <p:cNvSpPr txBox="1"/>
-          <p:nvPr/>
-        </p:nvSpPr>
-        <p:spPr>
-          <a:xfrm>
-            <a:off x="6583680" y="2514600"/>
-            <a:ext cx="4434840" cy="365760"/>
-          </a:xfrm>
-          <a:prstGeom prst="rect">
-            <a:avLst/>
-          </a:prstGeom>
-          <a:noFill/>
-          <a:ln/>
-        </p:spPr>
-        <p:txBody>
-          <a:bodyPr wrap="square" lIns="0" tIns="0" rIns="0" bIns="0" rtlCol="0" anchor="ctr"/>
-          <a:lstStyle/>
-          <a:p>
-            <a:pPr indent="0" marL="0">
-              <a:lnSpc>
-                <a:spcPct val="120000"/>
-              </a:lnSpc>
-              <a:buNone/>
-            </a:pPr>
-            <a:r>
-              <a:rPr lang="en-US" sz="1100" b="1" dirty="0">
-                <a:solidFill>
-                  <a:srgbClr val="20221F"/>
-                </a:solidFill>
-                <a:latin typeface="Calibri" pitchFamily="34" charset="0"/>
-                <a:ea typeface="Calibri" pitchFamily="34" charset="-122"/>
-                <a:cs typeface="Calibri" pitchFamily="34" charset="-120"/>
-              </a:rPr>
-              <a:t>20 посетителей · 21 визит · 49 просмотров · 2,33 стр/визит · 4 м 4 с на сайте · 38,1 % отказов</a:t>
-            </a:r>
-            <a:endParaRPr lang="en-US" sz="1100" dirty="0"/>
-          </a:p>
-        </p:txBody>
-      </p:sp>
-      <p:sp>
-        <p:nvSpPr>
-          <p:cNvPr id="24" name="Shape 22"/>
+              <a:t>Архитектура проекта, разработка, координация команды.</a:t>
+            </a:r>
+            <a:endParaRPr lang="en-US" sz="1200" dirty="0"/>
+          </a:p>
+        </p:txBody>
+      </p:sp>
+      <p:sp>
+        <p:nvSpPr>
+          <p:cNvPr id="10" name="Shape 8"/>
           <p:cNvSpPr/>
           <p:nvPr/>
         </p:nvSpPr>
         <p:spPr>
           <a:xfrm>
-            <a:off x="6583680" y="2916936"/>
-            <a:ext cx="4434840" cy="0"/>
-          </a:xfrm>
-          <a:prstGeom prst="line">
-            <a:avLst/>
-          </a:prstGeom>
-          <a:noFill/>
-          <a:ln w="9525">
+            <a:off x="4233672" y="1828800"/>
+            <a:ext cx="3502152" cy="3566160"/>
+          </a:xfrm>
+          <a:prstGeom prst="roundRect">
+            <a:avLst>
+              <a:gd name="adj" fmla="val 2611"/>
+            </a:avLst>
+          </a:prstGeom>
+          <a:solidFill>
+            <a:srgbClr val="FFFFFF"/>
+          </a:solidFill>
+          <a:ln w="12700">
             <a:solidFill>
               <a:srgbClr val="E4E4DE"/>
             </a:solidFill>
@@ -10295,30 +9634,128 @@
       </p:sp>
       <p:sp>
         <p:nvSpPr>
-          <p:cNvPr id="25" name="Text 23"/>
-          <p:cNvSpPr txBox="1"/>
-          <p:nvPr/>
-        </p:nvSpPr>
-        <p:spPr>
-          <a:xfrm>
-            <a:off x="6583680" y="3008376"/>
-            <a:ext cx="4434840" cy="219456"/>
-          </a:xfrm>
-          <a:prstGeom prst="rect">
-            <a:avLst/>
-          </a:prstGeom>
-          <a:noFill/>
-          <a:ln/>
-        </p:spPr>
-        <p:txBody>
-          <a:bodyPr wrap="square" lIns="0" tIns="0" rIns="0" bIns="0" rtlCol="0" anchor="ctr"/>
-          <a:lstStyle/>
-          <a:p>
-            <a:pPr indent="0" marL="0">
-              <a:buNone/>
-            </a:pPr>
-            <a:r>
-              <a:rPr lang="en-US" sz="1100" b="1" dirty="0">
+          <p:cNvPr id="11" name="Shape 9"/>
+          <p:cNvSpPr/>
+          <p:nvPr/>
+        </p:nvSpPr>
+        <p:spPr>
+          <a:xfrm>
+            <a:off x="4526280" y="2148840"/>
+            <a:ext cx="822960" cy="822960"/>
+          </a:xfrm>
+          <a:prstGeom prst="ellipse">
+            <a:avLst/>
+          </a:prstGeom>
+          <a:solidFill>
+            <a:srgbClr val="667A55"/>
+          </a:solidFill>
+          <a:ln/>
+        </p:spPr>
+      </p:sp>
+      <p:sp>
+        <p:nvSpPr>
+          <p:cNvPr id="12" name="Text 10"/>
+          <p:cNvSpPr txBox="1"/>
+          <p:nvPr/>
+        </p:nvSpPr>
+        <p:spPr>
+          <a:xfrm>
+            <a:off x="4526280" y="2148840"/>
+            <a:ext cx="822960" cy="822960"/>
+          </a:xfrm>
+          <a:prstGeom prst="rect">
+            <a:avLst/>
+          </a:prstGeom>
+          <a:noFill/>
+          <a:ln/>
+        </p:spPr>
+        <p:txBody>
+          <a:bodyPr wrap="square" lIns="0" tIns="0" rIns="0" bIns="0" rtlCol="0" anchor="ctr"/>
+          <a:lstStyle/>
+          <a:p>
+            <a:pPr marL="0" indent="0" algn="ctr">
+              <a:buNone/>
+            </a:pPr>
+            <a:r>
+              <a:rPr lang="en-US" sz="2400" b="1" dirty="0">
+                <a:solidFill>
+                  <a:srgbClr val="FFFFFF"/>
+                </a:solidFill>
+                <a:latin typeface="Cambria" pitchFamily="34" charset="0"/>
+                <a:ea typeface="Cambria" pitchFamily="34" charset="-122"/>
+                <a:cs typeface="Cambria" pitchFamily="34" charset="-120"/>
+              </a:rPr>
+              <a:t>ЛС</a:t>
+            </a:r>
+            <a:endParaRPr lang="en-US" sz="2400" dirty="0"/>
+          </a:p>
+        </p:txBody>
+      </p:sp>
+      <p:sp>
+        <p:nvSpPr>
+          <p:cNvPr id="13" name="Text 11"/>
+          <p:cNvSpPr txBox="1"/>
+          <p:nvPr/>
+        </p:nvSpPr>
+        <p:spPr>
+          <a:xfrm>
+            <a:off x="4526280" y="3154680"/>
+            <a:ext cx="2916936" cy="365760"/>
+          </a:xfrm>
+          <a:prstGeom prst="rect">
+            <a:avLst/>
+          </a:prstGeom>
+          <a:noFill/>
+          <a:ln/>
+        </p:spPr>
+        <p:txBody>
+          <a:bodyPr wrap="square" lIns="0" tIns="0" rIns="0" bIns="0" rtlCol="0" anchor="ctr"/>
+          <a:lstStyle/>
+          <a:p>
+            <a:pPr marL="0" indent="0">
+              <a:buNone/>
+            </a:pPr>
+            <a:r>
+              <a:rPr lang="en-US" sz="1650" b="1" dirty="0">
+                <a:solidFill>
+                  <a:srgbClr val="20221F"/>
+                </a:solidFill>
+                <a:latin typeface="Cambria" pitchFamily="34" charset="0"/>
+                <a:ea typeface="Cambria" pitchFamily="34" charset="-122"/>
+                <a:cs typeface="Cambria" pitchFamily="34" charset="-120"/>
+              </a:rPr>
+              <a:t>Лапутин С.А.</a:t>
+            </a:r>
+            <a:endParaRPr lang="en-US" sz="1650" dirty="0"/>
+          </a:p>
+        </p:txBody>
+      </p:sp>
+      <p:sp>
+        <p:nvSpPr>
+          <p:cNvPr id="14" name="Text 12"/>
+          <p:cNvSpPr txBox="1"/>
+          <p:nvPr/>
+        </p:nvSpPr>
+        <p:spPr>
+          <a:xfrm>
+            <a:off x="4526280" y="3520440"/>
+            <a:ext cx="2916936" cy="320040"/>
+          </a:xfrm>
+          <a:prstGeom prst="rect">
+            <a:avLst/>
+          </a:prstGeom>
+          <a:noFill/>
+          <a:ln/>
+        </p:spPr>
+        <p:txBody>
+          <a:bodyPr wrap="square" lIns="0" tIns="0" rIns="0" bIns="0" rtlCol="0" anchor="ctr"/>
+          <a:lstStyle/>
+          <a:p>
+            <a:pPr marL="0" indent="0">
+              <a:buNone/>
+            </a:pPr>
+            <a:r>
+              <a:rPr lang="en-US" sz="1250" b="1" dirty="0">
                 <a:solidFill>
                   <a:srgbClr val="667A55"/>
                 </a:solidFill>
@@ -10326,54 +9763,205 @@
                 <a:ea typeface="Calibri" pitchFamily="34" charset="-122"/>
                 <a:cs typeface="Calibri" pitchFamily="34" charset="-120"/>
               </a:rPr>
-              <a:t>Источники трафика (посетители)</a:t>
-            </a:r>
-            <a:endParaRPr lang="en-US" sz="1100" dirty="0"/>
-          </a:p>
-        </p:txBody>
-      </p:sp>
-      <p:graphicFrame>
-        <p:nvGraphicFramePr>
-          <p:cNvPr id="26" name="Chart 0" descr=""/>
-          <p:cNvGraphicFramePr/>
-          <p:nvPr/>
-        </p:nvGraphicFramePr>
-        <p:xfrm>
-          <a:off x="6446520" y="3227832"/>
-          <a:ext cx="4709160" cy="1298448"/>
-        </p:xfrm>
-        <a:graphic xmlns:a="http://schemas.openxmlformats.org/drawingml/2006/main">
-          <a:graphicData uri="http://schemas.openxmlformats.org/drawingml/2006/chart">
-            <c:chart xmlns:c="http://schemas.openxmlformats.org/drawingml/2006/chart" r:id="rId1"/>
-          </a:graphicData>
-        </a:graphic>
-      </p:graphicFrame>
-      <p:sp>
-        <p:nvSpPr>
-          <p:cNvPr id="27" name="Text 24"/>
-          <p:cNvSpPr txBox="1"/>
-          <p:nvPr/>
-        </p:nvSpPr>
-        <p:spPr>
-          <a:xfrm>
-            <a:off x="6583680" y="4617720"/>
-            <a:ext cx="4434840" cy="219456"/>
-          </a:xfrm>
-          <a:prstGeom prst="rect">
-            <a:avLst/>
-          </a:prstGeom>
-          <a:noFill/>
-          <a:ln/>
-        </p:spPr>
-        <p:txBody>
-          <a:bodyPr wrap="square" lIns="0" tIns="0" rIns="0" bIns="0" rtlCol="0" anchor="ctr"/>
-          <a:lstStyle/>
-          <a:p>
-            <a:pPr indent="0" marL="0">
-              <a:buNone/>
-            </a:pPr>
-            <a:r>
-              <a:rPr lang="en-US" sz="1100" b="1" dirty="0">
+              <a:t>Разработчик / аналитик</a:t>
+            </a:r>
+            <a:endParaRPr lang="en-US" sz="1250" dirty="0"/>
+          </a:p>
+        </p:txBody>
+      </p:sp>
+      <p:sp>
+        <p:nvSpPr>
+          <p:cNvPr id="15" name="Text 13"/>
+          <p:cNvSpPr txBox="1"/>
+          <p:nvPr/>
+        </p:nvSpPr>
+        <p:spPr>
+          <a:xfrm>
+            <a:off x="4526280" y="3931920"/>
+            <a:ext cx="2916936" cy="1280160"/>
+          </a:xfrm>
+          <a:prstGeom prst="rect">
+            <a:avLst/>
+          </a:prstGeom>
+          <a:noFill/>
+          <a:ln/>
+        </p:spPr>
+        <p:txBody>
+          <a:bodyPr wrap="square" lIns="0" tIns="0" rIns="0" bIns="0" rtlCol="0" anchor="ctr"/>
+          <a:lstStyle/>
+          <a:p>
+            <a:pPr marL="0" indent="0">
+              <a:lnSpc>
+                <a:spcPct val="130000"/>
+              </a:lnSpc>
+              <a:buNone/>
+            </a:pPr>
+            <a:r>
+              <a:rPr lang="en-US" sz="1200" dirty="0">
+                <a:solidFill>
+                  <a:srgbClr val="73766F"/>
+                </a:solidFill>
+                <a:latin typeface="Calibri" pitchFamily="34" charset="0"/>
+                <a:ea typeface="Calibri" pitchFamily="34" charset="-122"/>
+                <a:cs typeface="Calibri" pitchFamily="34" charset="-120"/>
+              </a:rPr>
+              <a:t>Анализ требований, разработка, проработка функциональности.</a:t>
+            </a:r>
+            <a:endParaRPr lang="en-US" sz="1200" dirty="0"/>
+          </a:p>
+        </p:txBody>
+      </p:sp>
+      <p:sp>
+        <p:nvSpPr>
+          <p:cNvPr id="16" name="Shape 14"/>
+          <p:cNvSpPr/>
+          <p:nvPr/>
+        </p:nvSpPr>
+        <p:spPr>
+          <a:xfrm>
+            <a:off x="7918704" y="1828800"/>
+            <a:ext cx="3502152" cy="3566160"/>
+          </a:xfrm>
+          <a:prstGeom prst="roundRect">
+            <a:avLst>
+              <a:gd name="adj" fmla="val 2611"/>
+            </a:avLst>
+          </a:prstGeom>
+          <a:solidFill>
+            <a:srgbClr val="FFFFFF"/>
+          </a:solidFill>
+          <a:ln w="12700">
+            <a:solidFill>
+              <a:srgbClr val="E4E4DE"/>
+            </a:solidFill>
+            <a:prstDash val="solid"/>
+          </a:ln>
+        </p:spPr>
+      </p:sp>
+      <p:sp>
+        <p:nvSpPr>
+          <p:cNvPr id="17" name="Shape 15"/>
+          <p:cNvSpPr/>
+          <p:nvPr/>
+        </p:nvSpPr>
+        <p:spPr>
+          <a:xfrm>
+            <a:off x="8211312" y="2148840"/>
+            <a:ext cx="822960" cy="822960"/>
+          </a:xfrm>
+          <a:prstGeom prst="ellipse">
+            <a:avLst/>
+          </a:prstGeom>
+          <a:solidFill>
+            <a:srgbClr val="667A55"/>
+          </a:solidFill>
+          <a:ln/>
+        </p:spPr>
+      </p:sp>
+      <p:sp>
+        <p:nvSpPr>
+          <p:cNvPr id="18" name="Text 16"/>
+          <p:cNvSpPr txBox="1"/>
+          <p:nvPr/>
+        </p:nvSpPr>
+        <p:spPr>
+          <a:xfrm>
+            <a:off x="8211312" y="2148840"/>
+            <a:ext cx="822960" cy="822960"/>
+          </a:xfrm>
+          <a:prstGeom prst="rect">
+            <a:avLst/>
+          </a:prstGeom>
+          <a:noFill/>
+          <a:ln/>
+        </p:spPr>
+        <p:txBody>
+          <a:bodyPr wrap="square" lIns="0" tIns="0" rIns="0" bIns="0" rtlCol="0" anchor="ctr"/>
+          <a:lstStyle/>
+          <a:p>
+            <a:pPr marL="0" indent="0" algn="ctr">
+              <a:buNone/>
+            </a:pPr>
+            <a:r>
+              <a:rPr lang="en-US" sz="2400" b="1" dirty="0">
+                <a:solidFill>
+                  <a:srgbClr val="FFFFFF"/>
+                </a:solidFill>
+                <a:latin typeface="Cambria" pitchFamily="34" charset="0"/>
+                <a:ea typeface="Cambria" pitchFamily="34" charset="-122"/>
+                <a:cs typeface="Cambria" pitchFamily="34" charset="-120"/>
+              </a:rPr>
+              <a:t>ТГ</a:t>
+            </a:r>
+            <a:endParaRPr lang="en-US" sz="2400" dirty="0"/>
+          </a:p>
+        </p:txBody>
+      </p:sp>
+      <p:sp>
+        <p:nvSpPr>
+          <p:cNvPr id="19" name="Text 17"/>
+          <p:cNvSpPr txBox="1"/>
+          <p:nvPr/>
+        </p:nvSpPr>
+        <p:spPr>
+          <a:xfrm>
+            <a:off x="8211312" y="3154680"/>
+            <a:ext cx="2916936" cy="365760"/>
+          </a:xfrm>
+          <a:prstGeom prst="rect">
+            <a:avLst/>
+          </a:prstGeom>
+          <a:noFill/>
+          <a:ln/>
+        </p:spPr>
+        <p:txBody>
+          <a:bodyPr wrap="square" lIns="0" tIns="0" rIns="0" bIns="0" rtlCol="0" anchor="ctr"/>
+          <a:lstStyle/>
+          <a:p>
+            <a:pPr marL="0" indent="0">
+              <a:buNone/>
+            </a:pPr>
+            <a:r>
+              <a:rPr lang="en-US" sz="1650" b="1" dirty="0">
+                <a:solidFill>
+                  <a:srgbClr val="20221F"/>
+                </a:solidFill>
+                <a:latin typeface="Cambria" pitchFamily="34" charset="0"/>
+                <a:ea typeface="Cambria" pitchFamily="34" charset="-122"/>
+                <a:cs typeface="Cambria" pitchFamily="34" charset="-120"/>
+              </a:rPr>
+              <a:t>Толмачев Г.А.</a:t>
+            </a:r>
+            <a:endParaRPr lang="en-US" sz="1650" dirty="0"/>
+          </a:p>
+        </p:txBody>
+      </p:sp>
+      <p:sp>
+        <p:nvSpPr>
+          <p:cNvPr id="20" name="Text 18"/>
+          <p:cNvSpPr txBox="1"/>
+          <p:nvPr/>
+        </p:nvSpPr>
+        <p:spPr>
+          <a:xfrm>
+            <a:off x="8211312" y="3520440"/>
+            <a:ext cx="2916936" cy="320040"/>
+          </a:xfrm>
+          <a:prstGeom prst="rect">
+            <a:avLst/>
+          </a:prstGeom>
+          <a:noFill/>
+          <a:ln/>
+        </p:spPr>
+        <p:txBody>
+          <a:bodyPr wrap="square" lIns="0" tIns="0" rIns="0" bIns="0" rtlCol="0" anchor="ctr"/>
+          <a:lstStyle/>
+          <a:p>
+            <a:pPr marL="0" indent="0">
+              <a:buNone/>
+            </a:pPr>
+            <a:r>
+              <a:rPr lang="en-US" sz="1250" b="1" dirty="0">
                 <a:solidFill>
                   <a:srgbClr val="667A55"/>
                 </a:solidFill>
@@ -10381,31 +9969,57 @@
                 <a:ea typeface="Calibri" pitchFamily="34" charset="-122"/>
                 <a:cs typeface="Calibri" pitchFamily="34" charset="-120"/>
               </a:rPr>
-              <a:t>Динамика посещений по дням</a:t>
-            </a:r>
-            <a:endParaRPr lang="en-US" sz="1100" dirty="0"/>
-          </a:p>
-        </p:txBody>
-      </p:sp>
-      <p:graphicFrame>
-        <p:nvGraphicFramePr>
-          <p:cNvPr id="28" name="Chart 1" descr=""/>
-          <p:cNvGraphicFramePr/>
-          <p:nvPr/>
-        </p:nvGraphicFramePr>
-        <p:xfrm>
-          <a:off x="6446520" y="4837176"/>
-          <a:ext cx="4709160" cy="1170432"/>
-        </p:xfrm>
-        <a:graphic xmlns:a="http://schemas.openxmlformats.org/drawingml/2006/main">
-          <a:graphicData uri="http://schemas.openxmlformats.org/drawingml/2006/chart">
-            <c:chart xmlns:c="http://schemas.openxmlformats.org/drawingml/2006/chart" r:id="rId2"/>
-          </a:graphicData>
-        </a:graphic>
-      </p:graphicFrame>
-      <p:sp>
-        <p:nvSpPr>
-          <p:cNvPr id="29" name="Text 25"/>
+              <a:t>Разработчик / маркетолог</a:t>
+            </a:r>
+            <a:endParaRPr lang="en-US" sz="1250" dirty="0"/>
+          </a:p>
+        </p:txBody>
+      </p:sp>
+      <p:sp>
+        <p:nvSpPr>
+          <p:cNvPr id="21" name="Text 19"/>
+          <p:cNvSpPr txBox="1"/>
+          <p:nvPr/>
+        </p:nvSpPr>
+        <p:spPr>
+          <a:xfrm>
+            <a:off x="8211312" y="3931920"/>
+            <a:ext cx="2916936" cy="1280160"/>
+          </a:xfrm>
+          <a:prstGeom prst="rect">
+            <a:avLst/>
+          </a:prstGeom>
+          <a:noFill/>
+          <a:ln/>
+        </p:spPr>
+        <p:txBody>
+          <a:bodyPr wrap="square" lIns="0" tIns="0" rIns="0" bIns="0" rtlCol="0" anchor="ctr"/>
+          <a:lstStyle/>
+          <a:p>
+            <a:pPr marL="0" indent="0">
+              <a:lnSpc>
+                <a:spcPct val="130000"/>
+              </a:lnSpc>
+              <a:buNone/>
+            </a:pPr>
+            <a:r>
+              <a:rPr lang="en-US" sz="1200" dirty="0">
+                <a:solidFill>
+                  <a:srgbClr val="73766F"/>
+                </a:solidFill>
+                <a:latin typeface="Calibri" pitchFamily="34" charset="0"/>
+                <a:ea typeface="Calibri" pitchFamily="34" charset="-122"/>
+                <a:cs typeface="Calibri" pitchFamily="34" charset="-120"/>
+              </a:rPr>
+              <a:t>Разработка, маркетинговая стратегия, анализ рынка и аудитории.</a:t>
+            </a:r>
+            <a:endParaRPr lang="en-US" sz="1200" dirty="0"/>
+          </a:p>
+        </p:txBody>
+      </p:sp>
+      <p:sp>
+        <p:nvSpPr>
+          <p:cNvPr id="22" name="Text 20"/>
           <p:cNvSpPr txBox="1"/>
           <p:nvPr/>
         </p:nvSpPr>
@@ -10424,7 +10038,7 @@
           <a:bodyPr wrap="square" lIns="0" tIns="0" rIns="0" bIns="0" rtlCol="0" anchor="ctr"/>
           <a:lstStyle/>
           <a:p>
-            <a:pPr indent="0" marL="0">
+            <a:pPr marL="0" indent="0">
               <a:buNone/>
             </a:pPr>
             <a:r>
@@ -10444,7 +10058,7 @@
       </p:sp>
       <p:sp>
         <p:nvSpPr>
-          <p:cNvPr id="30" name="Text 26"/>
+          <p:cNvPr id="23" name="Text 21"/>
           <p:cNvSpPr txBox="1"/>
           <p:nvPr/>
         </p:nvSpPr>
@@ -10463,7 +10077,7 @@
           <a:bodyPr wrap="square" lIns="0" tIns="0" rIns="0" bIns="0" rtlCol="0" anchor="ctr"/>
           <a:lstStyle/>
           <a:p>
-            <a:pPr algn="r" indent="0" marL="0">
+            <a:pPr marL="0" indent="0" algn="r">
               <a:buNone/>
             </a:pPr>
             <a:r>
@@ -10475,7 +10089,7 @@
                 <a:ea typeface="Calibri" pitchFamily="34" charset="-122"/>
                 <a:cs typeface="Calibri" pitchFamily="34" charset="-120"/>
               </a:rPr>
-              <a:t>8</a:t>
+              <a:t>7</a:t>
             </a:r>
             <a:endParaRPr lang="en-US" sz="1000" dirty="0"/>
           </a:p>
@@ -10497,6 +10111,7 @@
         <a:solidFill>
           <a:srgbClr val="F5F3EE"/>
         </a:solidFill>
+        <a:effectLst/>
       </p:bgPr>
     </p:bg>
     <p:spTree>
@@ -10534,11 +10149,11 @@
           <a:bodyPr wrap="square" lIns="0" tIns="0" rIns="0" bIns="0" rtlCol="0" anchor="ctr"/>
           <a:lstStyle/>
           <a:p>
-            <a:pPr indent="0" marL="0">
-              <a:buNone/>
-            </a:pPr>
-            <a:r>
-              <a:rPr lang="en-US" sz="1300" b="1" spc="200" kern="0" dirty="0">
+            <a:pPr marL="0" indent="0">
+              <a:buNone/>
+            </a:pPr>
+            <a:r>
+              <a:rPr lang="en-US" sz="1300" b="1" kern="0" spc="200" dirty="0">
                 <a:solidFill>
                   <a:srgbClr val="667A55"/>
                 </a:solidFill>
@@ -10573,7 +10188,7 @@
           <a:bodyPr wrap="square" lIns="0" tIns="0" rIns="0" bIns="0" rtlCol="0" anchor="ctr"/>
           <a:lstStyle/>
           <a:p>
-            <a:pPr indent="0" marL="0">
+            <a:pPr marL="0" indent="0">
               <a:buNone/>
             </a:pPr>
             <a:r>
@@ -10612,11 +10227,11 @@
           <a:bodyPr wrap="square" lIns="0" tIns="0" rIns="0" bIns="0" rtlCol="0" anchor="ctr"/>
           <a:lstStyle/>
           <a:p>
-            <a:pPr indent="0" marL="0">
-              <a:buNone/>
-            </a:pPr>
-            <a:r>
-              <a:rPr lang="en-US" sz="5800" b="1" dirty="0">
+            <a:pPr marL="0" indent="0">
+              <a:buNone/>
+            </a:pPr>
+            <a:r>
+              <a:rPr lang="ru-RU" sz="5800" b="1" dirty="0">
                 <a:solidFill>
                   <a:srgbClr val="667A55"/>
                 </a:solidFill>
@@ -10624,7 +10239,7 @@
                 <a:ea typeface="Cambria" pitchFamily="34" charset="-122"/>
                 <a:cs typeface="Cambria" pitchFamily="34" charset="-120"/>
               </a:rPr>
-              <a:t>$50 000</a:t>
+              <a:t>3500000₽</a:t>
             </a:r>
             <a:endParaRPr lang="en-US" sz="5800" dirty="0"/>
           </a:p>
@@ -10632,26 +10247,26 @@
       </p:sp>
       <p:sp>
         <p:nvSpPr>
-          <p:cNvPr id="5" name="Text 3"/>
-          <p:cNvSpPr txBox="1"/>
-          <p:nvPr/>
-        </p:nvSpPr>
-        <p:spPr>
-          <a:xfrm>
-            <a:off x="548640" y="2697480"/>
-            <a:ext cx="4206240" cy="548640"/>
-          </a:xfrm>
-          <a:prstGeom prst="rect">
-            <a:avLst/>
-          </a:prstGeom>
-          <a:noFill/>
-          <a:ln/>
-        </p:spPr>
-        <p:txBody>
-          <a:bodyPr wrap="square" lIns="0" tIns="0" rIns="0" bIns="0" rtlCol="0" anchor="ctr"/>
-          <a:lstStyle/>
-          <a:p>
-            <a:pPr indent="0" marL="0">
+          <p:cNvPr id="6" name="Text 4"/>
+          <p:cNvSpPr txBox="1"/>
+          <p:nvPr/>
+        </p:nvSpPr>
+        <p:spPr>
+          <a:xfrm>
+            <a:off x="548640" y="3429000"/>
+            <a:ext cx="4206240" cy="1005840"/>
+          </a:xfrm>
+          <a:prstGeom prst="rect">
+            <a:avLst/>
+          </a:prstGeom>
+          <a:noFill/>
+          <a:ln/>
+        </p:spPr>
+        <p:txBody>
+          <a:bodyPr wrap="square" lIns="0" tIns="0" rIns="0" bIns="0" rtlCol="0" anchor="ctr"/>
+          <a:lstStyle/>
+          <a:p>
+            <a:pPr marL="0" indent="0">
               <a:lnSpc>
                 <a:spcPct val="130000"/>
               </a:lnSpc>
@@ -10660,45 +10275,58 @@
             <a:r>
               <a:rPr lang="en-US" sz="1350" dirty="0">
                 <a:solidFill>
-                  <a:srgbClr val="73766F"/>
-                </a:solidFill>
-                <a:latin typeface="Calibri" pitchFamily="34" charset="0"/>
-                <a:ea typeface="Calibri" pitchFamily="34" charset="-122"/>
-                <a:cs typeface="Calibri" pitchFamily="34" charset="-120"/>
-              </a:rPr>
-              <a:t>на посевном раунде (бизнес-ангел / грантовая программа)</a:t>
-            </a:r>
-            <a:endParaRPr lang="en-US" sz="1350" dirty="0"/>
-          </a:p>
-        </p:txBody>
-      </p:sp>
-      <p:sp>
-        <p:nvSpPr>
-          <p:cNvPr id="6" name="Text 4"/>
-          <p:cNvSpPr txBox="1"/>
-          <p:nvPr/>
-        </p:nvSpPr>
-        <p:spPr>
-          <a:xfrm>
-            <a:off x="548640" y="3429000"/>
-            <a:ext cx="4206240" cy="1005840"/>
-          </a:xfrm>
-          <a:prstGeom prst="rect">
-            <a:avLst/>
-          </a:prstGeom>
-          <a:noFill/>
-          <a:ln/>
-        </p:spPr>
-        <p:txBody>
-          <a:bodyPr wrap="square" lIns="0" tIns="0" rIns="0" bIns="0" rtlCol="0" anchor="ctr"/>
-          <a:lstStyle/>
-          <a:p>
-            <a:pPr indent="0" marL="0">
-              <a:lnSpc>
-                <a:spcPct val="130000"/>
-              </a:lnSpc>
-              <a:buNone/>
-            </a:pPr>
+                  <a:srgbClr val="20221F"/>
+                </a:solidFill>
+                <a:latin typeface="Calibri" pitchFamily="34" charset="0"/>
+                <a:ea typeface="Calibri" pitchFamily="34" charset="-122"/>
+                <a:cs typeface="Calibri" pitchFamily="34" charset="-120"/>
+              </a:rPr>
+              <a:t>Средства пойдут на завершение MVP, запуск для первых семей-пользователей и </a:t>
+            </a:r>
+            <a:r>
+              <a:rPr lang="en-US" sz="1350" dirty="0" err="1">
+                <a:solidFill>
+                  <a:srgbClr val="20221F"/>
+                </a:solidFill>
+                <a:latin typeface="Calibri" pitchFamily="34" charset="0"/>
+                <a:ea typeface="Calibri" pitchFamily="34" charset="-122"/>
+                <a:cs typeface="Calibri" pitchFamily="34" charset="-120"/>
+              </a:rPr>
+              <a:t>старт</a:t>
+            </a:r>
+            <a:r>
+              <a:rPr lang="ru-RU" sz="1350" dirty="0">
+                <a:solidFill>
+                  <a:srgbClr val="20221F"/>
+                </a:solidFill>
+                <a:latin typeface="Calibri" pitchFamily="34" charset="0"/>
+                <a:ea typeface="Calibri" pitchFamily="34" charset="-122"/>
+                <a:cs typeface="Calibri" pitchFamily="34" charset="-120"/>
+              </a:rPr>
+              <a:t>, </a:t>
+            </a:r>
+            <a:r>
+              <a:rPr lang="en-US" sz="1350" dirty="0" err="1">
+                <a:solidFill>
+                  <a:srgbClr val="20221F"/>
+                </a:solidFill>
+                <a:latin typeface="Calibri" pitchFamily="34" charset="0"/>
+                <a:ea typeface="Calibri" pitchFamily="34" charset="-122"/>
+                <a:cs typeface="Calibri" pitchFamily="34" charset="-120"/>
+              </a:rPr>
+              <a:t>продвижени</a:t>
+            </a:r>
+            <a:r>
+              <a:rPr lang="ru-RU" sz="1350" dirty="0">
+                <a:solidFill>
+                  <a:srgbClr val="20221F"/>
+                </a:solidFill>
+                <a:latin typeface="Calibri" pitchFamily="34" charset="0"/>
+                <a:ea typeface="Calibri" pitchFamily="34" charset="-122"/>
+                <a:cs typeface="Calibri" pitchFamily="34" charset="-120"/>
+              </a:rPr>
+              <a:t>е</a:t>
+            </a:r>
             <a:r>
               <a:rPr lang="en-US" sz="1350" dirty="0">
                 <a:solidFill>
@@ -10708,7 +10336,40 @@
                 <a:ea typeface="Calibri" pitchFamily="34" charset="-122"/>
                 <a:cs typeface="Calibri" pitchFamily="34" charset="-120"/>
               </a:rPr>
-              <a:t>Средства пойдут на завершение MVP, запуск для первых семей-пользователей и старт продвижения продукта.</a:t>
+              <a:t> </a:t>
+            </a:r>
+            <a:r>
+              <a:rPr lang="en-US" sz="1350" dirty="0" err="1">
+                <a:solidFill>
+                  <a:srgbClr val="20221F"/>
+                </a:solidFill>
+                <a:latin typeface="Calibri" pitchFamily="34" charset="0"/>
+                <a:ea typeface="Calibri" pitchFamily="34" charset="-122"/>
+                <a:cs typeface="Calibri" pitchFamily="34" charset="-120"/>
+              </a:rPr>
+              <a:t>продукта</a:t>
+            </a:r>
+            <a:r>
+              <a:rPr lang="ru-RU" sz="1350" dirty="0">
+                <a:solidFill>
+                  <a:srgbClr val="20221F"/>
+                </a:solidFill>
+                <a:latin typeface="Calibri" pitchFamily="34" charset="0"/>
+                <a:ea typeface="Calibri" pitchFamily="34" charset="-122"/>
+                <a:cs typeface="Calibri" pitchFamily="34" charset="-120"/>
+              </a:rPr>
+              <a:t> и его обслуживание в течение 6 месяцев</a:t>
+            </a:r>
+            <a:r>
+              <a:rPr lang="en-US" sz="1350" dirty="0">
+                <a:solidFill>
+                  <a:srgbClr val="20221F"/>
+                </a:solidFill>
+                <a:latin typeface="Calibri" pitchFamily="34" charset="0"/>
+                <a:ea typeface="Calibri" pitchFamily="34" charset="-122"/>
+                <a:cs typeface="Calibri" pitchFamily="34" charset="-120"/>
+              </a:rPr>
+              <a:t>.</a:t>
             </a:r>
             <a:endParaRPr lang="en-US" sz="1350" dirty="0"/>
           </a:p>
@@ -10757,7 +10418,7 @@
           <a:bodyPr wrap="square" lIns="0" tIns="0" rIns="0" bIns="0" rtlCol="0" anchor="ctr"/>
           <a:lstStyle/>
           <a:p>
-            <a:pPr indent="0" marL="0">
+            <a:pPr marL="0" indent="0">
               <a:buNone/>
             </a:pPr>
             <a:r>
@@ -10796,7 +10457,7 @@
           <a:bodyPr wrap="square" lIns="0" tIns="0" rIns="0" bIns="0" rtlCol="0" anchor="ctr"/>
           <a:lstStyle/>
           <a:p>
-            <a:pPr indent="0" marL="0">
+            <a:pPr marL="0" indent="0">
               <a:lnSpc>
                 <a:spcPct val="125000"/>
               </a:lnSpc>
@@ -10838,7 +10499,7 @@
           <a:bodyPr wrap="square" lIns="0" tIns="0" rIns="0" bIns="0" rtlCol="0" anchor="ctr"/>
           <a:lstStyle/>
           <a:p>
-            <a:pPr indent="0" marL="0">
+            <a:pPr marL="0" indent="0">
               <a:buNone/>
             </a:pPr>
             <a:r>
@@ -10858,7 +10519,7 @@
       </p:sp>
       <p:graphicFrame>
         <p:nvGraphicFramePr>
-          <p:cNvPr id="11" name="Chart 0" descr=""/>
+          <p:cNvPr id="11" name="Chart 0"/>
           <p:cNvGraphicFramePr/>
           <p:nvPr/>
         </p:nvGraphicFramePr>
@@ -10866,9 +10527,9 @@
           <a:off x="5623560" y="2148840"/>
           <a:ext cx="4937760" cy="3749040"/>
         </p:xfrm>
-        <a:graphic xmlns:a="http://schemas.openxmlformats.org/drawingml/2006/main">
+        <a:graphic>
           <a:graphicData uri="http://schemas.openxmlformats.org/drawingml/2006/chart">
-            <c:chart xmlns:c="http://schemas.openxmlformats.org/drawingml/2006/chart" r:id="rId1"/>
+            <c:chart xmlns:c="http://schemas.openxmlformats.org/drawingml/2006/chart" xmlns:r="http://schemas.openxmlformats.org/officeDocument/2006/relationships" r:id="rId3"/>
           </a:graphicData>
         </a:graphic>
       </p:graphicFrame>
@@ -10893,7 +10554,7 @@
           <a:bodyPr wrap="square" lIns="0" tIns="0" rIns="0" bIns="0" rtlCol="0" anchor="ctr"/>
           <a:lstStyle/>
           <a:p>
-            <a:pPr indent="0" marL="0">
+            <a:pPr marL="0" indent="0">
               <a:buNone/>
             </a:pPr>
             <a:r>
@@ -10932,7 +10593,7 @@
           <a:bodyPr wrap="square" lIns="0" tIns="0" rIns="0" bIns="0" rtlCol="0" anchor="ctr"/>
           <a:lstStyle/>
           <a:p>
-            <a:pPr algn="r" indent="0" marL="0">
+            <a:pPr marL="0" indent="0" algn="r">
               <a:buNone/>
             </a:pPr>
             <a:r>
@@ -11251,4 +10912,319 @@
     </a:ext>
   </a:extLst>
 </a:theme>
+</file>
+
+<file path=ppt/theme/theme2.xml><?xml version="1.0" encoding="utf-8"?>
+<a:theme xmlns:a="http://schemas.openxmlformats.org/drawingml/2006/main" name="Тема Office">
+  <a:themeElements>
+    <a:clrScheme name="Стандартная">
+      <a:dk1>
+        <a:sysClr val="windowText" lastClr="000000"/>
+      </a:dk1>
+      <a:lt1>
+        <a:sysClr val="window" lastClr="FFFFFF"/>
+      </a:lt1>
+      <a:dk2>
+        <a:srgbClr val="0E2841"/>
+      </a:dk2>
+      <a:lt2>
+        <a:srgbClr val="E8E8E8"/>
+      </a:lt2>
+      <a:accent1>
+        <a:srgbClr val="156082"/>
+      </a:accent1>
+      <a:accent2>
+        <a:srgbClr val="E97132"/>
+      </a:accent2>
+      <a:accent3>
+        <a:srgbClr val="196B24"/>
+      </a:accent3>
+      <a:accent4>
+        <a:srgbClr val="0F9ED5"/>
+      </a:accent4>
+      <a:accent5>
+        <a:srgbClr val="A02B93"/>
+      </a:accent5>
+      <a:accent6>
+        <a:srgbClr val="4EA72E"/>
+      </a:accent6>
+      <a:hlink>
+        <a:srgbClr val="467886"/>
+      </a:hlink>
+      <a:folHlink>
+        <a:srgbClr val="96607D"/>
+      </a:folHlink>
+    </a:clrScheme>
+    <a:fontScheme name="Стандартная">
+      <a:majorFont>
+        <a:latin typeface="Aptos Display" panose="02110004020202020204"/>
+        <a:ea typeface=""/>
+        <a:cs typeface=""/>
+        <a:font script="Jpan" typeface="游ゴシック Light"/>
+        <a:font script="Hang" typeface="맑은 고딕"/>
+        <a:font script="Hans" typeface="等线 Light"/>
+        <a:font script="Hant" typeface="新細明體"/>
+        <a:font script="Arab" typeface="Times New Roman"/>
+        <a:font script="Hebr" typeface="Times New Roman"/>
+        <a:font script="Thai" typeface="Angsana New"/>
+        <a:font script="Ethi" typeface="Nyala"/>
+        <a:font script="Beng" typeface="Vrinda"/>
+        <a:font script="Gujr" typeface="Shruti"/>
+        <a:font script="Khmr" typeface="MoolBoran"/>
+        <a:font script="Knda" typeface="Tunga"/>
+        <a:font script="Guru" typeface="Raavi"/>
+        <a:font script="Cans" typeface="Euphemia"/>
+        <a:font script="Cher" typeface="Plantagenet Cherokee"/>
+        <a:font script="Yiii" typeface="Microsoft Yi Baiti"/>
+        <a:font script="Tibt" typeface="Microsoft Himalaya"/>
+        <a:font script="Thaa" typeface="MV Boli"/>
+        <a:font script="Deva" typeface="Mangal"/>
+        <a:font script="Telu" typeface="Gautami"/>
+        <a:font script="Taml" typeface="Latha"/>
+        <a:font script="Syrc" typeface="Estrangelo Edessa"/>
+        <a:font script="Orya" typeface="Kalinga"/>
+        <a:font script="Mlym" typeface="Kartika"/>
+        <a:font script="Laoo" typeface="DokChampa"/>
+        <a:font script="Sinh" typeface="Iskoola Pota"/>
+        <a:font script="Mong" typeface="Mongolian Baiti"/>
+        <a:font script="Viet" typeface="Times New Roman"/>
+        <a:font script="Uigh" typeface="Microsoft Uighur"/>
+        <a:font script="Geor" typeface="Sylfaen"/>
+        <a:font script="Armn" typeface="Arial"/>
+        <a:font script="Bugi" typeface="Leelawadee UI"/>
+        <a:font script="Bopo" typeface="Microsoft JhengHei"/>
+        <a:font script="Java" typeface="Javanese Text"/>
+        <a:font script="Lisu" typeface="Segoe UI"/>
+        <a:font script="Mymr" typeface="Myanmar Text"/>
+        <a:font script="Nkoo" typeface="Ebrima"/>
+        <a:font script="Olck" typeface="Nirmala UI"/>
+        <a:font script="Osma" typeface="Ebrima"/>
+        <a:font script="Phag" typeface="Phagspa"/>
+        <a:font script="Syrn" typeface="Estrangelo Edessa"/>
+        <a:font script="Syrj" typeface="Estrangelo Edessa"/>
+        <a:font script="Syre" typeface="Estrangelo Edessa"/>
+        <a:font script="Sora" typeface="Nirmala UI"/>
+        <a:font script="Tale" typeface="Microsoft Tai Le"/>
+        <a:font script="Talu" typeface="Microsoft New Tai Lue"/>
+        <a:font script="Tfng" typeface="Ebrima"/>
+      </a:majorFont>
+      <a:minorFont>
+        <a:latin typeface="Aptos" panose="02110004020202020204"/>
+        <a:ea typeface=""/>
+        <a:cs typeface=""/>
+        <a:font script="Jpan" typeface="游ゴシック"/>
+        <a:font script="Hang" typeface="맑은 고딕"/>
+        <a:font script="Hans" typeface="等线"/>
+        <a:font script="Hant" typeface="新細明體"/>
+        <a:font script="Arab" typeface="Arial"/>
+        <a:font script="Hebr" typeface="Arial"/>
+        <a:font script="Thai" typeface="Cordia New"/>
+        <a:font script="Ethi" typeface="Nyala"/>
+        <a:font script="Beng" typeface="Vrinda"/>
+        <a:font script="Gujr" typeface="Shruti"/>
+        <a:font script="Khmr" typeface="DaunPenh"/>
+        <a:font script="Knda" typeface="Tunga"/>
+        <a:font script="Guru" typeface="Raavi"/>
+        <a:font script="Cans" typeface="Euphemia"/>
+        <a:font script="Cher" typeface="Plantagenet Cherokee"/>
+        <a:font script="Yiii" typeface="Microsoft Yi Baiti"/>
+        <a:font script="Tibt" typeface="Microsoft Himalaya"/>
+        <a:font script="Thaa" typeface="MV Boli"/>
+        <a:font script="Deva" typeface="Mangal"/>
+        <a:font script="Telu" typeface="Gautami"/>
+        <a:font script="Taml" typeface="Latha"/>
+        <a:font script="Syrc" typeface="Estrangelo Edessa"/>
+        <a:font script="Orya" typeface="Kalinga"/>
+        <a:font script="Mlym" typeface="Kartika"/>
+        <a:font script="Laoo" typeface="DokChampa"/>
+        <a:font script="Sinh" typeface="Iskoola Pota"/>
+        <a:font script="Mong" typeface="Mongolian Baiti"/>
+        <a:font script="Viet" typeface="Arial"/>
+        <a:font script="Uigh" typeface="Microsoft Uighur"/>
+        <a:font script="Geor" typeface="Sylfaen"/>
+        <a:font script="Armn" typeface="Arial"/>
+        <a:font script="Bugi" typeface="Leelawadee UI"/>
+        <a:font script="Bopo" typeface="Microsoft JhengHei"/>
+        <a:font script="Java" typeface="Javanese Text"/>
+        <a:font script="Lisu" typeface="Segoe UI"/>
+        <a:font script="Mymr" typeface="Myanmar Text"/>
+        <a:font script="Nkoo" typeface="Ebrima"/>
+        <a:font script="Olck" typeface="Nirmala UI"/>
+        <a:font script="Osma" typeface="Ebrima"/>
+        <a:font script="Phag" typeface="Phagspa"/>
+        <a:font script="Syrn" typeface="Estrangelo Edessa"/>
+        <a:font script="Syrj" typeface="Estrangelo Edessa"/>
+        <a:font script="Syre" typeface="Estrangelo Edessa"/>
+        <a:font script="Sora" typeface="Nirmala UI"/>
+        <a:font script="Tale" typeface="Microsoft Tai Le"/>
+        <a:font script="Talu" typeface="Microsoft New Tai Lue"/>
+        <a:font script="Tfng" typeface="Ebrima"/>
+      </a:minorFont>
+    </a:fontScheme>
+    <a:fmtScheme name="Стандартная">
+      <a:fillStyleLst>
+        <a:solidFill>
+          <a:schemeClr val="phClr"/>
+        </a:solidFill>
+        <a:gradFill rotWithShape="1">
+          <a:gsLst>
+            <a:gs pos="0">
+              <a:schemeClr val="phClr">
+                <a:lumMod val="110000"/>
+                <a:satMod val="105000"/>
+                <a:tint val="67000"/>
+              </a:schemeClr>
+            </a:gs>
+            <a:gs pos="50000">
+              <a:schemeClr val="phClr">
+                <a:lumMod val="105000"/>
+                <a:satMod val="103000"/>
+                <a:tint val="73000"/>
+              </a:schemeClr>
+            </a:gs>
+            <a:gs pos="100000">
+              <a:schemeClr val="phClr">
+                <a:lumMod val="105000"/>
+                <a:satMod val="109000"/>
+                <a:tint val="81000"/>
+              </a:schemeClr>
+            </a:gs>
+          </a:gsLst>
+          <a:lin ang="5400000" scaled="0"/>
+        </a:gradFill>
+        <a:gradFill rotWithShape="1">
+          <a:gsLst>
+            <a:gs pos="0">
+              <a:schemeClr val="phClr">
+                <a:satMod val="103000"/>
+                <a:lumMod val="102000"/>
+                <a:tint val="94000"/>
+              </a:schemeClr>
+            </a:gs>
+            <a:gs pos="50000">
+              <a:schemeClr val="phClr">
+                <a:satMod val="110000"/>
+                <a:lumMod val="100000"/>
+                <a:shade val="100000"/>
+              </a:schemeClr>
+            </a:gs>
+            <a:gs pos="100000">
+              <a:schemeClr val="phClr">
+                <a:lumMod val="99000"/>
+                <a:satMod val="120000"/>
+                <a:shade val="78000"/>
+              </a:schemeClr>
+            </a:gs>
+          </a:gsLst>
+          <a:lin ang="5400000" scaled="0"/>
+        </a:gradFill>
+      </a:fillStyleLst>
+      <a:lnStyleLst>
+        <a:ln w="12700" cap="flat" cmpd="sng" algn="ctr">
+          <a:solidFill>
+            <a:schemeClr val="phClr"/>
+          </a:solidFill>
+          <a:prstDash val="solid"/>
+          <a:miter lim="800000"/>
+        </a:ln>
+        <a:ln w="19050" cap="flat" cmpd="sng" algn="ctr">
+          <a:solidFill>
+            <a:schemeClr val="phClr"/>
+          </a:solidFill>
+          <a:prstDash val="solid"/>
+          <a:miter lim="800000"/>
+        </a:ln>
+        <a:ln w="25400" cap="flat" cmpd="sng" algn="ctr">
+          <a:solidFill>
+            <a:schemeClr val="phClr"/>
+          </a:solidFill>
+          <a:prstDash val="solid"/>
+          <a:miter lim="800000"/>
+        </a:ln>
+      </a:lnStyleLst>
+      <a:effectStyleLst>
+        <a:effectStyle>
+          <a:effectLst/>
+        </a:effectStyle>
+        <a:effectStyle>
+          <a:effectLst/>
+        </a:effectStyle>
+        <a:effectStyle>
+          <a:effectLst>
+            <a:outerShdw blurRad="57150" dist="19050" dir="5400000" algn="ctr" rotWithShape="0">
+              <a:srgbClr val="000000">
+                <a:alpha val="63000"/>
+              </a:srgbClr>
+            </a:outerShdw>
+          </a:effectLst>
+        </a:effectStyle>
+      </a:effectStyleLst>
+      <a:bgFillStyleLst>
+        <a:solidFill>
+          <a:schemeClr val="phClr"/>
+        </a:solidFill>
+        <a:solidFill>
+          <a:schemeClr val="phClr">
+            <a:tint val="95000"/>
+            <a:satMod val="170000"/>
+          </a:schemeClr>
+        </a:solidFill>
+        <a:gradFill rotWithShape="1">
+          <a:gsLst>
+            <a:gs pos="0">
+              <a:schemeClr val="phClr">
+                <a:tint val="93000"/>
+                <a:satMod val="150000"/>
+                <a:shade val="98000"/>
+                <a:lumMod val="102000"/>
+              </a:schemeClr>
+            </a:gs>
+            <a:gs pos="50000">
+              <a:schemeClr val="phClr">
+                <a:tint val="98000"/>
+                <a:satMod val="130000"/>
+                <a:shade val="90000"/>
+                <a:lumMod val="103000"/>
+              </a:schemeClr>
+            </a:gs>
+            <a:gs pos="100000">
+              <a:schemeClr val="phClr">
+                <a:shade val="63000"/>
+                <a:satMod val="120000"/>
+              </a:schemeClr>
+            </a:gs>
+          </a:gsLst>
+          <a:lin ang="5400000" scaled="0"/>
+        </a:gradFill>
+      </a:bgFillStyleLst>
+    </a:fmtScheme>
+  </a:themeElements>
+  <a:objectDefaults>
+    <a:lnDef>
+      <a:spPr/>
+      <a:bodyPr/>
+      <a:lstStyle/>
+      <a:style>
+        <a:lnRef idx="2">
+          <a:schemeClr val="accent1"/>
+        </a:lnRef>
+        <a:fillRef idx="0">
+          <a:schemeClr val="accent1"/>
+        </a:fillRef>
+        <a:effectRef idx="1">
+          <a:schemeClr val="accent1"/>
+        </a:effectRef>
+        <a:fontRef idx="minor">
+          <a:schemeClr val="tx1"/>
+        </a:fontRef>
+      </a:style>
+    </a:lnDef>
+  </a:objectDefaults>
+  <a:extraClrSchemeLst/>
+  <a:extLst>
+    <a:ext uri="{05A4C25C-085E-4340-85A3-A5531E510DB2}">
+      <thm15:themeFamily xmlns:thm15="http://schemas.microsoft.com/office/thememl/2012/main" name="Office Theme" id="{2E142A2C-CD16-42D6-873A-C26D2A0506FA}" vid="{1BDDFF52-6CD6-40A5-AB3C-68EB2F1E4D0A}"/>
+    </a:ext>
+  </a:extLst>
+</a:theme>
 </file>